--- a/output/skill-comparison/openai-slides/AIOps_조별 과제_광주_3반_GroundWatch.pptx
+++ b/output/skill-comparison/openai-slides/AIOps_조별 과제_광주_3반_GroundWatch.pptx
@@ -2,38 +2,38 @@
 <file path=ppt/presentation.xml><?xml version="1.0" encoding="utf-8"?>
 <p:presentation xmlns:p="http://schemas.openxmlformats.org/presentationml/2006/main">
   <p:sldMasterIdLst>
-    <p:sldMasterId xmlns:r="http://schemas.openxmlformats.org/officeDocument/2006/relationships" id="2147483648" r:id="Rc3a4341397524903"/>
+    <p:sldMasterId xmlns:r="http://schemas.openxmlformats.org/officeDocument/2006/relationships" id="2147483648" r:id="R7b3559769a9a4433"/>
   </p:sldMasterIdLst>
   <p:notesMasterIdLst>
-    <p:notesMasterId xmlns:r="http://schemas.openxmlformats.org/officeDocument/2006/relationships" r:id="R4540b79e77234764"/>
+    <p:notesMasterId xmlns:r="http://schemas.openxmlformats.org/officeDocument/2006/relationships" r:id="Rd07289641de84765"/>
   </p:notesMasterIdLst>
   <p:sldIdLst>
-    <p:sldId xmlns:r="http://schemas.openxmlformats.org/officeDocument/2006/relationships" id="256" r:id="R448b9f9d49de4fe2"/>
-    <p:sldId xmlns:r="http://schemas.openxmlformats.org/officeDocument/2006/relationships" id="257" r:id="R34a2fec74ec540ac"/>
-    <p:sldId xmlns:r="http://schemas.openxmlformats.org/officeDocument/2006/relationships" id="258" r:id="R2572896e198545cc"/>
-    <p:sldId xmlns:r="http://schemas.openxmlformats.org/officeDocument/2006/relationships" id="259" r:id="R2161da533b9544f1"/>
-    <p:sldId xmlns:r="http://schemas.openxmlformats.org/officeDocument/2006/relationships" id="260" r:id="Ra6cc60db0f76402e"/>
-    <p:sldId xmlns:r="http://schemas.openxmlformats.org/officeDocument/2006/relationships" id="261" r:id="R5cf92bde56e24315"/>
-    <p:sldId xmlns:r="http://schemas.openxmlformats.org/officeDocument/2006/relationships" id="262" r:id="R8526008840ef4e6f"/>
-    <p:sldId xmlns:r="http://schemas.openxmlformats.org/officeDocument/2006/relationships" id="263" r:id="Rb8326f6299c74e21"/>
-    <p:sldId xmlns:r="http://schemas.openxmlformats.org/officeDocument/2006/relationships" id="264" r:id="Rf91a7586918b48f0"/>
-    <p:sldId xmlns:r="http://schemas.openxmlformats.org/officeDocument/2006/relationships" id="265" r:id="Rf1d476183eba430a"/>
-    <p:sldId xmlns:r="http://schemas.openxmlformats.org/officeDocument/2006/relationships" id="266" r:id="Re911604b2b8748ed"/>
-    <p:sldId xmlns:r="http://schemas.openxmlformats.org/officeDocument/2006/relationships" id="267" r:id="R64fdb3f4cf8b43d4"/>
-    <p:sldId xmlns:r="http://schemas.openxmlformats.org/officeDocument/2006/relationships" id="268" r:id="R928d78a43521400d"/>
-    <p:sldId xmlns:r="http://schemas.openxmlformats.org/officeDocument/2006/relationships" id="269" r:id="Rf107e6b0501d4415"/>
-    <p:sldId xmlns:r="http://schemas.openxmlformats.org/officeDocument/2006/relationships" id="270" r:id="Re29d4d89ff00454c"/>
-    <p:sldId xmlns:r="http://schemas.openxmlformats.org/officeDocument/2006/relationships" id="271" r:id="Rb4ce687942cf4612"/>
-    <p:sldId xmlns:r="http://schemas.openxmlformats.org/officeDocument/2006/relationships" id="272" r:id="R118e5515d48e4dec"/>
-    <p:sldId xmlns:r="http://schemas.openxmlformats.org/officeDocument/2006/relationships" id="273" r:id="Rc0e81812ef4d45f0"/>
-    <p:sldId xmlns:r="http://schemas.openxmlformats.org/officeDocument/2006/relationships" id="274" r:id="R1523d711a1db45b8"/>
-    <p:sldId xmlns:r="http://schemas.openxmlformats.org/officeDocument/2006/relationships" id="275" r:id="R15f716ee14e74a64"/>
-    <p:sldId xmlns:r="http://schemas.openxmlformats.org/officeDocument/2006/relationships" id="276" r:id="R82d2e99a776f4065"/>
-    <p:sldId xmlns:r="http://schemas.openxmlformats.org/officeDocument/2006/relationships" id="277" r:id="Rfd262d0e86314db1"/>
-    <p:sldId xmlns:r="http://schemas.openxmlformats.org/officeDocument/2006/relationships" id="278" r:id="Recdfd8c4ec5e4e07"/>
-    <p:sldId xmlns:r="http://schemas.openxmlformats.org/officeDocument/2006/relationships" id="279" r:id="R7a21ff08b97c4a0c"/>
-    <p:sldId xmlns:r="http://schemas.openxmlformats.org/officeDocument/2006/relationships" id="280" r:id="R7a34aaded4be4481"/>
-    <p:sldId xmlns:r="http://schemas.openxmlformats.org/officeDocument/2006/relationships" id="281" r:id="R93fa6290f79f4e97"/>
+    <p:sldId xmlns:r="http://schemas.openxmlformats.org/officeDocument/2006/relationships" id="256" r:id="R34cee7782aa84ee8"/>
+    <p:sldId xmlns:r="http://schemas.openxmlformats.org/officeDocument/2006/relationships" id="257" r:id="Rc28d552e705e4508"/>
+    <p:sldId xmlns:r="http://schemas.openxmlformats.org/officeDocument/2006/relationships" id="258" r:id="R14139129383547b7"/>
+    <p:sldId xmlns:r="http://schemas.openxmlformats.org/officeDocument/2006/relationships" id="259" r:id="R50ae676ecbf54011"/>
+    <p:sldId xmlns:r="http://schemas.openxmlformats.org/officeDocument/2006/relationships" id="260" r:id="R761c1a877dc94d24"/>
+    <p:sldId xmlns:r="http://schemas.openxmlformats.org/officeDocument/2006/relationships" id="261" r:id="R88b57d9de7a64e71"/>
+    <p:sldId xmlns:r="http://schemas.openxmlformats.org/officeDocument/2006/relationships" id="262" r:id="R8cfada5c1ef34082"/>
+    <p:sldId xmlns:r="http://schemas.openxmlformats.org/officeDocument/2006/relationships" id="263" r:id="R49fb46a4c37044ee"/>
+    <p:sldId xmlns:r="http://schemas.openxmlformats.org/officeDocument/2006/relationships" id="264" r:id="Rcf415b59344147ec"/>
+    <p:sldId xmlns:r="http://schemas.openxmlformats.org/officeDocument/2006/relationships" id="265" r:id="R19a916dc17e94970"/>
+    <p:sldId xmlns:r="http://schemas.openxmlformats.org/officeDocument/2006/relationships" id="266" r:id="Rb405744acbfc4cea"/>
+    <p:sldId xmlns:r="http://schemas.openxmlformats.org/officeDocument/2006/relationships" id="267" r:id="R50f0e8142b104e7b"/>
+    <p:sldId xmlns:r="http://schemas.openxmlformats.org/officeDocument/2006/relationships" id="268" r:id="Rbe108573c12f41d3"/>
+    <p:sldId xmlns:r="http://schemas.openxmlformats.org/officeDocument/2006/relationships" id="269" r:id="R3b86ccf49e6b4c7f"/>
+    <p:sldId xmlns:r="http://schemas.openxmlformats.org/officeDocument/2006/relationships" id="270" r:id="Re8009decfc9743ee"/>
+    <p:sldId xmlns:r="http://schemas.openxmlformats.org/officeDocument/2006/relationships" id="271" r:id="R7bde28eb7cdf46e9"/>
+    <p:sldId xmlns:r="http://schemas.openxmlformats.org/officeDocument/2006/relationships" id="272" r:id="R2bd9032af173431b"/>
+    <p:sldId xmlns:r="http://schemas.openxmlformats.org/officeDocument/2006/relationships" id="273" r:id="Rcc57490cf2964be7"/>
+    <p:sldId xmlns:r="http://schemas.openxmlformats.org/officeDocument/2006/relationships" id="274" r:id="R47d69c2104cb4035"/>
+    <p:sldId xmlns:r="http://schemas.openxmlformats.org/officeDocument/2006/relationships" id="275" r:id="Rb7cacc38bfbd4624"/>
+    <p:sldId xmlns:r="http://schemas.openxmlformats.org/officeDocument/2006/relationships" id="276" r:id="Rd6116422f70b4548"/>
+    <p:sldId xmlns:r="http://schemas.openxmlformats.org/officeDocument/2006/relationships" id="277" r:id="R2e2170a110ed41cf"/>
+    <p:sldId xmlns:r="http://schemas.openxmlformats.org/officeDocument/2006/relationships" id="278" r:id="R8b00ac85b4ee49b8"/>
+    <p:sldId xmlns:r="http://schemas.openxmlformats.org/officeDocument/2006/relationships" id="279" r:id="R3085ec2ef32e495e"/>
+    <p:sldId xmlns:r="http://schemas.openxmlformats.org/officeDocument/2006/relationships" id="280" r:id="Reb828bef213e4cc5"/>
+    <p:sldId xmlns:r="http://schemas.openxmlformats.org/officeDocument/2006/relationships" id="281" r:id="R57a7f74d7e454c04"/>
   </p:sldIdLst>
   <p:sldSz cx="12192000" cy="6858000"/>
   <p:notesSz cx="6858000" cy="9144000"/>
@@ -617,12 +617,12 @@
           <a:lstStyle xmlns:a="http://schemas.openxmlformats.org/drawingml/2006/main"/>
           <a:p xmlns:a="http://schemas.openxmlformats.org/drawingml/2006/main">
             <a:r>
-              <a:t>상단 오늘 기준 예측을 선택하면 입력 기준일 2026년 10월 8일과 내일 9일의 예측을 조회합니다. 원본과 합성 구간은 상단 출처 표시로 구분하며 실제 최신 서울 실측을 확보한 것은 아닙니다.</a:t>
-            </a:r>
-          </a:p>
-          <a:p xmlns:a="http://schemas.openxmlformats.org/drawingml/2006/main">
-            <a:r>
-              <a:t> 화면 캡처는 메뉴 문구 간소화 이전의 실제 실행이며, 현재 출처 표시는 시연 데이터 · 합성 자료 포함입니다. 근거: evidence/current-extension-overview.png</a:t>
+              <a:t>기본 오늘 기준 예측에서 입력 기준일 2026년 10월 8일과 내일 9일의 예측을 조회합니다. 원본과 합성 구간은 상단 출처 표시로 구분하며 실제 최신 서울 실측을 확보한 것은 아닙니다.</a:t>
+            </a:r>
+          </a:p>
+          <a:p xmlns:a="http://schemas.openxmlformats.org/drawingml/2006/main">
+            <a:r>
+              <a:t>근거: evidence/ui-comparison-overview.png</a:t>
             </a:r>
           </a:p>
         </p:txBody>
@@ -692,12 +692,12 @@
           <a:lstStyle xmlns:a="http://schemas.openxmlformats.org/drawingml/2006/main"/>
           <a:p xmlns:a="http://schemas.openxmlformats.org/drawingml/2006/main">
             <a:r>
-              <a:t>종로구 상세에서 수위와 강수 입력 이력 및 다음 날 예측을 확인합니다. 최신 입력은 합성이며 내일의 실제 수위와 강수는 아직 없는 값으로 보존합니다. 수동 CSV 학습 이후 종로 모델 버전은 v2이고 나머지 24개는 v1입니다.</a:t>
-            </a:r>
-          </a:p>
-          <a:p xmlns:a="http://schemas.openxmlformats.org/drawingml/2006/main">
-            <a:r>
-              <a:t>근거: evidence/current-extension-detail.png</a:t>
+              <a:t>같은 날짜의 입력 수위와 저장된 예측이 모두 있으면 소수 셋째 자리로 비교합니다. 입력이 더 높으면 해당 숫자와 관측점만 빨강, 낮으면 파랑이며 같거나 비교 예측이 없으면 기본색입니다. 내일 예측은 주황을 유지합니다. 이 색은 위험도나 드리프트 판정이 아닙니다. 이 상세 캡처는 저장 자료 검증의 2026년 7월 31일 입력과 8월 1일 예측입니다. 오늘 예측 캡처와 기준일이 다릅니다. 종로구 상세 상단에서 다음 날 예측 날짜·값과 마지막 입력값을 비교합니다. 그래프 기본은 최근 30일이며 90일·180일로 바꿀 수 있습니다. 자료·모델 정보는 접어서 표시합니다. 최신 입력은 합성이며 내일의 실제 수위와 강수는 아직 없는 값으로 보존합니다. </a:t>
+            </a:r>
+          </a:p>
+          <a:p xmlns:a="http://schemas.openxmlformats.org/drawingml/2006/main">
+            <a:r>
+              <a:t>근거: evidence/ui-comparison-detail.png</a:t>
             </a:r>
           </a:p>
         </p:txBody>
@@ -767,12 +767,12 @@
           <a:lstStyle xmlns:a="http://schemas.openxmlformats.org/drawingml/2006/main"/>
           <a:p xmlns:a="http://schemas.openxmlformats.org/drawingml/2006/main">
             <a:r>
-              <a:t>운영 화면에서 모델 품질과 실제 작업 상태를 확인합니다. 기본 데이터 읽기와 합성 확장 및 초기 학습은 기동 시 자동 수행됩니다. 정규화 CSV와 manifest 수동 등록 및 학습은 접힌 수동 자료 관리에서 보존하며, 실제 202 접수와 ready 및 학습 완료도 검증했습니다. 수동 학습으로 생긴 v2는 별도 자동 후보 승격 실험과 구분합니다.</a:t>
-            </a:r>
-          </a:p>
-          <a:p xmlns:a="http://schemas.openxmlformats.org/drawingml/2006/main">
-            <a:r>
-              <a:t>근거: evidence/current-extension-operations.png</a:t>
+              <a:t>모델 관리 · 시연에서 기본 상황 시연 또는 수위 변화 시연을 시작합니다. 준비 중 예측 요청은 보류하고 준비 완료 후 자동 갱신합니다. 저장 자료 1일·21일 진행으로 정답을 순차 공개하며 실제 처리 일수·재학습·평가 대기·실패를 표시하고 중복 실행을 차단합니다. 이전 모델 복귀는 사유 입력 없이 요청하며 API에는 고정 사유를 기록합니다. 기본 데이터 읽기와 합성 확장 및 초기 학습은 기동 시 자동 수행됩니다. 정규화 CSV와 manifest 수동 등록 및 학습은 접힌 수동 자료 관리에서 보존하며, 기존 multipart HTTP의 202 접수·ready·학습 완료를 검증했습니다. 현재 Computer Use 파일 선택은 확장 접근 오류로 완료하지 못했으며 이 화면 검증과 구분합니다. 수동 학습으로 생긴 v2는 별도 자동 후보 승격 실험과 구분합니다.</a:t>
+            </a:r>
+          </a:p>
+          <a:p xmlns:a="http://schemas.openxmlformats.org/drawingml/2006/main">
+            <a:r>
+              <a:t>근거: evidence/ui-final-operations.png</a:t>
             </a:r>
           </a:p>
         </p:txBody>
@@ -2394,7 +2394,7 @@
           <p:cNvPr id="3" name="Title">
             <a:extLst xmlns:a="http://schemas.openxmlformats.org/drawingml/2006/main">
               <a:ext uri="{FF2B5EF4-FFF2-40B4-BE49-F238E27FC236}">
-                <a16:creationId xmlns:a16="http://schemas.microsoft.com/office/drawing/2014/main" id="{179B76B0-693E-4419-8404-BCD6161C0F6A}"/>
+                <a16:creationId xmlns:a16="http://schemas.microsoft.com/office/drawing/2014/main" id="{9579C3C5-4AD9-4197-AC1A-E3FA4ECB3926}"/>
               </a:ext>
             </a:extLst>
           </p:cNvPr>
@@ -2551,7 +2551,7 @@
           <p:cNvPr id="2" name="Subtitle">
             <a:extLst xmlns:a="http://schemas.openxmlformats.org/drawingml/2006/main">
               <a:ext uri="{FF2B5EF4-FFF2-40B4-BE49-F238E27FC236}">
-                <a16:creationId xmlns:a16="http://schemas.microsoft.com/office/drawing/2014/main" id="{C9A2086F-A216-4331-BBF5-165908DC1A2A}"/>
+                <a16:creationId xmlns:a16="http://schemas.microsoft.com/office/drawing/2014/main" id="{4C84B88C-150F-46ED-997E-4E44DC98A288}"/>
               </a:ext>
             </a:extLst>
           </p:cNvPr>
@@ -2725,7 +2725,7 @@
           <p:cNvPr id="2" name="Section title">
             <a:extLst xmlns:a="http://schemas.openxmlformats.org/drawingml/2006/main">
               <a:ext uri="{FF2B5EF4-FFF2-40B4-BE49-F238E27FC236}">
-                <a16:creationId xmlns:a16="http://schemas.microsoft.com/office/drawing/2014/main" id="{491EB554-5264-4620-AE99-2E0081F130E9}"/>
+                <a16:creationId xmlns:a16="http://schemas.microsoft.com/office/drawing/2014/main" id="{91480CEB-D714-44B7-8790-0D24FDD73A81}"/>
               </a:ext>
             </a:extLst>
           </p:cNvPr>
@@ -2899,7 +2899,7 @@
           <p:cNvPr id="3" name="Title">
             <a:extLst xmlns:a="http://schemas.openxmlformats.org/drawingml/2006/main">
               <a:ext uri="{FF2B5EF4-FFF2-40B4-BE49-F238E27FC236}">
-                <a16:creationId xmlns:a16="http://schemas.microsoft.com/office/drawing/2014/main" id="{F1CB6F6E-5A58-425D-BC19-DED75FB56DE3}"/>
+                <a16:creationId xmlns:a16="http://schemas.microsoft.com/office/drawing/2014/main" id="{9FCC4408-EC14-476E-82C2-5B230F5EAAD1}"/>
               </a:ext>
             </a:extLst>
           </p:cNvPr>
@@ -3056,7 +3056,7 @@
           <p:cNvPr id="2" name="Body">
             <a:extLst xmlns:a="http://schemas.openxmlformats.org/drawingml/2006/main">
               <a:ext uri="{FF2B5EF4-FFF2-40B4-BE49-F238E27FC236}">
-                <a16:creationId xmlns:a16="http://schemas.microsoft.com/office/drawing/2014/main" id="{A1D1C560-6059-450D-8346-7AD7968EF52F}"/>
+                <a16:creationId xmlns:a16="http://schemas.microsoft.com/office/drawing/2014/main" id="{2E6BC583-2285-4DEA-84D4-DB55816A6C4C}"/>
               </a:ext>
             </a:extLst>
           </p:cNvPr>
@@ -3230,7 +3230,7 @@
           <p:cNvPr id="4" name="Title">
             <a:extLst xmlns:a="http://schemas.openxmlformats.org/drawingml/2006/main">
               <a:ext uri="{FF2B5EF4-FFF2-40B4-BE49-F238E27FC236}">
-                <a16:creationId xmlns:a16="http://schemas.microsoft.com/office/drawing/2014/main" id="{C07EF1E2-4389-49BB-855C-341C7ADDF1E9}"/>
+                <a16:creationId xmlns:a16="http://schemas.microsoft.com/office/drawing/2014/main" id="{1629C20E-40CF-4ED4-BF70-05C71302F8E8}"/>
               </a:ext>
             </a:extLst>
           </p:cNvPr>
@@ -3387,7 +3387,7 @@
           <p:cNvPr id="2" name="Left column">
             <a:extLst xmlns:a="http://schemas.openxmlformats.org/drawingml/2006/main">
               <a:ext uri="{FF2B5EF4-FFF2-40B4-BE49-F238E27FC236}">
-                <a16:creationId xmlns:a16="http://schemas.microsoft.com/office/drawing/2014/main" id="{63F28963-FC63-49B9-8090-ACFB6CAABB51}"/>
+                <a16:creationId xmlns:a16="http://schemas.microsoft.com/office/drawing/2014/main" id="{A7D03FDF-532F-466D-ADCF-6481BFF624EA}"/>
               </a:ext>
             </a:extLst>
           </p:cNvPr>
@@ -3544,7 +3544,7 @@
           <p:cNvPr id="3" name="Right column">
             <a:extLst xmlns:a="http://schemas.openxmlformats.org/drawingml/2006/main">
               <a:ext uri="{FF2B5EF4-FFF2-40B4-BE49-F238E27FC236}">
-                <a16:creationId xmlns:a16="http://schemas.microsoft.com/office/drawing/2014/main" id="{6EA8B17C-C9BD-4587-8E93-40C23B90E940}"/>
+                <a16:creationId xmlns:a16="http://schemas.microsoft.com/office/drawing/2014/main" id="{113FD0BF-BAB6-4973-AC4C-39AF3972E41A}"/>
               </a:ext>
             </a:extLst>
           </p:cNvPr>
@@ -3718,7 +3718,7 @@
           <p:cNvPr id="3" name="Title">
             <a:extLst xmlns:a="http://schemas.openxmlformats.org/drawingml/2006/main">
               <a:ext uri="{FF2B5EF4-FFF2-40B4-BE49-F238E27FC236}">
-                <a16:creationId xmlns:a16="http://schemas.microsoft.com/office/drawing/2014/main" id="{AB0A2730-6E52-4F43-8982-83A6438AEF83}"/>
+                <a16:creationId xmlns:a16="http://schemas.microsoft.com/office/drawing/2014/main" id="{D007C4F7-47A0-4548-9DD7-C0C3F3945071}"/>
               </a:ext>
             </a:extLst>
           </p:cNvPr>
@@ -3875,7 +3875,7 @@
           <p:cNvPr id="2" name="Left column">
             <a:extLst xmlns:a="http://schemas.openxmlformats.org/drawingml/2006/main">
               <a:ext uri="{FF2B5EF4-FFF2-40B4-BE49-F238E27FC236}">
-                <a16:creationId xmlns:a16="http://schemas.microsoft.com/office/drawing/2014/main" id="{A8FF32AC-6BAF-4265-947A-9EB4A4B34F0B}"/>
+                <a16:creationId xmlns:a16="http://schemas.microsoft.com/office/drawing/2014/main" id="{898244A8-7014-4AC9-91F7-C1BCF2A9C3E4}"/>
               </a:ext>
             </a:extLst>
           </p:cNvPr>
@@ -4070,12 +4070,12 @@
   </p:cSld>
   <p:clrMap bg1="lt1" tx1="dk1" bg2="lt2" tx2="dk2" accent1="accent1" accent2="accent2" accent3="accent3" accent4="accent4" accent5="accent5" accent6="accent6" hlink="hlink" folHlink="folHlink"/>
   <p:sldLayoutIdLst>
-    <p:sldLayoutId xmlns:r="http://schemas.openxmlformats.org/officeDocument/2006/relationships" id="2147483649" r:id="R9cd03afe6b704df0"/>
-    <p:sldLayoutId xmlns:r="http://schemas.openxmlformats.org/officeDocument/2006/relationships" id="2147483650" r:id="R12ebed374f724e9e"/>
-    <p:sldLayoutId xmlns:r="http://schemas.openxmlformats.org/officeDocument/2006/relationships" id="2147483651" r:id="R24ac203315e74a8d"/>
-    <p:sldLayoutId xmlns:r="http://schemas.openxmlformats.org/officeDocument/2006/relationships" id="2147483652" r:id="R4a6a8b72b2c04267"/>
-    <p:sldLayoutId xmlns:r="http://schemas.openxmlformats.org/officeDocument/2006/relationships" id="2147483653" r:id="Rac0ef6eebb1a46a0"/>
-    <p:sldLayoutId xmlns:r="http://schemas.openxmlformats.org/officeDocument/2006/relationships" id="2147483654" r:id="R3ac208d0c26d41d1"/>
+    <p:sldLayoutId xmlns:r="http://schemas.openxmlformats.org/officeDocument/2006/relationships" id="2147483649" r:id="R481564301639456a"/>
+    <p:sldLayoutId xmlns:r="http://schemas.openxmlformats.org/officeDocument/2006/relationships" id="2147483650" r:id="Rd3a57da8f0b9457f"/>
+    <p:sldLayoutId xmlns:r="http://schemas.openxmlformats.org/officeDocument/2006/relationships" id="2147483651" r:id="R14da0fc9b0e64a92"/>
+    <p:sldLayoutId xmlns:r="http://schemas.openxmlformats.org/officeDocument/2006/relationships" id="2147483652" r:id="Rccf52c0c17ae450d"/>
+    <p:sldLayoutId xmlns:r="http://schemas.openxmlformats.org/officeDocument/2006/relationships" id="2147483653" r:id="R1ca839f9e7154d2d"/>
+    <p:sldLayoutId xmlns:r="http://schemas.openxmlformats.org/officeDocument/2006/relationships" id="2147483654" r:id="Rac4e663471da437c"/>
   </p:sldLayoutIdLst>
   <p:txStyles>
     <p:titleStyle>
@@ -4842,7 +4842,7 @@
           <p:cNvPr id="11" name="">
             <a:extLst xmlns:a="http://schemas.openxmlformats.org/drawingml/2006/main">
               <a:ext uri="{FF2B5EF4-FFF2-40B4-BE49-F238E27FC236}">
-                <a16:creationId xmlns:a16="http://schemas.microsoft.com/office/drawing/2014/main" id="{2F73C631-2C31-463B-9E87-BA5898AF090A}"/>
+                <a16:creationId xmlns:a16="http://schemas.microsoft.com/office/drawing/2014/main" id="{493BC8C4-B90A-4316-A26F-7637B898F417}"/>
               </a:ext>
             </a:extLst>
           </p:cNvPr>
@@ -4910,7 +4910,7 @@
           <p:cNvPr id="2" name="">
             <a:extLst xmlns:a="http://schemas.openxmlformats.org/drawingml/2006/main">
               <a:ext uri="{FF2B5EF4-FFF2-40B4-BE49-F238E27FC236}">
-                <a16:creationId xmlns:a16="http://schemas.microsoft.com/office/drawing/2014/main" id="{8269187F-01A7-40B5-9358-458CAF0BF88D}"/>
+                <a16:creationId xmlns:a16="http://schemas.microsoft.com/office/drawing/2014/main" id="{855EA519-1CC5-480B-872A-9EDB8FF5C454}"/>
               </a:ext>
             </a:extLst>
           </p:cNvPr>
@@ -4960,7 +4960,7 @@
           <p:cNvPr id="3" name="">
             <a:extLst xmlns:a="http://schemas.openxmlformats.org/drawingml/2006/main">
               <a:ext uri="{FF2B5EF4-FFF2-40B4-BE49-F238E27FC236}">
-                <a16:creationId xmlns:a16="http://schemas.microsoft.com/office/drawing/2014/main" id="{1CDFE803-23C1-4F36-97C5-C8AB68ECA03C}"/>
+                <a16:creationId xmlns:a16="http://schemas.microsoft.com/office/drawing/2014/main" id="{5E221C94-4593-46A2-BF16-79CCCD10D4F5}"/>
               </a:ext>
             </a:extLst>
           </p:cNvPr>
@@ -4990,7 +4990,7 @@
           <p:cNvPr id="4" name="">
             <a:extLst xmlns:a="http://schemas.openxmlformats.org/drawingml/2006/main">
               <a:ext uri="{FF2B5EF4-FFF2-40B4-BE49-F238E27FC236}">
-                <a16:creationId xmlns:a16="http://schemas.microsoft.com/office/drawing/2014/main" id="{05DAFBE1-6C96-4D2E-A1F1-0DE4CEC5A582}"/>
+                <a16:creationId xmlns:a16="http://schemas.microsoft.com/office/drawing/2014/main" id="{D22CE112-9A6D-467A-8F20-3C78D21D80F0}"/>
               </a:ext>
             </a:extLst>
           </p:cNvPr>
@@ -5058,7 +5058,7 @@
           <p:cNvPr id="5" name="">
             <a:extLst xmlns:a="http://schemas.openxmlformats.org/drawingml/2006/main">
               <a:ext uri="{FF2B5EF4-FFF2-40B4-BE49-F238E27FC236}">
-                <a16:creationId xmlns:a16="http://schemas.microsoft.com/office/drawing/2014/main" id="{71DE58F0-9534-46F3-BC30-27F7F0C4A34D}"/>
+                <a16:creationId xmlns:a16="http://schemas.microsoft.com/office/drawing/2014/main" id="{061772C0-0D25-4C68-ACE6-47930BFC4BF1}"/>
               </a:ext>
             </a:extLst>
           </p:cNvPr>
@@ -5126,7 +5126,7 @@
           <p:cNvPr id="6" name="">
             <a:extLst xmlns:a="http://schemas.openxmlformats.org/drawingml/2006/main">
               <a:ext uri="{FF2B5EF4-FFF2-40B4-BE49-F238E27FC236}">
-                <a16:creationId xmlns:a16="http://schemas.microsoft.com/office/drawing/2014/main" id="{5846B2A2-73AE-481D-85FC-1059500E737A}"/>
+                <a16:creationId xmlns:a16="http://schemas.microsoft.com/office/drawing/2014/main" id="{3DDBC306-7243-4FF3-80A6-0CB012CB3AA6}"/>
               </a:ext>
             </a:extLst>
           </p:cNvPr>
@@ -5194,7 +5194,7 @@
           <p:cNvPr id="7" name="">
             <a:extLst xmlns:a="http://schemas.openxmlformats.org/drawingml/2006/main">
               <a:ext uri="{FF2B5EF4-FFF2-40B4-BE49-F238E27FC236}">
-                <a16:creationId xmlns:a16="http://schemas.microsoft.com/office/drawing/2014/main" id="{F4A883BE-637B-45A5-BBC5-D3B643CA1ED5}"/>
+                <a16:creationId xmlns:a16="http://schemas.microsoft.com/office/drawing/2014/main" id="{002DFEAE-E2E2-4A7C-9395-1BED678A52AB}"/>
               </a:ext>
             </a:extLst>
           </p:cNvPr>
@@ -5224,7 +5224,7 @@
           <p:cNvPr id="8" name="">
             <a:extLst xmlns:a="http://schemas.openxmlformats.org/drawingml/2006/main">
               <a:ext uri="{FF2B5EF4-FFF2-40B4-BE49-F238E27FC236}">
-                <a16:creationId xmlns:a16="http://schemas.microsoft.com/office/drawing/2014/main" id="{65F51F5D-ADD3-45EB-BBF3-160CEF1B4600}"/>
+                <a16:creationId xmlns:a16="http://schemas.microsoft.com/office/drawing/2014/main" id="{BF247F2B-94A9-4240-96C4-9F0EA6F0606F}"/>
               </a:ext>
             </a:extLst>
           </p:cNvPr>
@@ -5292,7 +5292,7 @@
           <p:cNvPr id="9" name="">
             <a:extLst xmlns:a="http://schemas.openxmlformats.org/drawingml/2006/main">
               <a:ext uri="{FF2B5EF4-FFF2-40B4-BE49-F238E27FC236}">
-                <a16:creationId xmlns:a16="http://schemas.microsoft.com/office/drawing/2014/main" id="{DC09E303-5C69-47A1-9159-ACA19B83AA27}"/>
+                <a16:creationId xmlns:a16="http://schemas.microsoft.com/office/drawing/2014/main" id="{F49ADDCE-07DA-40E0-99F1-017EEBFA4959}"/>
               </a:ext>
             </a:extLst>
           </p:cNvPr>
@@ -5360,7 +5360,7 @@
           <p:cNvPr id="10" name="">
             <a:extLst xmlns:a="http://schemas.openxmlformats.org/drawingml/2006/main">
               <a:ext uri="{FF2B5EF4-FFF2-40B4-BE49-F238E27FC236}">
-                <a16:creationId xmlns:a16="http://schemas.microsoft.com/office/drawing/2014/main" id="{D9FD2691-DAD4-41B6-8F5A-66473C856150}"/>
+                <a16:creationId xmlns:a16="http://schemas.microsoft.com/office/drawing/2014/main" id="{61704784-90C2-4CA1-A8F3-4EFB66C263A6}"/>
               </a:ext>
             </a:extLst>
           </p:cNvPr>
@@ -5426,7 +5426,7 @@
     </p:spTree>
     <p:extLst>
       <p:ext uri="{BB962C8B-B14F-4D97-AF65-F5344CB8AC3E}">
-        <p14:creationId xmlns:p14="http://schemas.microsoft.com/office/powerpoint/2010/main" val="1663567543"/>
+        <p14:creationId xmlns:p14="http://schemas.microsoft.com/office/powerpoint/2010/main" val="1716017794"/>
       </p:ext>
     </p:extLst>
   </p:cSld>
@@ -5457,7 +5457,7 @@
           <p:cNvPr id="26" name="">
             <a:extLst xmlns:a="http://schemas.openxmlformats.org/drawingml/2006/main">
               <a:ext uri="{FF2B5EF4-FFF2-40B4-BE49-F238E27FC236}">
-                <a16:creationId xmlns:a16="http://schemas.microsoft.com/office/drawing/2014/main" id="{9E4C8C4A-8AA5-49A2-93A1-E4AE4391A5F0}"/>
+                <a16:creationId xmlns:a16="http://schemas.microsoft.com/office/drawing/2014/main" id="{7379BC44-1F7C-45BF-906F-A6233C41B6F5}"/>
               </a:ext>
             </a:extLst>
           </p:cNvPr>
@@ -5525,7 +5525,7 @@
           <p:cNvPr id="2" name="">
             <a:extLst xmlns:a="http://schemas.openxmlformats.org/drawingml/2006/main">
               <a:ext uri="{FF2B5EF4-FFF2-40B4-BE49-F238E27FC236}">
-                <a16:creationId xmlns:a16="http://schemas.microsoft.com/office/drawing/2014/main" id="{5FE05C4F-3777-479E-9F76-DB10DA553906}"/>
+                <a16:creationId xmlns:a16="http://schemas.microsoft.com/office/drawing/2014/main" id="{D8677BDF-463C-4532-81E3-6B0947626989}"/>
               </a:ext>
             </a:extLst>
           </p:cNvPr>
@@ -5593,7 +5593,7 @@
           <p:cNvPr id="3" name="">
             <a:extLst xmlns:a="http://schemas.openxmlformats.org/drawingml/2006/main">
               <a:ext uri="{FF2B5EF4-FFF2-40B4-BE49-F238E27FC236}">
-                <a16:creationId xmlns:a16="http://schemas.microsoft.com/office/drawing/2014/main" id="{B13764CC-658E-4E35-AE95-688F2331A8E9}"/>
+                <a16:creationId xmlns:a16="http://schemas.microsoft.com/office/drawing/2014/main" id="{5CE03B47-9BAE-469F-A759-DCF08D206A92}"/>
               </a:ext>
             </a:extLst>
           </p:cNvPr>
@@ -5623,7 +5623,7 @@
           <p:cNvPr id="4" name="">
             <a:extLst xmlns:a="http://schemas.openxmlformats.org/drawingml/2006/main">
               <a:ext uri="{FF2B5EF4-FFF2-40B4-BE49-F238E27FC236}">
-                <a16:creationId xmlns:a16="http://schemas.microsoft.com/office/drawing/2014/main" id="{5DD4B04B-595F-46E6-96E5-7D5013D515BB}"/>
+                <a16:creationId xmlns:a16="http://schemas.microsoft.com/office/drawing/2014/main" id="{981987AD-A2E2-4AD1-9526-5B3E9C6E4514}"/>
               </a:ext>
             </a:extLst>
           </p:cNvPr>
@@ -5691,7 +5691,7 @@
           <p:cNvPr id="5" name="">
             <a:extLst xmlns:a="http://schemas.openxmlformats.org/drawingml/2006/main">
               <a:ext uri="{FF2B5EF4-FFF2-40B4-BE49-F238E27FC236}">
-                <a16:creationId xmlns:a16="http://schemas.microsoft.com/office/drawing/2014/main" id="{55B0FA2B-D25F-4476-AD0E-86BA2B53F778}"/>
+                <a16:creationId xmlns:a16="http://schemas.microsoft.com/office/drawing/2014/main" id="{69D9758E-3E20-4DF5-AE61-D4D723AE3F95}"/>
               </a:ext>
             </a:extLst>
           </p:cNvPr>
@@ -5759,7 +5759,7 @@
           <p:cNvPr id="6" name="">
             <a:extLst xmlns:a="http://schemas.openxmlformats.org/drawingml/2006/main">
               <a:ext uri="{FF2B5EF4-FFF2-40B4-BE49-F238E27FC236}">
-                <a16:creationId xmlns:a16="http://schemas.microsoft.com/office/drawing/2014/main" id="{087C4587-4653-481E-BE22-A0475F91A6F8}"/>
+                <a16:creationId xmlns:a16="http://schemas.microsoft.com/office/drawing/2014/main" id="{9ECD2E0B-04CF-4B46-B474-01ADCC370E24}"/>
               </a:ext>
             </a:extLst>
           </p:cNvPr>
@@ -5827,7 +5827,7 @@
           <p:cNvPr id="7" name="">
             <a:extLst xmlns:a="http://schemas.openxmlformats.org/drawingml/2006/main">
               <a:ext uri="{FF2B5EF4-FFF2-40B4-BE49-F238E27FC236}">
-                <a16:creationId xmlns:a16="http://schemas.microsoft.com/office/drawing/2014/main" id="{33D48D1B-A7A0-4212-9AD9-A5325B365569}"/>
+                <a16:creationId xmlns:a16="http://schemas.microsoft.com/office/drawing/2014/main" id="{8795602B-06B5-40AB-8EC2-7A05CB50E586}"/>
               </a:ext>
             </a:extLst>
           </p:cNvPr>
@@ -5895,7 +5895,7 @@
           <p:cNvPr id="8" name="">
             <a:extLst xmlns:a="http://schemas.openxmlformats.org/drawingml/2006/main">
               <a:ext uri="{FF2B5EF4-FFF2-40B4-BE49-F238E27FC236}">
-                <a16:creationId xmlns:a16="http://schemas.microsoft.com/office/drawing/2014/main" id="{0FA9D91A-7971-49B1-A6F0-90DC2815B576}"/>
+                <a16:creationId xmlns:a16="http://schemas.microsoft.com/office/drawing/2014/main" id="{ECC0CA5F-11F4-4422-8146-EADB54C842B6}"/>
               </a:ext>
             </a:extLst>
           </p:cNvPr>
@@ -5925,7 +5925,7 @@
           <p:cNvPr id="9" name="">
             <a:extLst xmlns:a="http://schemas.openxmlformats.org/drawingml/2006/main">
               <a:ext uri="{FF2B5EF4-FFF2-40B4-BE49-F238E27FC236}">
-                <a16:creationId xmlns:a16="http://schemas.microsoft.com/office/drawing/2014/main" id="{98BBE6F9-3DA4-4562-BB92-715358782D09}"/>
+                <a16:creationId xmlns:a16="http://schemas.microsoft.com/office/drawing/2014/main" id="{AF2120B4-DDD0-406E-A8C6-80211223183B}"/>
               </a:ext>
             </a:extLst>
           </p:cNvPr>
@@ -5993,7 +5993,7 @@
           <p:cNvPr id="10" name="">
             <a:extLst xmlns:a="http://schemas.openxmlformats.org/drawingml/2006/main">
               <a:ext uri="{FF2B5EF4-FFF2-40B4-BE49-F238E27FC236}">
-                <a16:creationId xmlns:a16="http://schemas.microsoft.com/office/drawing/2014/main" id="{ABDC4A47-895A-431B-81EE-C9536DA35885}"/>
+                <a16:creationId xmlns:a16="http://schemas.microsoft.com/office/drawing/2014/main" id="{1DEC120E-3241-48CA-BEF9-52D3CC8F6A66}"/>
               </a:ext>
             </a:extLst>
           </p:cNvPr>
@@ -6061,7 +6061,7 @@
           <p:cNvPr id="11" name="">
             <a:extLst xmlns:a="http://schemas.openxmlformats.org/drawingml/2006/main">
               <a:ext uri="{FF2B5EF4-FFF2-40B4-BE49-F238E27FC236}">
-                <a16:creationId xmlns:a16="http://schemas.microsoft.com/office/drawing/2014/main" id="{FA0F75EA-7196-4978-9E89-4CDB37FB465A}"/>
+                <a16:creationId xmlns:a16="http://schemas.microsoft.com/office/drawing/2014/main" id="{4FD12C16-9026-4530-A608-0A3AAD1FFCAC}"/>
               </a:ext>
             </a:extLst>
           </p:cNvPr>
@@ -6129,7 +6129,7 @@
           <p:cNvPr id="12" name="">
             <a:extLst xmlns:a="http://schemas.openxmlformats.org/drawingml/2006/main">
               <a:ext uri="{FF2B5EF4-FFF2-40B4-BE49-F238E27FC236}">
-                <a16:creationId xmlns:a16="http://schemas.microsoft.com/office/drawing/2014/main" id="{19A75904-8C87-4624-8852-B20893D6F6B5}"/>
+                <a16:creationId xmlns:a16="http://schemas.microsoft.com/office/drawing/2014/main" id="{0A2962A4-47B6-486F-AD2B-27BFE9D56132}"/>
               </a:ext>
             </a:extLst>
           </p:cNvPr>
@@ -6159,7 +6159,7 @@
           <p:cNvPr id="13" name="">
             <a:extLst xmlns:a="http://schemas.openxmlformats.org/drawingml/2006/main">
               <a:ext uri="{FF2B5EF4-FFF2-40B4-BE49-F238E27FC236}">
-                <a16:creationId xmlns:a16="http://schemas.microsoft.com/office/drawing/2014/main" id="{8F10DE98-7898-4FE4-94F7-4D4E5869C8BE}"/>
+                <a16:creationId xmlns:a16="http://schemas.microsoft.com/office/drawing/2014/main" id="{10BCC0EE-C76C-4CB8-8ED7-92733249A379}"/>
               </a:ext>
             </a:extLst>
           </p:cNvPr>
@@ -6227,7 +6227,7 @@
           <p:cNvPr id="14" name="">
             <a:extLst xmlns:a="http://schemas.openxmlformats.org/drawingml/2006/main">
               <a:ext uri="{FF2B5EF4-FFF2-40B4-BE49-F238E27FC236}">
-                <a16:creationId xmlns:a16="http://schemas.microsoft.com/office/drawing/2014/main" id="{9DEB4866-FADC-49F7-87B4-172E29F69255}"/>
+                <a16:creationId xmlns:a16="http://schemas.microsoft.com/office/drawing/2014/main" id="{55E36A88-486A-4E4D-A94A-CAC42674D774}"/>
               </a:ext>
             </a:extLst>
           </p:cNvPr>
@@ -6295,7 +6295,7 @@
           <p:cNvPr id="15" name="">
             <a:extLst xmlns:a="http://schemas.openxmlformats.org/drawingml/2006/main">
               <a:ext uri="{FF2B5EF4-FFF2-40B4-BE49-F238E27FC236}">
-                <a16:creationId xmlns:a16="http://schemas.microsoft.com/office/drawing/2014/main" id="{248AE79E-DA6F-4FC8-8B0D-C6FCB0303F62}"/>
+                <a16:creationId xmlns:a16="http://schemas.microsoft.com/office/drawing/2014/main" id="{75DD61D1-662F-4DC6-B0AD-863856ED6869}"/>
               </a:ext>
             </a:extLst>
           </p:cNvPr>
@@ -6363,7 +6363,7 @@
           <p:cNvPr id="16" name="">
             <a:extLst xmlns:a="http://schemas.openxmlformats.org/drawingml/2006/main">
               <a:ext uri="{FF2B5EF4-FFF2-40B4-BE49-F238E27FC236}">
-                <a16:creationId xmlns:a16="http://schemas.microsoft.com/office/drawing/2014/main" id="{A5D05F72-1F1C-461F-B04E-3815B9018907}"/>
+                <a16:creationId xmlns:a16="http://schemas.microsoft.com/office/drawing/2014/main" id="{A534F40B-98CD-4C0D-A83D-9A19566C441A}"/>
               </a:ext>
             </a:extLst>
           </p:cNvPr>
@@ -6393,7 +6393,7 @@
           <p:cNvPr id="17" name="">
             <a:extLst xmlns:a="http://schemas.openxmlformats.org/drawingml/2006/main">
               <a:ext uri="{FF2B5EF4-FFF2-40B4-BE49-F238E27FC236}">
-                <a16:creationId xmlns:a16="http://schemas.microsoft.com/office/drawing/2014/main" id="{3E489CAB-6C3D-45E2-AF03-2D6974F68D3B}"/>
+                <a16:creationId xmlns:a16="http://schemas.microsoft.com/office/drawing/2014/main" id="{924C61FC-AEC1-493B-9D88-26A066E3DC0F}"/>
               </a:ext>
             </a:extLst>
           </p:cNvPr>
@@ -6461,7 +6461,7 @@
           <p:cNvPr id="18" name="">
             <a:extLst xmlns:a="http://schemas.openxmlformats.org/drawingml/2006/main">
               <a:ext uri="{FF2B5EF4-FFF2-40B4-BE49-F238E27FC236}">
-                <a16:creationId xmlns:a16="http://schemas.microsoft.com/office/drawing/2014/main" id="{CF7ABB56-8D71-46BE-9014-CD9F3BAE4249}"/>
+                <a16:creationId xmlns:a16="http://schemas.microsoft.com/office/drawing/2014/main" id="{9CCEF1EA-8886-48A4-A010-9DEAB779DB19}"/>
               </a:ext>
             </a:extLst>
           </p:cNvPr>
@@ -6529,7 +6529,7 @@
           <p:cNvPr id="19" name="">
             <a:extLst xmlns:a="http://schemas.openxmlformats.org/drawingml/2006/main">
               <a:ext uri="{FF2B5EF4-FFF2-40B4-BE49-F238E27FC236}">
-                <a16:creationId xmlns:a16="http://schemas.microsoft.com/office/drawing/2014/main" id="{CD9595D9-A860-402C-8B2A-EBD127878205}"/>
+                <a16:creationId xmlns:a16="http://schemas.microsoft.com/office/drawing/2014/main" id="{08D095F9-B3B2-42B6-A0AE-7CE5C6306891}"/>
               </a:ext>
             </a:extLst>
           </p:cNvPr>
@@ -6597,7 +6597,7 @@
           <p:cNvPr id="20" name="">
             <a:extLst xmlns:a="http://schemas.openxmlformats.org/drawingml/2006/main">
               <a:ext uri="{FF2B5EF4-FFF2-40B4-BE49-F238E27FC236}">
-                <a16:creationId xmlns:a16="http://schemas.microsoft.com/office/drawing/2014/main" id="{B54BD38F-0D38-4868-9D55-FE2E01004CF9}"/>
+                <a16:creationId xmlns:a16="http://schemas.microsoft.com/office/drawing/2014/main" id="{0795F6A2-E14E-46AB-9BA2-893E475055A4}"/>
               </a:ext>
             </a:extLst>
           </p:cNvPr>
@@ -6627,7 +6627,7 @@
           <p:cNvPr id="21" name="">
             <a:extLst xmlns:a="http://schemas.openxmlformats.org/drawingml/2006/main">
               <a:ext uri="{FF2B5EF4-FFF2-40B4-BE49-F238E27FC236}">
-                <a16:creationId xmlns:a16="http://schemas.microsoft.com/office/drawing/2014/main" id="{3A3F841F-7152-40F1-8FBC-0686969894F2}"/>
+                <a16:creationId xmlns:a16="http://schemas.microsoft.com/office/drawing/2014/main" id="{BABBBCA7-469D-4E79-B561-7345E3CA4D10}"/>
               </a:ext>
             </a:extLst>
           </p:cNvPr>
@@ -6695,7 +6695,7 @@
           <p:cNvPr id="22" name="">
             <a:extLst xmlns:a="http://schemas.openxmlformats.org/drawingml/2006/main">
               <a:ext uri="{FF2B5EF4-FFF2-40B4-BE49-F238E27FC236}">
-                <a16:creationId xmlns:a16="http://schemas.microsoft.com/office/drawing/2014/main" id="{B3437364-9EFC-4F66-A0C8-14B7D9293830}"/>
+                <a16:creationId xmlns:a16="http://schemas.microsoft.com/office/drawing/2014/main" id="{7D117468-19AD-4D3F-AB5A-24E34B72DCAD}"/>
               </a:ext>
             </a:extLst>
           </p:cNvPr>
@@ -6763,7 +6763,7 @@
           <p:cNvPr id="23" name="">
             <a:extLst xmlns:a="http://schemas.openxmlformats.org/drawingml/2006/main">
               <a:ext uri="{FF2B5EF4-FFF2-40B4-BE49-F238E27FC236}">
-                <a16:creationId xmlns:a16="http://schemas.microsoft.com/office/drawing/2014/main" id="{BCAC1409-9DCC-4C90-B756-B464142E2A60}"/>
+                <a16:creationId xmlns:a16="http://schemas.microsoft.com/office/drawing/2014/main" id="{C63114B1-2914-454E-8F5B-1BD0A5BA1F69}"/>
               </a:ext>
             </a:extLst>
           </p:cNvPr>
@@ -6831,7 +6831,7 @@
           <p:cNvPr id="24" name="">
             <a:extLst xmlns:a="http://schemas.openxmlformats.org/drawingml/2006/main">
               <a:ext uri="{FF2B5EF4-FFF2-40B4-BE49-F238E27FC236}">
-                <a16:creationId xmlns:a16="http://schemas.microsoft.com/office/drawing/2014/main" id="{A50EC8F0-06E2-437D-A4AE-E1EB4667FD45}"/>
+                <a16:creationId xmlns:a16="http://schemas.microsoft.com/office/drawing/2014/main" id="{A1C33544-3DAA-4015-ADEF-CA1870CFCB6A}"/>
               </a:ext>
             </a:extLst>
           </p:cNvPr>
@@ -6861,7 +6861,7 @@
           <p:cNvPr id="25" name="">
             <a:extLst xmlns:a="http://schemas.openxmlformats.org/drawingml/2006/main">
               <a:ext uri="{FF2B5EF4-FFF2-40B4-BE49-F238E27FC236}">
-                <a16:creationId xmlns:a16="http://schemas.microsoft.com/office/drawing/2014/main" id="{293173DD-7EC9-4B31-82B0-83C6F9C8CA9F}"/>
+                <a16:creationId xmlns:a16="http://schemas.microsoft.com/office/drawing/2014/main" id="{86BB1095-7423-433A-AA39-17C4306DDE13}"/>
               </a:ext>
             </a:extLst>
           </p:cNvPr>
@@ -6927,7 +6927,7 @@
     </p:spTree>
     <p:extLst>
       <p:ext uri="{BB962C8B-B14F-4D97-AF65-F5344CB8AC3E}">
-        <p14:creationId xmlns:p14="http://schemas.microsoft.com/office/powerpoint/2010/main" val="1297864110"/>
+        <p14:creationId xmlns:p14="http://schemas.microsoft.com/office/powerpoint/2010/main" val="504686754"/>
       </p:ext>
     </p:extLst>
   </p:cSld>
@@ -6958,7 +6958,7 @@
           <p:cNvPr id="7" name="">
             <a:extLst xmlns:a="http://schemas.openxmlformats.org/drawingml/2006/main">
               <a:ext uri="{FF2B5EF4-FFF2-40B4-BE49-F238E27FC236}">
-                <a16:creationId xmlns:a16="http://schemas.microsoft.com/office/drawing/2014/main" id="{655B7928-B145-4106-8F82-C9D2F1D58AE9}"/>
+                <a16:creationId xmlns:a16="http://schemas.microsoft.com/office/drawing/2014/main" id="{03A87D96-8509-4C8B-983E-71FE54E1531F}"/>
               </a:ext>
             </a:extLst>
           </p:cNvPr>
@@ -7026,7 +7026,7 @@
           <p:cNvPr id="2" name="">
             <a:extLst xmlns:a="http://schemas.openxmlformats.org/drawingml/2006/main">
               <a:ext uri="{FF2B5EF4-FFF2-40B4-BE49-F238E27FC236}">
-                <a16:creationId xmlns:a16="http://schemas.microsoft.com/office/drawing/2014/main" id="{EA8446AB-6F2A-4EAF-AF27-8FEF2FC38EAD}"/>
+                <a16:creationId xmlns:a16="http://schemas.microsoft.com/office/drawing/2014/main" id="{76172425-D7A9-45C5-91A8-AB323A614878}"/>
               </a:ext>
             </a:extLst>
           </p:cNvPr>
@@ -7084,7 +7084,7 @@
                 <a:ea typeface="Apple SD Gothic Neo"/>
                 <a:cs typeface="Apple SD Gothic Neo"/>
               </a:rPr>
-              <a:t>01  전체 현황</a:t>
+              <a:t>01  관측소 현황</a:t>
             </a:r>
           </a:p>
         </p:txBody>
@@ -7094,7 +7094,7 @@
           <p:cNvPr id="3" name="">
             <a:extLst xmlns:a="http://schemas.openxmlformats.org/drawingml/2006/main">
               <a:ext uri="{FF2B5EF4-FFF2-40B4-BE49-F238E27FC236}">
-                <a16:creationId xmlns:a16="http://schemas.microsoft.com/office/drawing/2014/main" id="{F6920377-CD8E-47EC-ABB2-BC6C1C86747E}"/>
+                <a16:creationId xmlns:a16="http://schemas.microsoft.com/office/drawing/2014/main" id="{686C75D0-4625-467A-A256-4F1961BF296C}"/>
               </a:ext>
             </a:extLst>
           </p:cNvPr>
@@ -7124,7 +7124,7 @@
           <p:cNvPr id="4" name="">
             <a:extLst xmlns:a="http://schemas.openxmlformats.org/drawingml/2006/main">
               <a:ext uri="{FF2B5EF4-FFF2-40B4-BE49-F238E27FC236}">
-                <a16:creationId xmlns:a16="http://schemas.microsoft.com/office/drawing/2014/main" id="{645BBD24-33D5-4476-8132-C2200B960F51}"/>
+                <a16:creationId xmlns:a16="http://schemas.microsoft.com/office/drawing/2014/main" id="{11F3E844-97EB-4B0F-9E9D-737618931D3D}"/>
               </a:ext>
             </a:extLst>
           </p:cNvPr>
@@ -7182,7 +7182,7 @@
                 <a:ea typeface="Apple SD Gothic Neo"/>
                 <a:cs typeface="Apple SD Gothic Neo"/>
               </a:rPr>
-              <a:t>관측소·모델 버전·준비 상태 확인</a:t>
+              <a:t>관측소 검색 → 상세 보기</a:t>
             </a:r>
           </a:p>
         </p:txBody>
@@ -7192,7 +7192,7 @@
           <p:cNvPr id="5" name="">
             <a:extLst xmlns:a="http://schemas.openxmlformats.org/drawingml/2006/main">
               <a:ext uri="{FF2B5EF4-FFF2-40B4-BE49-F238E27FC236}">
-                <a16:creationId xmlns:a16="http://schemas.microsoft.com/office/drawing/2014/main" id="{6E6DBF00-6A43-44C6-B21B-C9466A108C2B}"/>
+                <a16:creationId xmlns:a16="http://schemas.microsoft.com/office/drawing/2014/main" id="{7012F5D6-E33C-4AB7-9775-B2A28B3897E0}"/>
               </a:ext>
             </a:extLst>
           </p:cNvPr>
@@ -7202,13 +7202,13 @@
           <p:nvPr/>
         </p:nvPicPr>
         <p:blipFill>
-          <a:blip xmlns:r="http://schemas.openxmlformats.org/officeDocument/2006/relationships" xmlns:a="http://schemas.openxmlformats.org/drawingml/2006/main" r:embed="R7480ea8c4f6148ec"/>
+          <a:blip xmlns:r="http://schemas.openxmlformats.org/officeDocument/2006/relationships" xmlns:a="http://schemas.openxmlformats.org/drawingml/2006/main" r:embed="Ra10107e859774512"/>
           <a:stretch xmlns:a="http://schemas.openxmlformats.org/drawingml/2006/main"/>
         </p:blipFill>
         <p:spPr>
           <a:xfrm xmlns:a="http://schemas.openxmlformats.org/drawingml/2006/main">
-            <a:off x="1492358" y="1952625"/>
-            <a:ext cx="9188235" cy="3790950"/>
+            <a:off x="2289592" y="1952625"/>
+            <a:ext cx="7593765" cy="3790950"/>
           </a:xfrm>
           <a:prstGeom xmlns:a="http://schemas.openxmlformats.org/drawingml/2006/main" prst="rect">
             <a:avLst/>
@@ -7220,7 +7220,7 @@
           <p:cNvPr id="6" name="">
             <a:extLst xmlns:a="http://schemas.openxmlformats.org/drawingml/2006/main">
               <a:ext uri="{FF2B5EF4-FFF2-40B4-BE49-F238E27FC236}">
-                <a16:creationId xmlns:a16="http://schemas.microsoft.com/office/drawing/2014/main" id="{D85A7285-6E47-41F6-A9E6-2216EDA6BA3C}"/>
+                <a16:creationId xmlns:a16="http://schemas.microsoft.com/office/drawing/2014/main" id="{3968B3CE-9F8A-45D1-840C-A21F5F727A7F}"/>
               </a:ext>
             </a:extLst>
           </p:cNvPr>
@@ -7278,7 +7278,7 @@
                 <a:ea typeface="Apple SD Gothic Neo"/>
                 <a:cs typeface="Apple SD Gothic Neo"/>
               </a:rPr>
-              <a:t>25개 준비 · 오늘 입력으로 내일 예측  /  원본 화면의 주요 영역 확대</a:t>
+              <a:t>25개 준비 · 오늘 입력으로 내일 예측  /  실제 화면 원본</a:t>
             </a:r>
           </a:p>
         </p:txBody>
@@ -7286,7 +7286,7 @@
     </p:spTree>
     <p:extLst>
       <p:ext uri="{BB962C8B-B14F-4D97-AF65-F5344CB8AC3E}">
-        <p14:creationId xmlns:p14="http://schemas.microsoft.com/office/powerpoint/2010/main" val="2097131928"/>
+        <p14:creationId xmlns:p14="http://schemas.microsoft.com/office/powerpoint/2010/main" val="2022247371"/>
       </p:ext>
     </p:extLst>
   </p:cSld>
@@ -7317,7 +7317,7 @@
           <p:cNvPr id="7" name="">
             <a:extLst xmlns:a="http://schemas.openxmlformats.org/drawingml/2006/main">
               <a:ext uri="{FF2B5EF4-FFF2-40B4-BE49-F238E27FC236}">
-                <a16:creationId xmlns:a16="http://schemas.microsoft.com/office/drawing/2014/main" id="{54AEB4B2-F151-4956-A12E-198914158EC7}"/>
+                <a16:creationId xmlns:a16="http://schemas.microsoft.com/office/drawing/2014/main" id="{E39B5DCE-59BF-4AA1-8B02-9569143A6394}"/>
               </a:ext>
             </a:extLst>
           </p:cNvPr>
@@ -7385,7 +7385,7 @@
           <p:cNvPr id="2" name="">
             <a:extLst xmlns:a="http://schemas.openxmlformats.org/drawingml/2006/main">
               <a:ext uri="{FF2B5EF4-FFF2-40B4-BE49-F238E27FC236}">
-                <a16:creationId xmlns:a16="http://schemas.microsoft.com/office/drawing/2014/main" id="{4559736F-593F-41F4-A1EB-4DFC1544BFE7}"/>
+                <a16:creationId xmlns:a16="http://schemas.microsoft.com/office/drawing/2014/main" id="{1BD50815-D63F-4B3F-8E52-D0CA263521DF}"/>
               </a:ext>
             </a:extLst>
           </p:cNvPr>
@@ -7453,7 +7453,7 @@
           <p:cNvPr id="3" name="">
             <a:extLst xmlns:a="http://schemas.openxmlformats.org/drawingml/2006/main">
               <a:ext uri="{FF2B5EF4-FFF2-40B4-BE49-F238E27FC236}">
-                <a16:creationId xmlns:a16="http://schemas.microsoft.com/office/drawing/2014/main" id="{B0753007-D086-40AE-8B58-0290DAD4D029}"/>
+                <a16:creationId xmlns:a16="http://schemas.microsoft.com/office/drawing/2014/main" id="{72B33F09-7531-4E79-8CAA-319ECEA50EA7}"/>
               </a:ext>
             </a:extLst>
           </p:cNvPr>
@@ -7483,7 +7483,7 @@
           <p:cNvPr id="4" name="">
             <a:extLst xmlns:a="http://schemas.openxmlformats.org/drawingml/2006/main">
               <a:ext uri="{FF2B5EF4-FFF2-40B4-BE49-F238E27FC236}">
-                <a16:creationId xmlns:a16="http://schemas.microsoft.com/office/drawing/2014/main" id="{56024808-FCDD-4322-86DC-9F1253DF2B45}"/>
+                <a16:creationId xmlns:a16="http://schemas.microsoft.com/office/drawing/2014/main" id="{13B7C898-901C-48F6-B5C3-5CD9F390F59F}"/>
               </a:ext>
             </a:extLst>
           </p:cNvPr>
@@ -7541,7 +7541,7 @@
                 <a:ea typeface="Apple SD Gothic Neo"/>
                 <a:cs typeface="Apple SD Gothic Neo"/>
               </a:rPr>
-              <a:t>입력 출처와 다음 날 예측을 함께 확인</a:t>
+              <a:t>예측 날짜·수위·마지막 입력값 비교</a:t>
             </a:r>
           </a:p>
         </p:txBody>
@@ -7551,7 +7551,7 @@
           <p:cNvPr id="5" name="">
             <a:extLst xmlns:a="http://schemas.openxmlformats.org/drawingml/2006/main">
               <a:ext uri="{FF2B5EF4-FFF2-40B4-BE49-F238E27FC236}">
-                <a16:creationId xmlns:a16="http://schemas.microsoft.com/office/drawing/2014/main" id="{183AF22A-EFEE-4BAC-942D-6BF17958B600}"/>
+                <a16:creationId xmlns:a16="http://schemas.microsoft.com/office/drawing/2014/main" id="{20AA284F-B8FE-4F0A-9942-5CCF591E34F0}"/>
               </a:ext>
             </a:extLst>
           </p:cNvPr>
@@ -7561,13 +7561,13 @@
           <p:nvPr/>
         </p:nvPicPr>
         <p:blipFill>
-          <a:blip xmlns:r="http://schemas.openxmlformats.org/officeDocument/2006/relationships" xmlns:a="http://schemas.openxmlformats.org/drawingml/2006/main" r:embed="R91db194223094515"/>
+          <a:blip xmlns:r="http://schemas.openxmlformats.org/officeDocument/2006/relationships" xmlns:a="http://schemas.openxmlformats.org/drawingml/2006/main" r:embed="Rbc0f65bb51c54972"/>
           <a:stretch xmlns:a="http://schemas.openxmlformats.org/drawingml/2006/main"/>
         </p:blipFill>
         <p:spPr>
           <a:xfrm xmlns:a="http://schemas.openxmlformats.org/drawingml/2006/main">
-            <a:off x="3311628" y="1952625"/>
-            <a:ext cx="5549693" cy="3790950"/>
+            <a:off x="2289592" y="1952625"/>
+            <a:ext cx="7593765" cy="3790950"/>
           </a:xfrm>
           <a:prstGeom xmlns:a="http://schemas.openxmlformats.org/drawingml/2006/main" prst="rect">
             <a:avLst/>
@@ -7579,7 +7579,7 @@
           <p:cNvPr id="6" name="">
             <a:extLst xmlns:a="http://schemas.openxmlformats.org/drawingml/2006/main">
               <a:ext uri="{FF2B5EF4-FFF2-40B4-BE49-F238E27FC236}">
-                <a16:creationId xmlns:a16="http://schemas.microsoft.com/office/drawing/2014/main" id="{7C424BF5-EF44-423F-A620-3CDA9A57B33F}"/>
+                <a16:creationId xmlns:a16="http://schemas.microsoft.com/office/drawing/2014/main" id="{7B204451-B1AA-429E-9A31-18E4A2906B14}"/>
               </a:ext>
             </a:extLst>
           </p:cNvPr>
@@ -7637,7 +7637,7 @@
                 <a:ea typeface="Apple SD Gothic Neo"/>
                 <a:cs typeface="Apple SD Gothic Neo"/>
               </a:rPr>
-              <a:t>합성 구간 표시 · 내일 정답은 null  /  원본 화면의 주요 영역 확대</a:t>
+              <a:t>예측 요약 · 최근 30일 · 같은 날짜 입력·예측 비교  /  실제 화면 원본</a:t>
             </a:r>
           </a:p>
         </p:txBody>
@@ -7645,7 +7645,7 @@
     </p:spTree>
     <p:extLst>
       <p:ext uri="{BB962C8B-B14F-4D97-AF65-F5344CB8AC3E}">
-        <p14:creationId xmlns:p14="http://schemas.microsoft.com/office/powerpoint/2010/main" val="1709804455"/>
+        <p14:creationId xmlns:p14="http://schemas.microsoft.com/office/powerpoint/2010/main" val="966778301"/>
       </p:ext>
     </p:extLst>
   </p:cSld>
@@ -7676,7 +7676,7 @@
           <p:cNvPr id="7" name="">
             <a:extLst xmlns:a="http://schemas.openxmlformats.org/drawingml/2006/main">
               <a:ext uri="{FF2B5EF4-FFF2-40B4-BE49-F238E27FC236}">
-                <a16:creationId xmlns:a16="http://schemas.microsoft.com/office/drawing/2014/main" id="{959437A8-5FF9-4003-AD1F-B39A8BBB3212}"/>
+                <a16:creationId xmlns:a16="http://schemas.microsoft.com/office/drawing/2014/main" id="{C0616C83-48DB-410C-9CAF-6FA8ED300C9F}"/>
               </a:ext>
             </a:extLst>
           </p:cNvPr>
@@ -7744,7 +7744,7 @@
           <p:cNvPr id="2" name="">
             <a:extLst xmlns:a="http://schemas.openxmlformats.org/drawingml/2006/main">
               <a:ext uri="{FF2B5EF4-FFF2-40B4-BE49-F238E27FC236}">
-                <a16:creationId xmlns:a16="http://schemas.microsoft.com/office/drawing/2014/main" id="{0F8665E8-DB97-41C7-A9F8-AE998AA2F7A1}"/>
+                <a16:creationId xmlns:a16="http://schemas.microsoft.com/office/drawing/2014/main" id="{64DFFAB2-B678-43B8-A804-D24DF4896FE1}"/>
               </a:ext>
             </a:extLst>
           </p:cNvPr>
@@ -7802,7 +7802,7 @@
                 <a:ea typeface="Apple SD Gothic Neo"/>
                 <a:cs typeface="Apple SD Gothic Neo"/>
               </a:rPr>
-              <a:t>03  데이터·모델 운영</a:t>
+              <a:t>03  모델 관리 · 시연</a:t>
             </a:r>
           </a:p>
         </p:txBody>
@@ -7812,7 +7812,7 @@
           <p:cNvPr id="3" name="">
             <a:extLst xmlns:a="http://schemas.openxmlformats.org/drawingml/2006/main">
               <a:ext uri="{FF2B5EF4-FFF2-40B4-BE49-F238E27FC236}">
-                <a16:creationId xmlns:a16="http://schemas.microsoft.com/office/drawing/2014/main" id="{043881B8-20B3-453B-8332-9110DDD664B2}"/>
+                <a16:creationId xmlns:a16="http://schemas.microsoft.com/office/drawing/2014/main" id="{7CB48212-0ADA-42B0-BBB6-B1923512B6D5}"/>
               </a:ext>
             </a:extLst>
           </p:cNvPr>
@@ -7842,7 +7842,7 @@
           <p:cNvPr id="4" name="">
             <a:extLst xmlns:a="http://schemas.openxmlformats.org/drawingml/2006/main">
               <a:ext uri="{FF2B5EF4-FFF2-40B4-BE49-F238E27FC236}">
-                <a16:creationId xmlns:a16="http://schemas.microsoft.com/office/drawing/2014/main" id="{77D72272-F2F6-4E3B-867C-1127E1228FD6}"/>
+                <a16:creationId xmlns:a16="http://schemas.microsoft.com/office/drawing/2014/main" id="{2FD547E5-C82E-4FAF-82D7-B7AFF1DA48A3}"/>
               </a:ext>
             </a:extLst>
           </p:cNvPr>
@@ -7900,7 +7900,7 @@
                 <a:ea typeface="Apple SD Gothic Neo"/>
                 <a:cs typeface="Apple SD Gothic Neo"/>
               </a:rPr>
-              <a:t>모델 품질·버전·작업 상태 확인</a:t>
+              <a:t>상황 선택 → 저장 자료 진행 → 결과 확인</a:t>
             </a:r>
           </a:p>
         </p:txBody>
@@ -7910,7 +7910,7 @@
           <p:cNvPr id="5" name="">
             <a:extLst xmlns:a="http://schemas.openxmlformats.org/drawingml/2006/main">
               <a:ext uri="{FF2B5EF4-FFF2-40B4-BE49-F238E27FC236}">
-                <a16:creationId xmlns:a16="http://schemas.microsoft.com/office/drawing/2014/main" id="{3CB204EE-3CB5-4F12-AB6C-4B1A656020E8}"/>
+                <a16:creationId xmlns:a16="http://schemas.microsoft.com/office/drawing/2014/main" id="{ACA0E0BB-9427-40EB-8B04-DFB892C0F328}"/>
               </a:ext>
             </a:extLst>
           </p:cNvPr>
@@ -7920,13 +7920,13 @@
           <p:nvPr/>
         </p:nvPicPr>
         <p:blipFill>
-          <a:blip xmlns:r="http://schemas.openxmlformats.org/officeDocument/2006/relationships" xmlns:a="http://schemas.openxmlformats.org/drawingml/2006/main" r:embed="R68ee2cf6ec374de7"/>
+          <a:blip xmlns:r="http://schemas.openxmlformats.org/officeDocument/2006/relationships" xmlns:a="http://schemas.openxmlformats.org/drawingml/2006/main" r:embed="R66296798c4db4b32"/>
           <a:stretch xmlns:a="http://schemas.openxmlformats.org/drawingml/2006/main"/>
         </p:blipFill>
         <p:spPr>
           <a:xfrm xmlns:a="http://schemas.openxmlformats.org/drawingml/2006/main">
-            <a:off x="1989803" y="1952625"/>
-            <a:ext cx="8193344" cy="3790950"/>
+            <a:off x="2052812" y="1952625"/>
+            <a:ext cx="8067327" cy="3790950"/>
           </a:xfrm>
           <a:prstGeom xmlns:a="http://schemas.openxmlformats.org/drawingml/2006/main" prst="rect">
             <a:avLst/>
@@ -7938,7 +7938,7 @@
           <p:cNvPr id="6" name="">
             <a:extLst xmlns:a="http://schemas.openxmlformats.org/drawingml/2006/main">
               <a:ext uri="{FF2B5EF4-FFF2-40B4-BE49-F238E27FC236}">
-                <a16:creationId xmlns:a16="http://schemas.microsoft.com/office/drawing/2014/main" id="{67CB378F-2E32-47D2-885A-A1CDAF2A2559}"/>
+                <a16:creationId xmlns:a16="http://schemas.microsoft.com/office/drawing/2014/main" id="{7CE0EADE-305C-490C-A0CE-9DDF80D31AB9}"/>
               </a:ext>
             </a:extLst>
           </p:cNvPr>
@@ -7996,7 +7996,7 @@
                 <a:ea typeface="Apple SD Gothic Neo"/>
                 <a:cs typeface="Apple SD Gothic Neo"/>
               </a:rPr>
-              <a:t>품질 감시 → 모델 버전 → 작업·이벤트 확인  /  원본 화면의 주요 영역 확대</a:t>
+              <a:t>실제 진행률 · 재학습 · 평가 대기 · 이전 모델 복귀  /  실제 화면 원본</a:t>
             </a:r>
           </a:p>
         </p:txBody>
@@ -8004,7 +8004,7 @@
     </p:spTree>
     <p:extLst>
       <p:ext uri="{BB962C8B-B14F-4D97-AF65-F5344CB8AC3E}">
-        <p14:creationId xmlns:p14="http://schemas.microsoft.com/office/powerpoint/2010/main" val="243394351"/>
+        <p14:creationId xmlns:p14="http://schemas.microsoft.com/office/powerpoint/2010/main" val="1208841489"/>
       </p:ext>
     </p:extLst>
   </p:cSld>
@@ -8035,7 +8035,7 @@
           <p:cNvPr id="12" name="">
             <a:extLst xmlns:a="http://schemas.openxmlformats.org/drawingml/2006/main">
               <a:ext uri="{FF2B5EF4-FFF2-40B4-BE49-F238E27FC236}">
-                <a16:creationId xmlns:a16="http://schemas.microsoft.com/office/drawing/2014/main" id="{2DF68BBC-FAAC-4315-B662-A0032867949F}"/>
+                <a16:creationId xmlns:a16="http://schemas.microsoft.com/office/drawing/2014/main" id="{5E314F9A-3B76-424E-B9EA-CCDF9906BA86}"/>
               </a:ext>
             </a:extLst>
           </p:cNvPr>
@@ -8103,7 +8103,7 @@
           <p:cNvPr id="2" name="">
             <a:extLst xmlns:a="http://schemas.openxmlformats.org/drawingml/2006/main">
               <a:ext uri="{FF2B5EF4-FFF2-40B4-BE49-F238E27FC236}">
-                <a16:creationId xmlns:a16="http://schemas.microsoft.com/office/drawing/2014/main" id="{0CED11BE-5195-40E7-910C-F0C10DD88E1B}"/>
+                <a16:creationId xmlns:a16="http://schemas.microsoft.com/office/drawing/2014/main" id="{8B1B5FB1-BA40-4B49-A3D2-AE5AA85F63B6}"/>
               </a:ext>
             </a:extLst>
           </p:cNvPr>
@@ -8171,7 +8171,7 @@
           <p:cNvPr id="3" name="">
             <a:extLst xmlns:a="http://schemas.openxmlformats.org/drawingml/2006/main">
               <a:ext uri="{FF2B5EF4-FFF2-40B4-BE49-F238E27FC236}">
-                <a16:creationId xmlns:a16="http://schemas.microsoft.com/office/drawing/2014/main" id="{51C80A2E-18A1-4AE0-824B-549027A0E29D}"/>
+                <a16:creationId xmlns:a16="http://schemas.microsoft.com/office/drawing/2014/main" id="{2327EEB6-BB45-4B4F-908D-E716BD7E3EB3}"/>
               </a:ext>
             </a:extLst>
           </p:cNvPr>
@@ -8201,7 +8201,7 @@
           <p:cNvPr id="4" name="">
             <a:extLst xmlns:a="http://schemas.openxmlformats.org/drawingml/2006/main">
               <a:ext uri="{FF2B5EF4-FFF2-40B4-BE49-F238E27FC236}">
-                <a16:creationId xmlns:a16="http://schemas.microsoft.com/office/drawing/2014/main" id="{F6673338-1707-4F84-A4FB-4ED524BF82D4}"/>
+                <a16:creationId xmlns:a16="http://schemas.microsoft.com/office/drawing/2014/main" id="{67B83366-304A-4A1E-9435-28F9BFB66A46}"/>
               </a:ext>
             </a:extLst>
           </p:cNvPr>
@@ -8269,7 +8269,7 @@
           <p:cNvPr id="5" name="">
             <a:extLst xmlns:a="http://schemas.openxmlformats.org/drawingml/2006/main">
               <a:ext uri="{FF2B5EF4-FFF2-40B4-BE49-F238E27FC236}">
-                <a16:creationId xmlns:a16="http://schemas.microsoft.com/office/drawing/2014/main" id="{A5B72B4F-AE1B-4026-811A-525B1246C3BA}"/>
+                <a16:creationId xmlns:a16="http://schemas.microsoft.com/office/drawing/2014/main" id="{7EDDF3F2-B9F1-4586-B3EB-B431377FFCDA}"/>
               </a:ext>
             </a:extLst>
           </p:cNvPr>
@@ -8337,7 +8337,7 @@
           <p:cNvPr id="6" name="">
             <a:extLst xmlns:a="http://schemas.openxmlformats.org/drawingml/2006/main">
               <a:ext uri="{FF2B5EF4-FFF2-40B4-BE49-F238E27FC236}">
-                <a16:creationId xmlns:a16="http://schemas.microsoft.com/office/drawing/2014/main" id="{A7B460F8-4106-4695-9DA3-E8267B744841}"/>
+                <a16:creationId xmlns:a16="http://schemas.microsoft.com/office/drawing/2014/main" id="{99AD2AE6-6E1B-4D6A-A1D3-4323F92D9586}"/>
               </a:ext>
             </a:extLst>
           </p:cNvPr>
@@ -8428,7 +8428,7 @@
           <p:cNvPr id="7" name="">
             <a:extLst xmlns:a="http://schemas.openxmlformats.org/drawingml/2006/main">
               <a:ext uri="{FF2B5EF4-FFF2-40B4-BE49-F238E27FC236}">
-                <a16:creationId xmlns:a16="http://schemas.microsoft.com/office/drawing/2014/main" id="{F13FF8FD-8D73-4186-AA44-BAFD66FB9453}"/>
+                <a16:creationId xmlns:a16="http://schemas.microsoft.com/office/drawing/2014/main" id="{7B6459A2-84F2-4F00-8AF6-621C4C2A8BB5}"/>
               </a:ext>
             </a:extLst>
           </p:cNvPr>
@@ -8496,7 +8496,7 @@
           <p:cNvPr id="8" name="">
             <a:extLst xmlns:a="http://schemas.openxmlformats.org/drawingml/2006/main">
               <a:ext uri="{FF2B5EF4-FFF2-40B4-BE49-F238E27FC236}">
-                <a16:creationId xmlns:a16="http://schemas.microsoft.com/office/drawing/2014/main" id="{8C74AF2D-847E-405A-942D-2054C9037909}"/>
+                <a16:creationId xmlns:a16="http://schemas.microsoft.com/office/drawing/2014/main" id="{690CB6F5-A617-408E-8CB0-6C77E25C1107}"/>
               </a:ext>
             </a:extLst>
           </p:cNvPr>
@@ -8587,7 +8587,7 @@
           <p:cNvPr id="9" name="">
             <a:extLst xmlns:a="http://schemas.openxmlformats.org/drawingml/2006/main">
               <a:ext uri="{FF2B5EF4-FFF2-40B4-BE49-F238E27FC236}">
-                <a16:creationId xmlns:a16="http://schemas.microsoft.com/office/drawing/2014/main" id="{142EDB52-F415-44DC-AEF0-5FAD1EDB0A41}"/>
+                <a16:creationId xmlns:a16="http://schemas.microsoft.com/office/drawing/2014/main" id="{04E8C691-3CC6-4A3D-9CDC-AB1FB5E45751}"/>
               </a:ext>
             </a:extLst>
           </p:cNvPr>
@@ -8617,7 +8617,7 @@
           <p:cNvPr id="10" name="">
             <a:extLst xmlns:a="http://schemas.openxmlformats.org/drawingml/2006/main">
               <a:ext uri="{FF2B5EF4-FFF2-40B4-BE49-F238E27FC236}">
-                <a16:creationId xmlns:a16="http://schemas.microsoft.com/office/drawing/2014/main" id="{27ACC2BD-84D8-4877-B6A8-E5CF507C8F8A}"/>
+                <a16:creationId xmlns:a16="http://schemas.microsoft.com/office/drawing/2014/main" id="{931F0431-CA0F-424C-B68C-DD4A769A9775}"/>
               </a:ext>
             </a:extLst>
           </p:cNvPr>
@@ -8685,7 +8685,7 @@
           <p:cNvPr id="11" name="">
             <a:extLst xmlns:a="http://schemas.openxmlformats.org/drawingml/2006/main">
               <a:ext uri="{FF2B5EF4-FFF2-40B4-BE49-F238E27FC236}">
-                <a16:creationId xmlns:a16="http://schemas.microsoft.com/office/drawing/2014/main" id="{A3DCD8D2-86B7-411E-90C3-E939B9F9DDC3}"/>
+                <a16:creationId xmlns:a16="http://schemas.microsoft.com/office/drawing/2014/main" id="{688EE8BF-5E70-49D8-9D2B-B6B5E21EDB0A}"/>
               </a:ext>
             </a:extLst>
           </p:cNvPr>
@@ -8751,7 +8751,7 @@
     </p:spTree>
     <p:extLst>
       <p:ext uri="{BB962C8B-B14F-4D97-AF65-F5344CB8AC3E}">
-        <p14:creationId xmlns:p14="http://schemas.microsoft.com/office/powerpoint/2010/main" val="1775972100"/>
+        <p14:creationId xmlns:p14="http://schemas.microsoft.com/office/powerpoint/2010/main" val="1188695406"/>
       </p:ext>
     </p:extLst>
   </p:cSld>
@@ -8782,7 +8782,7 @@
           <p:cNvPr id="7" name="">
             <a:extLst xmlns:a="http://schemas.openxmlformats.org/drawingml/2006/main">
               <a:ext uri="{FF2B5EF4-FFF2-40B4-BE49-F238E27FC236}">
-                <a16:creationId xmlns:a16="http://schemas.microsoft.com/office/drawing/2014/main" id="{4A49909B-623B-4113-9019-B8F6D74115B8}"/>
+                <a16:creationId xmlns:a16="http://schemas.microsoft.com/office/drawing/2014/main" id="{F04FF65A-C6D4-4039-B12F-11768E0EC8C6}"/>
               </a:ext>
             </a:extLst>
           </p:cNvPr>
@@ -8850,7 +8850,7 @@
           <p:cNvPr id="2" name="">
             <a:extLst xmlns:a="http://schemas.openxmlformats.org/drawingml/2006/main">
               <a:ext uri="{FF2B5EF4-FFF2-40B4-BE49-F238E27FC236}">
-                <a16:creationId xmlns:a16="http://schemas.microsoft.com/office/drawing/2014/main" id="{01B86A28-B8F0-46C9-9A67-3C18E5115950}"/>
+                <a16:creationId xmlns:a16="http://schemas.microsoft.com/office/drawing/2014/main" id="{5569B292-9712-473A-9D28-6374E0C888FC}"/>
               </a:ext>
             </a:extLst>
           </p:cNvPr>
@@ -8918,7 +8918,7 @@
           <p:cNvPr id="3" name="">
             <a:extLst xmlns:a="http://schemas.openxmlformats.org/drawingml/2006/main">
               <a:ext uri="{FF2B5EF4-FFF2-40B4-BE49-F238E27FC236}">
-                <a16:creationId xmlns:a16="http://schemas.microsoft.com/office/drawing/2014/main" id="{54EEF404-E0E5-4CE5-9633-8859054FC5EA}"/>
+                <a16:creationId xmlns:a16="http://schemas.microsoft.com/office/drawing/2014/main" id="{7808D485-0786-43F2-82A0-6EFBD69CAFC3}"/>
               </a:ext>
             </a:extLst>
           </p:cNvPr>
@@ -8948,7 +8948,7 @@
           <p:cNvPr id="4" name="">
             <a:extLst xmlns:a="http://schemas.openxmlformats.org/drawingml/2006/main">
               <a:ext uri="{FF2B5EF4-FFF2-40B4-BE49-F238E27FC236}">
-                <a16:creationId xmlns:a16="http://schemas.microsoft.com/office/drawing/2014/main" id="{DBF58021-492C-4F0A-B086-2B0673ACBE1B}"/>
+                <a16:creationId xmlns:a16="http://schemas.microsoft.com/office/drawing/2014/main" id="{32232E02-9EB8-4534-BA7E-7F13A765070C}"/>
               </a:ext>
             </a:extLst>
           </p:cNvPr>
@@ -9016,7 +9016,7 @@
           <p:cNvPr id="5" name="Chart">
             <a:extLst xmlns:a="http://schemas.openxmlformats.org/drawingml/2006/main">
               <a:ext uri="{FF2B5EF4-FFF2-40B4-BE49-F238E27FC236}">
-                <a16:creationId xmlns:a16="http://schemas.microsoft.com/office/drawing/2014/main" id="{5112F9ED-ED40-4308-8089-89B4802A3B4E}"/>
+                <a16:creationId xmlns:a16="http://schemas.microsoft.com/office/drawing/2014/main" id="{D3B6AB50-35F6-4137-9BE4-A1DB8FDCCE9D}"/>
               </a:ext>
             </a:extLst>
           </p:cNvPr>
@@ -9029,7 +9029,7 @@
         </p:xfrm>
         <a:graphic xmlns:a="http://schemas.openxmlformats.org/drawingml/2006/main">
           <a:graphicData uri="http://schemas.openxmlformats.org/drawingml/2006/chart">
-            <c:chart xmlns:r="http://schemas.openxmlformats.org/officeDocument/2006/relationships" xmlns:c="http://schemas.openxmlformats.org/drawingml/2006/chart" r:id="R2cbf7d07c51a406b"/>
+            <c:chart xmlns:r="http://schemas.openxmlformats.org/officeDocument/2006/relationships" xmlns:c="http://schemas.openxmlformats.org/drawingml/2006/chart" r:id="R0170f327f9c741b7"/>
           </a:graphicData>
         </a:graphic>
       </p:graphicFrame>
@@ -9038,7 +9038,7 @@
           <p:cNvPr id="6" name="">
             <a:extLst xmlns:a="http://schemas.openxmlformats.org/drawingml/2006/main">
               <a:ext uri="{FF2B5EF4-FFF2-40B4-BE49-F238E27FC236}">
-                <a16:creationId xmlns:a16="http://schemas.microsoft.com/office/drawing/2014/main" id="{2B2F5186-541C-4378-935C-22EE4D2F8A6A}"/>
+                <a16:creationId xmlns:a16="http://schemas.microsoft.com/office/drawing/2014/main" id="{3CAFFA22-821A-4AFB-98AB-9513392F7121}"/>
               </a:ext>
             </a:extLst>
           </p:cNvPr>
@@ -9104,7 +9104,7 @@
     </p:spTree>
     <p:extLst>
       <p:ext uri="{BB962C8B-B14F-4D97-AF65-F5344CB8AC3E}">
-        <p14:creationId xmlns:p14="http://schemas.microsoft.com/office/powerpoint/2010/main" val="759103124"/>
+        <p14:creationId xmlns:p14="http://schemas.microsoft.com/office/powerpoint/2010/main" val="1889092091"/>
       </p:ext>
     </p:extLst>
   </p:cSld>
@@ -9135,7 +9135,7 @@
           <p:cNvPr id="11" name="">
             <a:extLst xmlns:a="http://schemas.openxmlformats.org/drawingml/2006/main">
               <a:ext uri="{FF2B5EF4-FFF2-40B4-BE49-F238E27FC236}">
-                <a16:creationId xmlns:a16="http://schemas.microsoft.com/office/drawing/2014/main" id="{B9A30CFA-3D35-4144-856D-F85E9917EBBC}"/>
+                <a16:creationId xmlns:a16="http://schemas.microsoft.com/office/drawing/2014/main" id="{5BE89284-FCAC-4C92-9A67-81A4FD7A2D9F}"/>
               </a:ext>
             </a:extLst>
           </p:cNvPr>
@@ -9203,7 +9203,7 @@
           <p:cNvPr id="2" name="">
             <a:extLst xmlns:a="http://schemas.openxmlformats.org/drawingml/2006/main">
               <a:ext uri="{FF2B5EF4-FFF2-40B4-BE49-F238E27FC236}">
-                <a16:creationId xmlns:a16="http://schemas.microsoft.com/office/drawing/2014/main" id="{0358699C-E2ED-4EA0-B1D0-EA8F2ED4DA6F}"/>
+                <a16:creationId xmlns:a16="http://schemas.microsoft.com/office/drawing/2014/main" id="{015EAABF-FEFB-4FF2-8E82-F57B918ED35F}"/>
               </a:ext>
             </a:extLst>
           </p:cNvPr>
@@ -9271,7 +9271,7 @@
           <p:cNvPr id="3" name="">
             <a:extLst xmlns:a="http://schemas.openxmlformats.org/drawingml/2006/main">
               <a:ext uri="{FF2B5EF4-FFF2-40B4-BE49-F238E27FC236}">
-                <a16:creationId xmlns:a16="http://schemas.microsoft.com/office/drawing/2014/main" id="{996111B4-7B52-4067-99CF-B8394C81E95B}"/>
+                <a16:creationId xmlns:a16="http://schemas.microsoft.com/office/drawing/2014/main" id="{9E1CD42D-7D7B-435A-BE91-E234553C71B3}"/>
               </a:ext>
             </a:extLst>
           </p:cNvPr>
@@ -9301,7 +9301,7 @@
           <p:cNvPr id="4" name="">
             <a:extLst xmlns:a="http://schemas.openxmlformats.org/drawingml/2006/main">
               <a:ext uri="{FF2B5EF4-FFF2-40B4-BE49-F238E27FC236}">
-                <a16:creationId xmlns:a16="http://schemas.microsoft.com/office/drawing/2014/main" id="{204CB48D-FDF1-4858-A65F-F388F227AC1F}"/>
+                <a16:creationId xmlns:a16="http://schemas.microsoft.com/office/drawing/2014/main" id="{FE84CDC8-F685-4D9B-B8EC-9126B3DBEE38}"/>
               </a:ext>
             </a:extLst>
           </p:cNvPr>
@@ -9369,7 +9369,7 @@
           <p:cNvPr id="5" name="">
             <a:extLst xmlns:a="http://schemas.openxmlformats.org/drawingml/2006/main">
               <a:ext uri="{FF2B5EF4-FFF2-40B4-BE49-F238E27FC236}">
-                <a16:creationId xmlns:a16="http://schemas.microsoft.com/office/drawing/2014/main" id="{61108714-5DFA-4226-A9E9-F3ED577F7C18}"/>
+                <a16:creationId xmlns:a16="http://schemas.microsoft.com/office/drawing/2014/main" id="{6769DA8E-580D-4A8D-A5EA-D5743A428D56}"/>
               </a:ext>
             </a:extLst>
           </p:cNvPr>
@@ -9437,7 +9437,7 @@
           <p:cNvPr id="6" name="">
             <a:extLst xmlns:a="http://schemas.openxmlformats.org/drawingml/2006/main">
               <a:ext uri="{FF2B5EF4-FFF2-40B4-BE49-F238E27FC236}">
-                <a16:creationId xmlns:a16="http://schemas.microsoft.com/office/drawing/2014/main" id="{7BC8CD7C-02F9-47C4-BAC4-00D85FC9F414}"/>
+                <a16:creationId xmlns:a16="http://schemas.microsoft.com/office/drawing/2014/main" id="{DE2567B5-2939-4101-A541-693CAE6B8215}"/>
               </a:ext>
             </a:extLst>
           </p:cNvPr>
@@ -9505,7 +9505,7 @@
           <p:cNvPr id="7" name="">
             <a:extLst xmlns:a="http://schemas.openxmlformats.org/drawingml/2006/main">
               <a:ext uri="{FF2B5EF4-FFF2-40B4-BE49-F238E27FC236}">
-                <a16:creationId xmlns:a16="http://schemas.microsoft.com/office/drawing/2014/main" id="{7B0A950D-6ECE-43CA-B880-3ADED7A7D14F}"/>
+                <a16:creationId xmlns:a16="http://schemas.microsoft.com/office/drawing/2014/main" id="{E5233B11-8903-45CF-B0CB-5D796B03B419}"/>
               </a:ext>
             </a:extLst>
           </p:cNvPr>
@@ -9535,7 +9535,7 @@
           <p:cNvPr id="8" name="">
             <a:extLst xmlns:a="http://schemas.openxmlformats.org/drawingml/2006/main">
               <a:ext uri="{FF2B5EF4-FFF2-40B4-BE49-F238E27FC236}">
-                <a16:creationId xmlns:a16="http://schemas.microsoft.com/office/drawing/2014/main" id="{C2474125-B763-44D5-9F7A-ADEF7A5AA557}"/>
+                <a16:creationId xmlns:a16="http://schemas.microsoft.com/office/drawing/2014/main" id="{5020E9B0-F9DB-4108-950F-E6711FB1A364}"/>
               </a:ext>
             </a:extLst>
           </p:cNvPr>
@@ -9626,7 +9626,7 @@
           <p:cNvPr id="9" name="">
             <a:extLst xmlns:a="http://schemas.openxmlformats.org/drawingml/2006/main">
               <a:ext uri="{FF2B5EF4-FFF2-40B4-BE49-F238E27FC236}">
-                <a16:creationId xmlns:a16="http://schemas.microsoft.com/office/drawing/2014/main" id="{DE07B259-D3FB-464B-A90C-EA3340041A7A}"/>
+                <a16:creationId xmlns:a16="http://schemas.microsoft.com/office/drawing/2014/main" id="{D9C6D275-1E96-483F-8C4D-82C7E5725D09}"/>
               </a:ext>
             </a:extLst>
           </p:cNvPr>
@@ -9717,7 +9717,7 @@
           <p:cNvPr id="10" name="">
             <a:extLst xmlns:a="http://schemas.openxmlformats.org/drawingml/2006/main">
               <a:ext uri="{FF2B5EF4-FFF2-40B4-BE49-F238E27FC236}">
-                <a16:creationId xmlns:a16="http://schemas.microsoft.com/office/drawing/2014/main" id="{247FB2C4-7042-4858-8404-61B4551329EA}"/>
+                <a16:creationId xmlns:a16="http://schemas.microsoft.com/office/drawing/2014/main" id="{CACFFBB5-6EDD-48F6-BF64-91E604D337D6}"/>
               </a:ext>
             </a:extLst>
           </p:cNvPr>
@@ -9783,7 +9783,7 @@
     </p:spTree>
     <p:extLst>
       <p:ext uri="{BB962C8B-B14F-4D97-AF65-F5344CB8AC3E}">
-        <p14:creationId xmlns:p14="http://schemas.microsoft.com/office/powerpoint/2010/main" val="862593141"/>
+        <p14:creationId xmlns:p14="http://schemas.microsoft.com/office/powerpoint/2010/main" val="1799196558"/>
       </p:ext>
     </p:extLst>
   </p:cSld>
@@ -9814,7 +9814,7 @@
           <p:cNvPr id="13" name="">
             <a:extLst xmlns:a="http://schemas.openxmlformats.org/drawingml/2006/main">
               <a:ext uri="{FF2B5EF4-FFF2-40B4-BE49-F238E27FC236}">
-                <a16:creationId xmlns:a16="http://schemas.microsoft.com/office/drawing/2014/main" id="{44BBA125-D4B5-4DAE-8EE8-1CF481BCF472}"/>
+                <a16:creationId xmlns:a16="http://schemas.microsoft.com/office/drawing/2014/main" id="{D2CE7282-3B71-419B-A12B-411774A3D6A0}"/>
               </a:ext>
             </a:extLst>
           </p:cNvPr>
@@ -9882,7 +9882,7 @@
           <p:cNvPr id="2" name="">
             <a:extLst xmlns:a="http://schemas.openxmlformats.org/drawingml/2006/main">
               <a:ext uri="{FF2B5EF4-FFF2-40B4-BE49-F238E27FC236}">
-                <a16:creationId xmlns:a16="http://schemas.microsoft.com/office/drawing/2014/main" id="{857D9729-54EB-4738-90BC-08B44875A843}"/>
+                <a16:creationId xmlns:a16="http://schemas.microsoft.com/office/drawing/2014/main" id="{9411DB0A-020D-4D0D-9814-D36055191C16}"/>
               </a:ext>
             </a:extLst>
           </p:cNvPr>
@@ -9950,7 +9950,7 @@
           <p:cNvPr id="3" name="">
             <a:extLst xmlns:a="http://schemas.openxmlformats.org/drawingml/2006/main">
               <a:ext uri="{FF2B5EF4-FFF2-40B4-BE49-F238E27FC236}">
-                <a16:creationId xmlns:a16="http://schemas.microsoft.com/office/drawing/2014/main" id="{9D6D669E-ADE8-48CD-B05A-FDD76B3E2E4B}"/>
+                <a16:creationId xmlns:a16="http://schemas.microsoft.com/office/drawing/2014/main" id="{88B085CF-6ADB-47E4-863A-3E9D1F35AB61}"/>
               </a:ext>
             </a:extLst>
           </p:cNvPr>
@@ -9980,7 +9980,7 @@
           <p:cNvPr id="4" name="">
             <a:extLst xmlns:a="http://schemas.openxmlformats.org/drawingml/2006/main">
               <a:ext uri="{FF2B5EF4-FFF2-40B4-BE49-F238E27FC236}">
-                <a16:creationId xmlns:a16="http://schemas.microsoft.com/office/drawing/2014/main" id="{E99969D8-E096-419C-AA3B-42A9F4F08344}"/>
+                <a16:creationId xmlns:a16="http://schemas.microsoft.com/office/drawing/2014/main" id="{036B401A-781E-4BF8-9C28-B84F7EAB8AAD}"/>
               </a:ext>
             </a:extLst>
           </p:cNvPr>
@@ -10048,7 +10048,7 @@
           <p:cNvPr id="5" name="">
             <a:extLst xmlns:a="http://schemas.openxmlformats.org/drawingml/2006/main">
               <a:ext uri="{FF2B5EF4-FFF2-40B4-BE49-F238E27FC236}">
-                <a16:creationId xmlns:a16="http://schemas.microsoft.com/office/drawing/2014/main" id="{987BF982-7762-48DE-ABA6-8874E495D281}"/>
+                <a16:creationId xmlns:a16="http://schemas.microsoft.com/office/drawing/2014/main" id="{BD017477-F050-419B-90C6-58508E2D14B4}"/>
               </a:ext>
             </a:extLst>
           </p:cNvPr>
@@ -10116,7 +10116,7 @@
           <p:cNvPr id="6" name="">
             <a:extLst xmlns:a="http://schemas.openxmlformats.org/drawingml/2006/main">
               <a:ext uri="{FF2B5EF4-FFF2-40B4-BE49-F238E27FC236}">
-                <a16:creationId xmlns:a16="http://schemas.microsoft.com/office/drawing/2014/main" id="{D45F9717-3CE5-4394-B149-61DA7B5BC4F6}"/>
+                <a16:creationId xmlns:a16="http://schemas.microsoft.com/office/drawing/2014/main" id="{3C2466C9-82C6-4715-829F-1653244EEF40}"/>
               </a:ext>
             </a:extLst>
           </p:cNvPr>
@@ -10230,7 +10230,7 @@
           <p:cNvPr id="7" name="">
             <a:extLst xmlns:a="http://schemas.openxmlformats.org/drawingml/2006/main">
               <a:ext uri="{FF2B5EF4-FFF2-40B4-BE49-F238E27FC236}">
-                <a16:creationId xmlns:a16="http://schemas.microsoft.com/office/drawing/2014/main" id="{63DC3E99-DC66-4E79-BEDC-1BD93580604A}"/>
+                <a16:creationId xmlns:a16="http://schemas.microsoft.com/office/drawing/2014/main" id="{CD2DED52-DDD2-450E-BAFE-F6CB763D771C}"/>
               </a:ext>
             </a:extLst>
           </p:cNvPr>
@@ -10298,7 +10298,7 @@
           <p:cNvPr id="8" name="">
             <a:extLst xmlns:a="http://schemas.openxmlformats.org/drawingml/2006/main">
               <a:ext uri="{FF2B5EF4-FFF2-40B4-BE49-F238E27FC236}">
-                <a16:creationId xmlns:a16="http://schemas.microsoft.com/office/drawing/2014/main" id="{2DAC1600-2BDD-4E32-9EC9-16B87FBC4190}"/>
+                <a16:creationId xmlns:a16="http://schemas.microsoft.com/office/drawing/2014/main" id="{C7E8B1F0-BD7C-4217-8B05-67E7D18F9B09}"/>
               </a:ext>
             </a:extLst>
           </p:cNvPr>
@@ -10412,7 +10412,7 @@
           <p:cNvPr id="9" name="">
             <a:extLst xmlns:a="http://schemas.openxmlformats.org/drawingml/2006/main">
               <a:ext uri="{FF2B5EF4-FFF2-40B4-BE49-F238E27FC236}">
-                <a16:creationId xmlns:a16="http://schemas.microsoft.com/office/drawing/2014/main" id="{A3EAC98C-0606-4B4E-9EA8-E649B6D998F6}"/>
+                <a16:creationId xmlns:a16="http://schemas.microsoft.com/office/drawing/2014/main" id="{203EC193-50B1-443A-AB3F-BAC1ADE04ADF}"/>
               </a:ext>
             </a:extLst>
           </p:cNvPr>
@@ -10442,7 +10442,7 @@
           <p:cNvPr id="10" name="">
             <a:extLst xmlns:a="http://schemas.openxmlformats.org/drawingml/2006/main">
               <a:ext uri="{FF2B5EF4-FFF2-40B4-BE49-F238E27FC236}">
-                <a16:creationId xmlns:a16="http://schemas.microsoft.com/office/drawing/2014/main" id="{2E33A04F-7623-449B-8E35-F4B5E1602DC2}"/>
+                <a16:creationId xmlns:a16="http://schemas.microsoft.com/office/drawing/2014/main" id="{4E31F4B8-FC2D-460C-B451-519BB1B592A4}"/>
               </a:ext>
             </a:extLst>
           </p:cNvPr>
@@ -10510,7 +10510,7 @@
           <p:cNvPr id="11" name="">
             <a:extLst xmlns:a="http://schemas.openxmlformats.org/drawingml/2006/main">
               <a:ext uri="{FF2B5EF4-FFF2-40B4-BE49-F238E27FC236}">
-                <a16:creationId xmlns:a16="http://schemas.microsoft.com/office/drawing/2014/main" id="{FECB0A83-4E44-4A03-931F-69776978ED6A}"/>
+                <a16:creationId xmlns:a16="http://schemas.microsoft.com/office/drawing/2014/main" id="{85B19E6A-E138-4171-97AD-A08CD482B52F}"/>
               </a:ext>
             </a:extLst>
           </p:cNvPr>
@@ -10578,7 +10578,7 @@
           <p:cNvPr id="12" name="">
             <a:extLst xmlns:a="http://schemas.openxmlformats.org/drawingml/2006/main">
               <a:ext uri="{FF2B5EF4-FFF2-40B4-BE49-F238E27FC236}">
-                <a16:creationId xmlns:a16="http://schemas.microsoft.com/office/drawing/2014/main" id="{39BBAB8E-BAE4-441D-A5E7-A5D6EC426A5E}"/>
+                <a16:creationId xmlns:a16="http://schemas.microsoft.com/office/drawing/2014/main" id="{F6A4312C-3CDB-4676-8FD0-7021702161C8}"/>
               </a:ext>
             </a:extLst>
           </p:cNvPr>
@@ -10644,7 +10644,7 @@
     </p:spTree>
     <p:extLst>
       <p:ext uri="{BB962C8B-B14F-4D97-AF65-F5344CB8AC3E}">
-        <p14:creationId xmlns:p14="http://schemas.microsoft.com/office/powerpoint/2010/main" val="1227233349"/>
+        <p14:creationId xmlns:p14="http://schemas.microsoft.com/office/powerpoint/2010/main" val="189061196"/>
       </p:ext>
     </p:extLst>
   </p:cSld>
@@ -10675,7 +10675,7 @@
           <p:cNvPr id="8" name="">
             <a:extLst xmlns:a="http://schemas.openxmlformats.org/drawingml/2006/main">
               <a:ext uri="{FF2B5EF4-FFF2-40B4-BE49-F238E27FC236}">
-                <a16:creationId xmlns:a16="http://schemas.microsoft.com/office/drawing/2014/main" id="{F5D54ECF-76D2-4390-AAF4-B7D59B37F9B9}"/>
+                <a16:creationId xmlns:a16="http://schemas.microsoft.com/office/drawing/2014/main" id="{70F16B4B-1F84-4509-A5E7-70C887B415D6}"/>
               </a:ext>
             </a:extLst>
           </p:cNvPr>
@@ -10743,7 +10743,7 @@
           <p:cNvPr id="2" name="">
             <a:extLst xmlns:a="http://schemas.openxmlformats.org/drawingml/2006/main">
               <a:ext uri="{FF2B5EF4-FFF2-40B4-BE49-F238E27FC236}">
-                <a16:creationId xmlns:a16="http://schemas.microsoft.com/office/drawing/2014/main" id="{6DDA5258-B612-446D-8A90-77963E74A07B}"/>
+                <a16:creationId xmlns:a16="http://schemas.microsoft.com/office/drawing/2014/main" id="{A76402C7-9807-4A7C-9D8A-2567FB7DC049}"/>
               </a:ext>
             </a:extLst>
           </p:cNvPr>
@@ -10811,7 +10811,7 @@
           <p:cNvPr id="3" name="">
             <a:extLst xmlns:a="http://schemas.openxmlformats.org/drawingml/2006/main">
               <a:ext uri="{FF2B5EF4-FFF2-40B4-BE49-F238E27FC236}">
-                <a16:creationId xmlns:a16="http://schemas.microsoft.com/office/drawing/2014/main" id="{AF9CC038-CD66-4E47-89D6-C120B7F82B72}"/>
+                <a16:creationId xmlns:a16="http://schemas.microsoft.com/office/drawing/2014/main" id="{E3115678-E325-4A4D-A37A-753A1DD932BF}"/>
               </a:ext>
             </a:extLst>
           </p:cNvPr>
@@ -10841,7 +10841,7 @@
           <p:cNvPr id="4" name="">
             <a:extLst xmlns:a="http://schemas.openxmlformats.org/drawingml/2006/main">
               <a:ext uri="{FF2B5EF4-FFF2-40B4-BE49-F238E27FC236}">
-                <a16:creationId xmlns:a16="http://schemas.microsoft.com/office/drawing/2014/main" id="{3FA05B0D-687A-430D-A771-573AD707B330}"/>
+                <a16:creationId xmlns:a16="http://schemas.microsoft.com/office/drawing/2014/main" id="{2C7CFF5A-CA5B-4C20-8FCD-7490B686B4EC}"/>
               </a:ext>
             </a:extLst>
           </p:cNvPr>
@@ -10909,7 +10909,7 @@
           <p:cNvPr id="5" name="">
             <a:extLst xmlns:a="http://schemas.openxmlformats.org/drawingml/2006/main">
               <a:ext uri="{FF2B5EF4-FFF2-40B4-BE49-F238E27FC236}">
-                <a16:creationId xmlns:a16="http://schemas.microsoft.com/office/drawing/2014/main" id="{0B3C03B8-FE9D-4A82-93F0-FE3BB64D68EA}"/>
+                <a16:creationId xmlns:a16="http://schemas.microsoft.com/office/drawing/2014/main" id="{57F91845-6BFC-4C6C-B843-2EDE7C752A5C}"/>
               </a:ext>
             </a:extLst>
           </p:cNvPr>
@@ -11000,7 +11000,7 @@
           <p:cNvPr id="6" name="">
             <a:extLst xmlns:a="http://schemas.openxmlformats.org/drawingml/2006/main">
               <a:ext uri="{FF2B5EF4-FFF2-40B4-BE49-F238E27FC236}">
-                <a16:creationId xmlns:a16="http://schemas.microsoft.com/office/drawing/2014/main" id="{BC7894A1-8234-4664-89BE-4A35CE2DAB7B}"/>
+                <a16:creationId xmlns:a16="http://schemas.microsoft.com/office/drawing/2014/main" id="{B5B63806-4522-4ABB-8F1B-04C44E437A6B}"/>
               </a:ext>
             </a:extLst>
           </p:cNvPr>
@@ -11068,7 +11068,7 @@
           <p:cNvPr id="7" name="">
             <a:extLst xmlns:a="http://schemas.openxmlformats.org/drawingml/2006/main">
               <a:ext uri="{FF2B5EF4-FFF2-40B4-BE49-F238E27FC236}">
-                <a16:creationId xmlns:a16="http://schemas.microsoft.com/office/drawing/2014/main" id="{68DE16D4-4F5B-420A-B128-F80F4073F891}"/>
+                <a16:creationId xmlns:a16="http://schemas.microsoft.com/office/drawing/2014/main" id="{3250B045-B0A7-424B-AB4F-B04E6BF1587A}"/>
               </a:ext>
             </a:extLst>
           </p:cNvPr>
@@ -11134,7 +11134,7 @@
     </p:spTree>
     <p:extLst>
       <p:ext uri="{BB962C8B-B14F-4D97-AF65-F5344CB8AC3E}">
-        <p14:creationId xmlns:p14="http://schemas.microsoft.com/office/powerpoint/2010/main" val="539264692"/>
+        <p14:creationId xmlns:p14="http://schemas.microsoft.com/office/powerpoint/2010/main" val="136570320"/>
       </p:ext>
     </p:extLst>
   </p:cSld>
@@ -11165,7 +11165,7 @@
           <p:cNvPr id="7" name="">
             <a:extLst xmlns:a="http://schemas.openxmlformats.org/drawingml/2006/main">
               <a:ext uri="{FF2B5EF4-FFF2-40B4-BE49-F238E27FC236}">
-                <a16:creationId xmlns:a16="http://schemas.microsoft.com/office/drawing/2014/main" id="{63638ACE-2230-4304-AEDC-71EA71A8E238}"/>
+                <a16:creationId xmlns:a16="http://schemas.microsoft.com/office/drawing/2014/main" id="{9C8900DA-F4AA-42AA-9105-97EBDF76A6DA}"/>
               </a:ext>
             </a:extLst>
           </p:cNvPr>
@@ -11233,7 +11233,7 @@
           <p:cNvPr id="2" name="">
             <a:extLst xmlns:a="http://schemas.openxmlformats.org/drawingml/2006/main">
               <a:ext uri="{FF2B5EF4-FFF2-40B4-BE49-F238E27FC236}">
-                <a16:creationId xmlns:a16="http://schemas.microsoft.com/office/drawing/2014/main" id="{BD94710A-E42B-490B-9F23-6FAFC63F3F0C}"/>
+                <a16:creationId xmlns:a16="http://schemas.microsoft.com/office/drawing/2014/main" id="{E0FED2E7-BC56-4C26-B605-EA21725CC820}"/>
               </a:ext>
             </a:extLst>
           </p:cNvPr>
@@ -11301,7 +11301,7 @@
           <p:cNvPr id="3" name="">
             <a:extLst xmlns:a="http://schemas.openxmlformats.org/drawingml/2006/main">
               <a:ext uri="{FF2B5EF4-FFF2-40B4-BE49-F238E27FC236}">
-                <a16:creationId xmlns:a16="http://schemas.microsoft.com/office/drawing/2014/main" id="{528207F4-0DAB-470C-B4B7-C9AFF3E54FB7}"/>
+                <a16:creationId xmlns:a16="http://schemas.microsoft.com/office/drawing/2014/main" id="{777D4F7F-6445-4513-950C-F43D278DC8D0}"/>
               </a:ext>
             </a:extLst>
           </p:cNvPr>
@@ -11331,7 +11331,7 @@
           <p:cNvPr id="4" name="">
             <a:extLst xmlns:a="http://schemas.openxmlformats.org/drawingml/2006/main">
               <a:ext uri="{FF2B5EF4-FFF2-40B4-BE49-F238E27FC236}">
-                <a16:creationId xmlns:a16="http://schemas.microsoft.com/office/drawing/2014/main" id="{12D13C5D-BD72-427E-A64D-2379594F0F74}"/>
+                <a16:creationId xmlns:a16="http://schemas.microsoft.com/office/drawing/2014/main" id="{CAE03350-78DE-49FC-B9E8-F0E8216C543E}"/>
               </a:ext>
             </a:extLst>
           </p:cNvPr>
@@ -11399,7 +11399,7 @@
           <p:cNvPr id="5" name="">
             <a:extLst xmlns:a="http://schemas.openxmlformats.org/drawingml/2006/main">
               <a:ext uri="{FF2B5EF4-FFF2-40B4-BE49-F238E27FC236}">
-                <a16:creationId xmlns:a16="http://schemas.microsoft.com/office/drawing/2014/main" id="{5E28BE0A-A17B-41A4-A768-21CD8A7679F0}"/>
+                <a16:creationId xmlns:a16="http://schemas.microsoft.com/office/drawing/2014/main" id="{8A639FBA-54F5-4696-BED6-E3AEDF557077}"/>
               </a:ext>
             </a:extLst>
           </p:cNvPr>
@@ -11409,7 +11409,7 @@
           <p:nvPr/>
         </p:nvPicPr>
         <p:blipFill>
-          <a:blip xmlns:r="http://schemas.openxmlformats.org/officeDocument/2006/relationships" xmlns:a="http://schemas.openxmlformats.org/drawingml/2006/main" r:embed="R1d2a8b0f1888434d"/>
+          <a:blip xmlns:r="http://schemas.openxmlformats.org/officeDocument/2006/relationships" xmlns:a="http://schemas.openxmlformats.org/drawingml/2006/main" r:embed="R9277dfd42d61415e"/>
           <a:stretch xmlns:a="http://schemas.openxmlformats.org/drawingml/2006/main"/>
         </p:blipFill>
         <p:spPr>
@@ -11427,7 +11427,7 @@
           <p:cNvPr id="6" name="">
             <a:extLst xmlns:a="http://schemas.openxmlformats.org/drawingml/2006/main">
               <a:ext uri="{FF2B5EF4-FFF2-40B4-BE49-F238E27FC236}">
-                <a16:creationId xmlns:a16="http://schemas.microsoft.com/office/drawing/2014/main" id="{168F401A-94FD-47A4-B369-84A40A02FFCE}"/>
+                <a16:creationId xmlns:a16="http://schemas.microsoft.com/office/drawing/2014/main" id="{32C1C06E-6C3C-4398-8065-CBBE7920426D}"/>
               </a:ext>
             </a:extLst>
           </p:cNvPr>
@@ -11493,7 +11493,7 @@
     </p:spTree>
     <p:extLst>
       <p:ext uri="{BB962C8B-B14F-4D97-AF65-F5344CB8AC3E}">
-        <p14:creationId xmlns:p14="http://schemas.microsoft.com/office/powerpoint/2010/main" val="150705603"/>
+        <p14:creationId xmlns:p14="http://schemas.microsoft.com/office/powerpoint/2010/main" val="1587113915"/>
       </p:ext>
     </p:extLst>
   </p:cSld>
@@ -11524,7 +11524,7 @@
           <p:cNvPr id="13" name="">
             <a:extLst xmlns:a="http://schemas.openxmlformats.org/drawingml/2006/main">
               <a:ext uri="{FF2B5EF4-FFF2-40B4-BE49-F238E27FC236}">
-                <a16:creationId xmlns:a16="http://schemas.microsoft.com/office/drawing/2014/main" id="{F7B3B33A-D628-4D24-93D5-53BC1285C6F4}"/>
+                <a16:creationId xmlns:a16="http://schemas.microsoft.com/office/drawing/2014/main" id="{610495EB-0235-4F61-A600-A3F4E050FF77}"/>
               </a:ext>
             </a:extLst>
           </p:cNvPr>
@@ -11592,7 +11592,7 @@
           <p:cNvPr id="2" name="">
             <a:extLst xmlns:a="http://schemas.openxmlformats.org/drawingml/2006/main">
               <a:ext uri="{FF2B5EF4-FFF2-40B4-BE49-F238E27FC236}">
-                <a16:creationId xmlns:a16="http://schemas.microsoft.com/office/drawing/2014/main" id="{AC9C886C-0BFA-4CB6-8AAF-C79B08E6E4FA}"/>
+                <a16:creationId xmlns:a16="http://schemas.microsoft.com/office/drawing/2014/main" id="{C0424D54-1664-4F14-8001-37F89B206E71}"/>
               </a:ext>
             </a:extLst>
           </p:cNvPr>
@@ -11660,7 +11660,7 @@
           <p:cNvPr id="3" name="">
             <a:extLst xmlns:a="http://schemas.openxmlformats.org/drawingml/2006/main">
               <a:ext uri="{FF2B5EF4-FFF2-40B4-BE49-F238E27FC236}">
-                <a16:creationId xmlns:a16="http://schemas.microsoft.com/office/drawing/2014/main" id="{FA95A00B-F16D-4AFC-BBC7-97BF883A2310}"/>
+                <a16:creationId xmlns:a16="http://schemas.microsoft.com/office/drawing/2014/main" id="{D261C6E8-D59E-4AA0-A09A-52916C3CEC3A}"/>
               </a:ext>
             </a:extLst>
           </p:cNvPr>
@@ -11690,7 +11690,7 @@
           <p:cNvPr id="4" name="">
             <a:extLst xmlns:a="http://schemas.openxmlformats.org/drawingml/2006/main">
               <a:ext uri="{FF2B5EF4-FFF2-40B4-BE49-F238E27FC236}">
-                <a16:creationId xmlns:a16="http://schemas.microsoft.com/office/drawing/2014/main" id="{3B0E5E1C-174B-4BCF-80B7-B1FDAD9034FD}"/>
+                <a16:creationId xmlns:a16="http://schemas.microsoft.com/office/drawing/2014/main" id="{5AD4D24D-97E5-4096-92C0-32969DE8E4DB}"/>
               </a:ext>
             </a:extLst>
           </p:cNvPr>
@@ -11758,7 +11758,7 @@
           <p:cNvPr id="5" name="">
             <a:extLst xmlns:a="http://schemas.openxmlformats.org/drawingml/2006/main">
               <a:ext uri="{FF2B5EF4-FFF2-40B4-BE49-F238E27FC236}">
-                <a16:creationId xmlns:a16="http://schemas.microsoft.com/office/drawing/2014/main" id="{56F28585-3226-47D0-B191-081FF2FC46E7}"/>
+                <a16:creationId xmlns:a16="http://schemas.microsoft.com/office/drawing/2014/main" id="{0941D970-BB94-414A-9D7A-ABD6FBDC1578}"/>
               </a:ext>
             </a:extLst>
           </p:cNvPr>
@@ -11826,7 +11826,7 @@
           <p:cNvPr id="6" name="">
             <a:extLst xmlns:a="http://schemas.openxmlformats.org/drawingml/2006/main">
               <a:ext uri="{FF2B5EF4-FFF2-40B4-BE49-F238E27FC236}">
-                <a16:creationId xmlns:a16="http://schemas.microsoft.com/office/drawing/2014/main" id="{314FE6AB-0BBE-4BCF-98AE-E3A919035E9D}"/>
+                <a16:creationId xmlns:a16="http://schemas.microsoft.com/office/drawing/2014/main" id="{49D60BEF-4375-4A5D-84B7-2DAB90D2A921}"/>
               </a:ext>
             </a:extLst>
           </p:cNvPr>
@@ -11917,7 +11917,7 @@
           <p:cNvPr id="7" name="">
             <a:extLst xmlns:a="http://schemas.openxmlformats.org/drawingml/2006/main">
               <a:ext uri="{FF2B5EF4-FFF2-40B4-BE49-F238E27FC236}">
-                <a16:creationId xmlns:a16="http://schemas.microsoft.com/office/drawing/2014/main" id="{D96DF1C7-F209-4AD4-9BB1-70A75B07E224}"/>
+                <a16:creationId xmlns:a16="http://schemas.microsoft.com/office/drawing/2014/main" id="{0641F84F-9628-45F9-B012-3F653F763FEA}"/>
               </a:ext>
             </a:extLst>
           </p:cNvPr>
@@ -11985,7 +11985,7 @@
           <p:cNvPr id="8" name="">
             <a:extLst xmlns:a="http://schemas.openxmlformats.org/drawingml/2006/main">
               <a:ext uri="{FF2B5EF4-FFF2-40B4-BE49-F238E27FC236}">
-                <a16:creationId xmlns:a16="http://schemas.microsoft.com/office/drawing/2014/main" id="{80313B40-96F6-4D5B-AA83-2CAF650326FE}"/>
+                <a16:creationId xmlns:a16="http://schemas.microsoft.com/office/drawing/2014/main" id="{2066BA53-30FD-4F9D-8D5F-C5C70BFD5BEF}"/>
               </a:ext>
             </a:extLst>
           </p:cNvPr>
@@ -12076,7 +12076,7 @@
           <p:cNvPr id="9" name="">
             <a:extLst xmlns:a="http://schemas.openxmlformats.org/drawingml/2006/main">
               <a:ext uri="{FF2B5EF4-FFF2-40B4-BE49-F238E27FC236}">
-                <a16:creationId xmlns:a16="http://schemas.microsoft.com/office/drawing/2014/main" id="{18422A0F-F4E2-40F8-ADD2-1C11F744F692}"/>
+                <a16:creationId xmlns:a16="http://schemas.microsoft.com/office/drawing/2014/main" id="{F77197F5-8A73-4DF9-A8CC-9F896B6E118A}"/>
               </a:ext>
             </a:extLst>
           </p:cNvPr>
@@ -12106,7 +12106,7 @@
           <p:cNvPr id="10" name="">
             <a:extLst xmlns:a="http://schemas.openxmlformats.org/drawingml/2006/main">
               <a:ext uri="{FF2B5EF4-FFF2-40B4-BE49-F238E27FC236}">
-                <a16:creationId xmlns:a16="http://schemas.microsoft.com/office/drawing/2014/main" id="{263CB223-23B7-43D5-B358-74995D495229}"/>
+                <a16:creationId xmlns:a16="http://schemas.microsoft.com/office/drawing/2014/main" id="{924D0778-9364-44A9-AAA8-F005CBD7DAB8}"/>
               </a:ext>
             </a:extLst>
           </p:cNvPr>
@@ -12174,7 +12174,7 @@
           <p:cNvPr id="11" name="">
             <a:extLst xmlns:a="http://schemas.openxmlformats.org/drawingml/2006/main">
               <a:ext uri="{FF2B5EF4-FFF2-40B4-BE49-F238E27FC236}">
-                <a16:creationId xmlns:a16="http://schemas.microsoft.com/office/drawing/2014/main" id="{76A1166B-03EA-423E-A0D9-933148948A0F}"/>
+                <a16:creationId xmlns:a16="http://schemas.microsoft.com/office/drawing/2014/main" id="{86FB2AA0-783E-4D13-840B-6F82FB089220}"/>
               </a:ext>
             </a:extLst>
           </p:cNvPr>
@@ -12265,7 +12265,7 @@
           <p:cNvPr id="12" name="">
             <a:extLst xmlns:a="http://schemas.openxmlformats.org/drawingml/2006/main">
               <a:ext uri="{FF2B5EF4-FFF2-40B4-BE49-F238E27FC236}">
-                <a16:creationId xmlns:a16="http://schemas.microsoft.com/office/drawing/2014/main" id="{C87516D1-C5A2-40F1-8CB4-C404A13B2CDA}"/>
+                <a16:creationId xmlns:a16="http://schemas.microsoft.com/office/drawing/2014/main" id="{AB7BF77D-FED3-42CA-8DBD-B6C22E32D253}"/>
               </a:ext>
             </a:extLst>
           </p:cNvPr>
@@ -12331,7 +12331,7 @@
     </p:spTree>
     <p:extLst>
       <p:ext uri="{BB962C8B-B14F-4D97-AF65-F5344CB8AC3E}">
-        <p14:creationId xmlns:p14="http://schemas.microsoft.com/office/powerpoint/2010/main" val="781875714"/>
+        <p14:creationId xmlns:p14="http://schemas.microsoft.com/office/powerpoint/2010/main" val="1957893190"/>
       </p:ext>
     </p:extLst>
   </p:cSld>
@@ -12362,7 +12362,7 @@
           <p:cNvPr id="7" name="">
             <a:extLst xmlns:a="http://schemas.openxmlformats.org/drawingml/2006/main">
               <a:ext uri="{FF2B5EF4-FFF2-40B4-BE49-F238E27FC236}">
-                <a16:creationId xmlns:a16="http://schemas.microsoft.com/office/drawing/2014/main" id="{DABCB452-B6CB-4FD7-A855-0257CAC12308}"/>
+                <a16:creationId xmlns:a16="http://schemas.microsoft.com/office/drawing/2014/main" id="{BC599EC6-091D-4F44-9720-EC48F7D62EFB}"/>
               </a:ext>
             </a:extLst>
           </p:cNvPr>
@@ -12430,7 +12430,7 @@
           <p:cNvPr id="2" name="">
             <a:extLst xmlns:a="http://schemas.openxmlformats.org/drawingml/2006/main">
               <a:ext uri="{FF2B5EF4-FFF2-40B4-BE49-F238E27FC236}">
-                <a16:creationId xmlns:a16="http://schemas.microsoft.com/office/drawing/2014/main" id="{47210E2E-D367-49D5-AF1F-BE99C3C7E2B8}"/>
+                <a16:creationId xmlns:a16="http://schemas.microsoft.com/office/drawing/2014/main" id="{8AD95B1F-9D58-499E-8620-3752FB869D8D}"/>
               </a:ext>
             </a:extLst>
           </p:cNvPr>
@@ -12498,7 +12498,7 @@
           <p:cNvPr id="3" name="">
             <a:extLst xmlns:a="http://schemas.openxmlformats.org/drawingml/2006/main">
               <a:ext uri="{FF2B5EF4-FFF2-40B4-BE49-F238E27FC236}">
-                <a16:creationId xmlns:a16="http://schemas.microsoft.com/office/drawing/2014/main" id="{7FA05D84-6ADB-44AB-9A6A-6632E66EBB5A}"/>
+                <a16:creationId xmlns:a16="http://schemas.microsoft.com/office/drawing/2014/main" id="{EF03C229-DB7D-4B00-8CBC-62BED158C07F}"/>
               </a:ext>
             </a:extLst>
           </p:cNvPr>
@@ -12528,7 +12528,7 @@
           <p:cNvPr id="4" name="">
             <a:extLst xmlns:a="http://schemas.openxmlformats.org/drawingml/2006/main">
               <a:ext uri="{FF2B5EF4-FFF2-40B4-BE49-F238E27FC236}">
-                <a16:creationId xmlns:a16="http://schemas.microsoft.com/office/drawing/2014/main" id="{EDCDC3DF-355A-4E0F-9A27-029B2B5C0A7D}"/>
+                <a16:creationId xmlns:a16="http://schemas.microsoft.com/office/drawing/2014/main" id="{5DE455F1-ECA9-4F8A-8B5B-662BBEAEFEA6}"/>
               </a:ext>
             </a:extLst>
           </p:cNvPr>
@@ -12596,7 +12596,7 @@
           <p:cNvPr id="5" name="">
             <a:extLst xmlns:a="http://schemas.openxmlformats.org/drawingml/2006/main">
               <a:ext uri="{FF2B5EF4-FFF2-40B4-BE49-F238E27FC236}">
-                <a16:creationId xmlns:a16="http://schemas.microsoft.com/office/drawing/2014/main" id="{ECD64F4F-C5E9-4820-A188-9CF7998F1252}"/>
+                <a16:creationId xmlns:a16="http://schemas.microsoft.com/office/drawing/2014/main" id="{565935C4-CD4E-472E-BCC9-9C71899FF544}"/>
               </a:ext>
             </a:extLst>
           </p:cNvPr>
@@ -12606,7 +12606,7 @@
           <p:nvPr/>
         </p:nvPicPr>
         <p:blipFill>
-          <a:blip xmlns:r="http://schemas.openxmlformats.org/officeDocument/2006/relationships" xmlns:a="http://schemas.openxmlformats.org/drawingml/2006/main" r:embed="R6cacb4cfe3604f8b"/>
+          <a:blip xmlns:r="http://schemas.openxmlformats.org/officeDocument/2006/relationships" xmlns:a="http://schemas.openxmlformats.org/drawingml/2006/main" r:embed="Rccdd3be47f704b06"/>
           <a:stretch xmlns:a="http://schemas.openxmlformats.org/drawingml/2006/main"/>
         </p:blipFill>
         <p:spPr>
@@ -12624,7 +12624,7 @@
           <p:cNvPr id="6" name="">
             <a:extLst xmlns:a="http://schemas.openxmlformats.org/drawingml/2006/main">
               <a:ext uri="{FF2B5EF4-FFF2-40B4-BE49-F238E27FC236}">
-                <a16:creationId xmlns:a16="http://schemas.microsoft.com/office/drawing/2014/main" id="{FA208DFE-54F3-435F-AB68-B024B879504C}"/>
+                <a16:creationId xmlns:a16="http://schemas.microsoft.com/office/drawing/2014/main" id="{07A54868-18A5-4461-BCFE-E9A5628DF845}"/>
               </a:ext>
             </a:extLst>
           </p:cNvPr>
@@ -12690,7 +12690,7 @@
     </p:spTree>
     <p:extLst>
       <p:ext uri="{BB962C8B-B14F-4D97-AF65-F5344CB8AC3E}">
-        <p14:creationId xmlns:p14="http://schemas.microsoft.com/office/powerpoint/2010/main" val="804957965"/>
+        <p14:creationId xmlns:p14="http://schemas.microsoft.com/office/powerpoint/2010/main" val="1468855553"/>
       </p:ext>
     </p:extLst>
   </p:cSld>
@@ -12721,7 +12721,7 @@
           <p:cNvPr id="7" name="">
             <a:extLst xmlns:a="http://schemas.openxmlformats.org/drawingml/2006/main">
               <a:ext uri="{FF2B5EF4-FFF2-40B4-BE49-F238E27FC236}">
-                <a16:creationId xmlns:a16="http://schemas.microsoft.com/office/drawing/2014/main" id="{2F3D17DA-65B4-4F72-B35A-FC16E1F7AD5C}"/>
+                <a16:creationId xmlns:a16="http://schemas.microsoft.com/office/drawing/2014/main" id="{AEA5344E-D343-4C51-BE8A-7C259BAD3581}"/>
               </a:ext>
             </a:extLst>
           </p:cNvPr>
@@ -12789,7 +12789,7 @@
           <p:cNvPr id="2" name="">
             <a:extLst xmlns:a="http://schemas.openxmlformats.org/drawingml/2006/main">
               <a:ext uri="{FF2B5EF4-FFF2-40B4-BE49-F238E27FC236}">
-                <a16:creationId xmlns:a16="http://schemas.microsoft.com/office/drawing/2014/main" id="{3D14FEE1-D3ED-4AD3-925E-4B912DC70224}"/>
+                <a16:creationId xmlns:a16="http://schemas.microsoft.com/office/drawing/2014/main" id="{11BE398B-1225-4B19-998B-4A650571C20C}"/>
               </a:ext>
             </a:extLst>
           </p:cNvPr>
@@ -12857,7 +12857,7 @@
           <p:cNvPr id="3" name="">
             <a:extLst xmlns:a="http://schemas.openxmlformats.org/drawingml/2006/main">
               <a:ext uri="{FF2B5EF4-FFF2-40B4-BE49-F238E27FC236}">
-                <a16:creationId xmlns:a16="http://schemas.microsoft.com/office/drawing/2014/main" id="{82C60B07-3074-4797-8775-9BD66A461FB2}"/>
+                <a16:creationId xmlns:a16="http://schemas.microsoft.com/office/drawing/2014/main" id="{EC480421-0BFE-4B2A-85D9-4C273910B325}"/>
               </a:ext>
             </a:extLst>
           </p:cNvPr>
@@ -12887,7 +12887,7 @@
           <p:cNvPr id="4" name="">
             <a:extLst xmlns:a="http://schemas.openxmlformats.org/drawingml/2006/main">
               <a:ext uri="{FF2B5EF4-FFF2-40B4-BE49-F238E27FC236}">
-                <a16:creationId xmlns:a16="http://schemas.microsoft.com/office/drawing/2014/main" id="{6483A15F-8860-4F3B-A6DC-58444F1DCBED}"/>
+                <a16:creationId xmlns:a16="http://schemas.microsoft.com/office/drawing/2014/main" id="{0E487909-DEFF-44E4-9C88-8FE54F38E463}"/>
               </a:ext>
             </a:extLst>
           </p:cNvPr>
@@ -12955,7 +12955,7 @@
           <p:cNvPr id="5" name="">
             <a:extLst xmlns:a="http://schemas.openxmlformats.org/drawingml/2006/main">
               <a:ext uri="{FF2B5EF4-FFF2-40B4-BE49-F238E27FC236}">
-                <a16:creationId xmlns:a16="http://schemas.microsoft.com/office/drawing/2014/main" id="{7DD287F0-BA4D-48B0-9113-069935BE68F8}"/>
+                <a16:creationId xmlns:a16="http://schemas.microsoft.com/office/drawing/2014/main" id="{95D7E99E-A56C-4B6C-A507-B457530BF238}"/>
               </a:ext>
             </a:extLst>
           </p:cNvPr>
@@ -12965,7 +12965,7 @@
           <p:nvPr/>
         </p:nvPicPr>
         <p:blipFill>
-          <a:blip xmlns:r="http://schemas.openxmlformats.org/officeDocument/2006/relationships" xmlns:a="http://schemas.openxmlformats.org/drawingml/2006/main" r:embed="Rda35c7986da643ed"/>
+          <a:blip xmlns:r="http://schemas.openxmlformats.org/officeDocument/2006/relationships" xmlns:a="http://schemas.openxmlformats.org/drawingml/2006/main" r:embed="R6a58891283484309"/>
           <a:stretch xmlns:a="http://schemas.openxmlformats.org/drawingml/2006/main"/>
         </p:blipFill>
         <p:spPr>
@@ -12983,7 +12983,7 @@
           <p:cNvPr id="6" name="">
             <a:extLst xmlns:a="http://schemas.openxmlformats.org/drawingml/2006/main">
               <a:ext uri="{FF2B5EF4-FFF2-40B4-BE49-F238E27FC236}">
-                <a16:creationId xmlns:a16="http://schemas.microsoft.com/office/drawing/2014/main" id="{58FFF677-34A2-4CCC-BF55-87260AFEE2C1}"/>
+                <a16:creationId xmlns:a16="http://schemas.microsoft.com/office/drawing/2014/main" id="{D21A85F6-CB44-4577-A982-33B3F4E31A1E}"/>
               </a:ext>
             </a:extLst>
           </p:cNvPr>
@@ -13049,7 +13049,7 @@
     </p:spTree>
     <p:extLst>
       <p:ext uri="{BB962C8B-B14F-4D97-AF65-F5344CB8AC3E}">
-        <p14:creationId xmlns:p14="http://schemas.microsoft.com/office/powerpoint/2010/main" val="2036914875"/>
+        <p14:creationId xmlns:p14="http://schemas.microsoft.com/office/powerpoint/2010/main" val="1195847324"/>
       </p:ext>
     </p:extLst>
   </p:cSld>
@@ -13080,7 +13080,7 @@
           <p:cNvPr id="9" name="">
             <a:extLst xmlns:a="http://schemas.openxmlformats.org/drawingml/2006/main">
               <a:ext uri="{FF2B5EF4-FFF2-40B4-BE49-F238E27FC236}">
-                <a16:creationId xmlns:a16="http://schemas.microsoft.com/office/drawing/2014/main" id="{0146C1E2-2CFA-44DE-89A9-4A0926FCC292}"/>
+                <a16:creationId xmlns:a16="http://schemas.microsoft.com/office/drawing/2014/main" id="{1133DB64-491B-498C-958A-5ED89ACE3045}"/>
               </a:ext>
             </a:extLst>
           </p:cNvPr>
@@ -13148,7 +13148,7 @@
           <p:cNvPr id="2" name="">
             <a:extLst xmlns:a="http://schemas.openxmlformats.org/drawingml/2006/main">
               <a:ext uri="{FF2B5EF4-FFF2-40B4-BE49-F238E27FC236}">
-                <a16:creationId xmlns:a16="http://schemas.microsoft.com/office/drawing/2014/main" id="{0EEB33AC-E8D7-4AD9-8C9A-8C94704D2733}"/>
+                <a16:creationId xmlns:a16="http://schemas.microsoft.com/office/drawing/2014/main" id="{4C0538F0-DA31-46AE-B07D-7EC4869501FE}"/>
               </a:ext>
             </a:extLst>
           </p:cNvPr>
@@ -13216,7 +13216,7 @@
           <p:cNvPr id="3" name="">
             <a:extLst xmlns:a="http://schemas.openxmlformats.org/drawingml/2006/main">
               <a:ext uri="{FF2B5EF4-FFF2-40B4-BE49-F238E27FC236}">
-                <a16:creationId xmlns:a16="http://schemas.microsoft.com/office/drawing/2014/main" id="{8797F0D8-3AE6-43AD-8FB4-FAF3DECC56FB}"/>
+                <a16:creationId xmlns:a16="http://schemas.microsoft.com/office/drawing/2014/main" id="{09ECFA95-264D-49CC-A623-4FCDE1E03A77}"/>
               </a:ext>
             </a:extLst>
           </p:cNvPr>
@@ -13246,7 +13246,7 @@
           <p:cNvPr id="4" name="">
             <a:extLst xmlns:a="http://schemas.openxmlformats.org/drawingml/2006/main">
               <a:ext uri="{FF2B5EF4-FFF2-40B4-BE49-F238E27FC236}">
-                <a16:creationId xmlns:a16="http://schemas.microsoft.com/office/drawing/2014/main" id="{AF5671E1-A47E-4034-814B-0182E392631C}"/>
+                <a16:creationId xmlns:a16="http://schemas.microsoft.com/office/drawing/2014/main" id="{CDDE2BD8-339F-4B5F-A47E-4F03958604F3}"/>
               </a:ext>
             </a:extLst>
           </p:cNvPr>
@@ -13314,7 +13314,7 @@
           <p:cNvPr id="5" name="">
             <a:extLst xmlns:a="http://schemas.openxmlformats.org/drawingml/2006/main">
               <a:ext uri="{FF2B5EF4-FFF2-40B4-BE49-F238E27FC236}">
-                <a16:creationId xmlns:a16="http://schemas.microsoft.com/office/drawing/2014/main" id="{AB5FBF24-8754-4EE4-91DB-F2ECA9EBD25B}"/>
+                <a16:creationId xmlns:a16="http://schemas.microsoft.com/office/drawing/2014/main" id="{F9B47B00-546D-4759-B207-A9D494763FCC}"/>
               </a:ext>
             </a:extLst>
           </p:cNvPr>
@@ -13382,7 +13382,7 @@
           <p:cNvPr id="6" name="">
             <a:extLst xmlns:a="http://schemas.openxmlformats.org/drawingml/2006/main">
               <a:ext uri="{FF2B5EF4-FFF2-40B4-BE49-F238E27FC236}">
-                <a16:creationId xmlns:a16="http://schemas.microsoft.com/office/drawing/2014/main" id="{B234E982-04D9-4624-BFF5-A1208A31254E}"/>
+                <a16:creationId xmlns:a16="http://schemas.microsoft.com/office/drawing/2014/main" id="{690BE8C4-6F24-4BBA-8FDD-5AB57EBD2410}"/>
               </a:ext>
             </a:extLst>
           </p:cNvPr>
@@ -13473,7 +13473,7 @@
           <p:cNvPr id="7" name="">
             <a:extLst xmlns:a="http://schemas.openxmlformats.org/drawingml/2006/main">
               <a:ext uri="{FF2B5EF4-FFF2-40B4-BE49-F238E27FC236}">
-                <a16:creationId xmlns:a16="http://schemas.microsoft.com/office/drawing/2014/main" id="{AB63F4CF-9743-4177-A8D2-CDC82B56CB6A}"/>
+                <a16:creationId xmlns:a16="http://schemas.microsoft.com/office/drawing/2014/main" id="{E7547FF6-DE56-4734-98FB-60C65EA5B990}"/>
               </a:ext>
             </a:extLst>
           </p:cNvPr>
@@ -13587,7 +13587,7 @@
           <p:cNvPr id="8" name="">
             <a:extLst xmlns:a="http://schemas.openxmlformats.org/drawingml/2006/main">
               <a:ext uri="{FF2B5EF4-FFF2-40B4-BE49-F238E27FC236}">
-                <a16:creationId xmlns:a16="http://schemas.microsoft.com/office/drawing/2014/main" id="{26622C4B-CCBE-4298-8AED-4F19B8A128AB}"/>
+                <a16:creationId xmlns:a16="http://schemas.microsoft.com/office/drawing/2014/main" id="{8E899CFE-0E4E-43F1-832A-94359BEA349D}"/>
               </a:ext>
             </a:extLst>
           </p:cNvPr>
@@ -13653,7 +13653,7 @@
     </p:spTree>
     <p:extLst>
       <p:ext uri="{BB962C8B-B14F-4D97-AF65-F5344CB8AC3E}">
-        <p14:creationId xmlns:p14="http://schemas.microsoft.com/office/powerpoint/2010/main" val="1165829927"/>
+        <p14:creationId xmlns:p14="http://schemas.microsoft.com/office/powerpoint/2010/main" val="513984540"/>
       </p:ext>
     </p:extLst>
   </p:cSld>
@@ -13684,7 +13684,7 @@
           <p:cNvPr id="17" name="">
             <a:extLst xmlns:a="http://schemas.openxmlformats.org/drawingml/2006/main">
               <a:ext uri="{FF2B5EF4-FFF2-40B4-BE49-F238E27FC236}">
-                <a16:creationId xmlns:a16="http://schemas.microsoft.com/office/drawing/2014/main" id="{85AA5E60-40E8-4292-B4A6-934AEF0BBE37}"/>
+                <a16:creationId xmlns:a16="http://schemas.microsoft.com/office/drawing/2014/main" id="{258D3324-ED1D-42BC-9AE9-81C396271686}"/>
               </a:ext>
             </a:extLst>
           </p:cNvPr>
@@ -13752,7 +13752,7 @@
           <p:cNvPr id="2" name="">
             <a:extLst xmlns:a="http://schemas.openxmlformats.org/drawingml/2006/main">
               <a:ext uri="{FF2B5EF4-FFF2-40B4-BE49-F238E27FC236}">
-                <a16:creationId xmlns:a16="http://schemas.microsoft.com/office/drawing/2014/main" id="{7AC70333-005E-4713-9746-A7B5743650F1}"/>
+                <a16:creationId xmlns:a16="http://schemas.microsoft.com/office/drawing/2014/main" id="{0F13EE9E-D060-45E7-9E05-70EC3D21E051}"/>
               </a:ext>
             </a:extLst>
           </p:cNvPr>
@@ -13820,7 +13820,7 @@
           <p:cNvPr id="3" name="">
             <a:extLst xmlns:a="http://schemas.openxmlformats.org/drawingml/2006/main">
               <a:ext uri="{FF2B5EF4-FFF2-40B4-BE49-F238E27FC236}">
-                <a16:creationId xmlns:a16="http://schemas.microsoft.com/office/drawing/2014/main" id="{6E14AE3D-D2B5-49B6-AA70-4EBC1C3E2591}"/>
+                <a16:creationId xmlns:a16="http://schemas.microsoft.com/office/drawing/2014/main" id="{FB1ABBEF-C56C-4B17-9E85-79A00D7AAABF}"/>
               </a:ext>
             </a:extLst>
           </p:cNvPr>
@@ -13850,7 +13850,7 @@
           <p:cNvPr id="4" name="">
             <a:extLst xmlns:a="http://schemas.openxmlformats.org/drawingml/2006/main">
               <a:ext uri="{FF2B5EF4-FFF2-40B4-BE49-F238E27FC236}">
-                <a16:creationId xmlns:a16="http://schemas.microsoft.com/office/drawing/2014/main" id="{E11A744D-7018-432A-8AA7-190213F41198}"/>
+                <a16:creationId xmlns:a16="http://schemas.microsoft.com/office/drawing/2014/main" id="{D31177DD-0BC4-4FC4-887B-AFA00864B080}"/>
               </a:ext>
             </a:extLst>
           </p:cNvPr>
@@ -13918,7 +13918,7 @@
           <p:cNvPr id="5" name="">
             <a:extLst xmlns:a="http://schemas.openxmlformats.org/drawingml/2006/main">
               <a:ext uri="{FF2B5EF4-FFF2-40B4-BE49-F238E27FC236}">
-                <a16:creationId xmlns:a16="http://schemas.microsoft.com/office/drawing/2014/main" id="{F9F999EE-E21D-477E-9680-3697B5201A12}"/>
+                <a16:creationId xmlns:a16="http://schemas.microsoft.com/office/drawing/2014/main" id="{D226D09A-415B-48FC-9419-9126038941D2}"/>
               </a:ext>
             </a:extLst>
           </p:cNvPr>
@@ -13986,7 +13986,7 @@
           <p:cNvPr id="6" name="">
             <a:extLst xmlns:a="http://schemas.openxmlformats.org/drawingml/2006/main">
               <a:ext uri="{FF2B5EF4-FFF2-40B4-BE49-F238E27FC236}">
-                <a16:creationId xmlns:a16="http://schemas.microsoft.com/office/drawing/2014/main" id="{E1D7179C-5AF8-446B-8C7D-3948B21E0034}"/>
+                <a16:creationId xmlns:a16="http://schemas.microsoft.com/office/drawing/2014/main" id="{254B5356-756D-475B-A5FF-507728084D41}"/>
               </a:ext>
             </a:extLst>
           </p:cNvPr>
@@ -14054,7 +14054,7 @@
           <p:cNvPr id="7" name="">
             <a:extLst xmlns:a="http://schemas.openxmlformats.org/drawingml/2006/main">
               <a:ext uri="{FF2B5EF4-FFF2-40B4-BE49-F238E27FC236}">
-                <a16:creationId xmlns:a16="http://schemas.microsoft.com/office/drawing/2014/main" id="{328C22C1-9159-4BB1-AEFC-872033739E17}"/>
+                <a16:creationId xmlns:a16="http://schemas.microsoft.com/office/drawing/2014/main" id="{37612677-FA3B-4E84-ADE3-FA51345D21DD}"/>
               </a:ext>
             </a:extLst>
           </p:cNvPr>
@@ -14122,7 +14122,7 @@
           <p:cNvPr id="8" name="">
             <a:extLst xmlns:a="http://schemas.openxmlformats.org/drawingml/2006/main">
               <a:ext uri="{FF2B5EF4-FFF2-40B4-BE49-F238E27FC236}">
-                <a16:creationId xmlns:a16="http://schemas.microsoft.com/office/drawing/2014/main" id="{98EA283D-42E4-418C-B3FE-EF294FE48B45}"/>
+                <a16:creationId xmlns:a16="http://schemas.microsoft.com/office/drawing/2014/main" id="{3E246905-C362-4821-8538-BCF36BDF0FBD}"/>
               </a:ext>
             </a:extLst>
           </p:cNvPr>
@@ -14190,7 +14190,7 @@
           <p:cNvPr id="9" name="">
             <a:extLst xmlns:a="http://schemas.openxmlformats.org/drawingml/2006/main">
               <a:ext uri="{FF2B5EF4-FFF2-40B4-BE49-F238E27FC236}">
-                <a16:creationId xmlns:a16="http://schemas.microsoft.com/office/drawing/2014/main" id="{1DC5D429-FF3F-4160-BF32-DC241F52F7E2}"/>
+                <a16:creationId xmlns:a16="http://schemas.microsoft.com/office/drawing/2014/main" id="{DF5CFEE7-475F-47CA-B2D8-2DB0C49F0C76}"/>
               </a:ext>
             </a:extLst>
           </p:cNvPr>
@@ -14258,7 +14258,7 @@
           <p:cNvPr id="10" name="">
             <a:extLst xmlns:a="http://schemas.openxmlformats.org/drawingml/2006/main">
               <a:ext uri="{FF2B5EF4-FFF2-40B4-BE49-F238E27FC236}">
-                <a16:creationId xmlns:a16="http://schemas.microsoft.com/office/drawing/2014/main" id="{3F4FCDFD-B4B1-4606-B489-7A3F8A9010FB}"/>
+                <a16:creationId xmlns:a16="http://schemas.microsoft.com/office/drawing/2014/main" id="{5199072A-405F-4703-A554-2553913A589D}"/>
               </a:ext>
             </a:extLst>
           </p:cNvPr>
@@ -14326,7 +14326,7 @@
           <p:cNvPr id="11" name="">
             <a:extLst xmlns:a="http://schemas.openxmlformats.org/drawingml/2006/main">
               <a:ext uri="{FF2B5EF4-FFF2-40B4-BE49-F238E27FC236}">
-                <a16:creationId xmlns:a16="http://schemas.microsoft.com/office/drawing/2014/main" id="{CE24FF64-4A9D-4A8D-8FD7-ABA0A29BF573}"/>
+                <a16:creationId xmlns:a16="http://schemas.microsoft.com/office/drawing/2014/main" id="{56855A95-A6BC-4A86-9A91-7D7A0361FA12}"/>
               </a:ext>
             </a:extLst>
           </p:cNvPr>
@@ -14394,7 +14394,7 @@
           <p:cNvPr id="12" name="">
             <a:extLst xmlns:a="http://schemas.openxmlformats.org/drawingml/2006/main">
               <a:ext uri="{FF2B5EF4-FFF2-40B4-BE49-F238E27FC236}">
-                <a16:creationId xmlns:a16="http://schemas.microsoft.com/office/drawing/2014/main" id="{FFCA6CBF-5213-4346-B84B-9756DC502FB1}"/>
+                <a16:creationId xmlns:a16="http://schemas.microsoft.com/office/drawing/2014/main" id="{B4375C25-DA5E-4FA8-853A-EAB0333D15D6}"/>
               </a:ext>
             </a:extLst>
           </p:cNvPr>
@@ -14462,7 +14462,7 @@
           <p:cNvPr id="13" name="">
             <a:extLst xmlns:a="http://schemas.openxmlformats.org/drawingml/2006/main">
               <a:ext uri="{FF2B5EF4-FFF2-40B4-BE49-F238E27FC236}">
-                <a16:creationId xmlns:a16="http://schemas.microsoft.com/office/drawing/2014/main" id="{FE65F429-8FB2-4A9D-87CD-1D1DC9FC0420}"/>
+                <a16:creationId xmlns:a16="http://schemas.microsoft.com/office/drawing/2014/main" id="{371F3E5F-45A0-448C-A2A2-4EBCF41148AE}"/>
               </a:ext>
             </a:extLst>
           </p:cNvPr>
@@ -14530,7 +14530,7 @@
           <p:cNvPr id="14" name="">
             <a:extLst xmlns:a="http://schemas.openxmlformats.org/drawingml/2006/main">
               <a:ext uri="{FF2B5EF4-FFF2-40B4-BE49-F238E27FC236}">
-                <a16:creationId xmlns:a16="http://schemas.microsoft.com/office/drawing/2014/main" id="{C5E5FD95-2D55-47AB-819C-84C4EC6988E9}"/>
+                <a16:creationId xmlns:a16="http://schemas.microsoft.com/office/drawing/2014/main" id="{381AC1FD-B8E8-450E-B427-C93CEE121F6C}"/>
               </a:ext>
             </a:extLst>
           </p:cNvPr>
@@ -14598,7 +14598,7 @@
           <p:cNvPr id="15" name="">
             <a:extLst xmlns:a="http://schemas.openxmlformats.org/drawingml/2006/main">
               <a:ext uri="{FF2B5EF4-FFF2-40B4-BE49-F238E27FC236}">
-                <a16:creationId xmlns:a16="http://schemas.microsoft.com/office/drawing/2014/main" id="{EEC2D58D-5CE4-4531-8D64-A2AF1D76CBB0}"/>
+                <a16:creationId xmlns:a16="http://schemas.microsoft.com/office/drawing/2014/main" id="{69D2A228-27BE-4D18-9175-A4E481DB5DDA}"/>
               </a:ext>
             </a:extLst>
           </p:cNvPr>
@@ -14666,7 +14666,7 @@
           <p:cNvPr id="16" name="">
             <a:extLst xmlns:a="http://schemas.openxmlformats.org/drawingml/2006/main">
               <a:ext uri="{FF2B5EF4-FFF2-40B4-BE49-F238E27FC236}">
-                <a16:creationId xmlns:a16="http://schemas.microsoft.com/office/drawing/2014/main" id="{FBB5A486-03EF-4805-BFB6-5F2C28A90987}"/>
+                <a16:creationId xmlns:a16="http://schemas.microsoft.com/office/drawing/2014/main" id="{ECF50BC6-EEA7-4341-A7B5-FCB1593398ED}"/>
               </a:ext>
             </a:extLst>
           </p:cNvPr>
@@ -14732,7 +14732,7 @@
     </p:spTree>
     <p:extLst>
       <p:ext uri="{BB962C8B-B14F-4D97-AF65-F5344CB8AC3E}">
-        <p14:creationId xmlns:p14="http://schemas.microsoft.com/office/powerpoint/2010/main" val="106138996"/>
+        <p14:creationId xmlns:p14="http://schemas.microsoft.com/office/powerpoint/2010/main" val="1676871027"/>
       </p:ext>
     </p:extLst>
   </p:cSld>
@@ -14763,7 +14763,7 @@
           <p:cNvPr id="10" name="">
             <a:extLst xmlns:a="http://schemas.openxmlformats.org/drawingml/2006/main">
               <a:ext uri="{FF2B5EF4-FFF2-40B4-BE49-F238E27FC236}">
-                <a16:creationId xmlns:a16="http://schemas.microsoft.com/office/drawing/2014/main" id="{53232C4C-3CAC-4301-871C-D0D1F7F17997}"/>
+                <a16:creationId xmlns:a16="http://schemas.microsoft.com/office/drawing/2014/main" id="{00EFD12B-7AD3-4619-A497-4D73C920B3EC}"/>
               </a:ext>
             </a:extLst>
           </p:cNvPr>
@@ -14831,7 +14831,7 @@
           <p:cNvPr id="2" name="">
             <a:extLst xmlns:a="http://schemas.openxmlformats.org/drawingml/2006/main">
               <a:ext uri="{FF2B5EF4-FFF2-40B4-BE49-F238E27FC236}">
-                <a16:creationId xmlns:a16="http://schemas.microsoft.com/office/drawing/2014/main" id="{B1AA31F6-8038-4C45-AC40-88C2A2C57002}"/>
+                <a16:creationId xmlns:a16="http://schemas.microsoft.com/office/drawing/2014/main" id="{9C7BAA81-2EC1-4FD2-A2C3-488D5B5A0AA4}"/>
               </a:ext>
             </a:extLst>
           </p:cNvPr>
@@ -14899,7 +14899,7 @@
           <p:cNvPr id="3" name="">
             <a:extLst xmlns:a="http://schemas.openxmlformats.org/drawingml/2006/main">
               <a:ext uri="{FF2B5EF4-FFF2-40B4-BE49-F238E27FC236}">
-                <a16:creationId xmlns:a16="http://schemas.microsoft.com/office/drawing/2014/main" id="{3E4AE725-A755-4128-A95C-8DC6EF2DD1F7}"/>
+                <a16:creationId xmlns:a16="http://schemas.microsoft.com/office/drawing/2014/main" id="{3B3CA2A1-D1F5-4C37-AC98-448813345521}"/>
               </a:ext>
             </a:extLst>
           </p:cNvPr>
@@ -14929,7 +14929,7 @@
           <p:cNvPr id="4" name="">
             <a:extLst xmlns:a="http://schemas.openxmlformats.org/drawingml/2006/main">
               <a:ext uri="{FF2B5EF4-FFF2-40B4-BE49-F238E27FC236}">
-                <a16:creationId xmlns:a16="http://schemas.microsoft.com/office/drawing/2014/main" id="{35A99F34-EDA9-4024-9D81-22CF924DBB4D}"/>
+                <a16:creationId xmlns:a16="http://schemas.microsoft.com/office/drawing/2014/main" id="{83DF7DD4-B03F-4812-8256-CF2278978236}"/>
               </a:ext>
             </a:extLst>
           </p:cNvPr>
@@ -14997,7 +14997,7 @@
           <p:cNvPr id="5" name="">
             <a:extLst xmlns:a="http://schemas.openxmlformats.org/drawingml/2006/main">
               <a:ext uri="{FF2B5EF4-FFF2-40B4-BE49-F238E27FC236}">
-                <a16:creationId xmlns:a16="http://schemas.microsoft.com/office/drawing/2014/main" id="{19420D88-1C52-4E3D-89AD-1D2F2A92AA3A}"/>
+                <a16:creationId xmlns:a16="http://schemas.microsoft.com/office/drawing/2014/main" id="{DCE931FF-6971-4E4E-AFF9-16803133293C}"/>
               </a:ext>
             </a:extLst>
           </p:cNvPr>
@@ -15065,7 +15065,7 @@
           <p:cNvPr id="6" name="">
             <a:extLst xmlns:a="http://schemas.openxmlformats.org/drawingml/2006/main">
               <a:ext uri="{FF2B5EF4-FFF2-40B4-BE49-F238E27FC236}">
-                <a16:creationId xmlns:a16="http://schemas.microsoft.com/office/drawing/2014/main" id="{691DEDAD-0A84-4FB6-B78A-2AF8AA03D120}"/>
+                <a16:creationId xmlns:a16="http://schemas.microsoft.com/office/drawing/2014/main" id="{EAE316F9-D80F-4D43-8B64-63B97A8D83C5}"/>
               </a:ext>
             </a:extLst>
           </p:cNvPr>
@@ -15179,7 +15179,7 @@
           <p:cNvPr id="7" name="">
             <a:extLst xmlns:a="http://schemas.openxmlformats.org/drawingml/2006/main">
               <a:ext uri="{FF2B5EF4-FFF2-40B4-BE49-F238E27FC236}">
-                <a16:creationId xmlns:a16="http://schemas.microsoft.com/office/drawing/2014/main" id="{3FB72415-4605-4F12-9E80-6CAAB8B41C6A}"/>
+                <a16:creationId xmlns:a16="http://schemas.microsoft.com/office/drawing/2014/main" id="{5CD9E755-F37E-477B-84D7-8D6446D8EDAF}"/>
               </a:ext>
             </a:extLst>
           </p:cNvPr>
@@ -15247,7 +15247,7 @@
           <p:cNvPr id="8" name="">
             <a:extLst xmlns:a="http://schemas.openxmlformats.org/drawingml/2006/main">
               <a:ext uri="{FF2B5EF4-FFF2-40B4-BE49-F238E27FC236}">
-                <a16:creationId xmlns:a16="http://schemas.microsoft.com/office/drawing/2014/main" id="{438F3FF9-95D8-4694-A05E-D77DFEAB9B53}"/>
+                <a16:creationId xmlns:a16="http://schemas.microsoft.com/office/drawing/2014/main" id="{561265ED-1D64-41D5-B1BF-1C572B4A38FB}"/>
               </a:ext>
             </a:extLst>
           </p:cNvPr>
@@ -15361,7 +15361,7 @@
           <p:cNvPr id="9" name="">
             <a:extLst xmlns:a="http://schemas.openxmlformats.org/drawingml/2006/main">
               <a:ext uri="{FF2B5EF4-FFF2-40B4-BE49-F238E27FC236}">
-                <a16:creationId xmlns:a16="http://schemas.microsoft.com/office/drawing/2014/main" id="{4035903C-4A73-413B-AC46-0A6F312C5DDA}"/>
+                <a16:creationId xmlns:a16="http://schemas.microsoft.com/office/drawing/2014/main" id="{2701AEF8-CBB6-4EF6-97B2-0DB61CE59164}"/>
               </a:ext>
             </a:extLst>
           </p:cNvPr>
@@ -15427,7 +15427,7 @@
     </p:spTree>
     <p:extLst>
       <p:ext uri="{BB962C8B-B14F-4D97-AF65-F5344CB8AC3E}">
-        <p14:creationId xmlns:p14="http://schemas.microsoft.com/office/powerpoint/2010/main" val="1573657661"/>
+        <p14:creationId xmlns:p14="http://schemas.microsoft.com/office/powerpoint/2010/main" val="581218751"/>
       </p:ext>
     </p:extLst>
   </p:cSld>
@@ -15458,7 +15458,7 @@
           <p:cNvPr id="15" name="">
             <a:extLst xmlns:a="http://schemas.openxmlformats.org/drawingml/2006/main">
               <a:ext uri="{FF2B5EF4-FFF2-40B4-BE49-F238E27FC236}">
-                <a16:creationId xmlns:a16="http://schemas.microsoft.com/office/drawing/2014/main" id="{34B8FF36-2EEA-4E59-A17B-35562AA07D59}"/>
+                <a16:creationId xmlns:a16="http://schemas.microsoft.com/office/drawing/2014/main" id="{0A8B0BC8-F7AB-42A9-9DF8-FEC9D1E48ADC}"/>
               </a:ext>
             </a:extLst>
           </p:cNvPr>
@@ -15526,7 +15526,7 @@
           <p:cNvPr id="2" name="">
             <a:extLst xmlns:a="http://schemas.openxmlformats.org/drawingml/2006/main">
               <a:ext uri="{FF2B5EF4-FFF2-40B4-BE49-F238E27FC236}">
-                <a16:creationId xmlns:a16="http://schemas.microsoft.com/office/drawing/2014/main" id="{88537AD5-51B1-46D1-AF6A-1015665C5D74}"/>
+                <a16:creationId xmlns:a16="http://schemas.microsoft.com/office/drawing/2014/main" id="{7C0A9619-3D4E-49C9-8AB7-C531E022F62E}"/>
               </a:ext>
             </a:extLst>
           </p:cNvPr>
@@ -15594,7 +15594,7 @@
           <p:cNvPr id="3" name="">
             <a:extLst xmlns:a="http://schemas.openxmlformats.org/drawingml/2006/main">
               <a:ext uri="{FF2B5EF4-FFF2-40B4-BE49-F238E27FC236}">
-                <a16:creationId xmlns:a16="http://schemas.microsoft.com/office/drawing/2014/main" id="{34475EF5-1FBB-4474-ACA5-F0361C28E6C4}"/>
+                <a16:creationId xmlns:a16="http://schemas.microsoft.com/office/drawing/2014/main" id="{81E3DEC3-3E73-4B62-AB6C-A4BA921A46B6}"/>
               </a:ext>
             </a:extLst>
           </p:cNvPr>
@@ -15624,7 +15624,7 @@
           <p:cNvPr id="4" name="">
             <a:extLst xmlns:a="http://schemas.openxmlformats.org/drawingml/2006/main">
               <a:ext uri="{FF2B5EF4-FFF2-40B4-BE49-F238E27FC236}">
-                <a16:creationId xmlns:a16="http://schemas.microsoft.com/office/drawing/2014/main" id="{84A9B7CD-A40E-45C1-8196-F8DCB8A2CAB2}"/>
+                <a16:creationId xmlns:a16="http://schemas.microsoft.com/office/drawing/2014/main" id="{9C45EDA8-BEDE-4A5C-B0D8-DE70A9306797}"/>
               </a:ext>
             </a:extLst>
           </p:cNvPr>
@@ -15692,7 +15692,7 @@
           <p:cNvPr id="5" name="">
             <a:extLst xmlns:a="http://schemas.openxmlformats.org/drawingml/2006/main">
               <a:ext uri="{FF2B5EF4-FFF2-40B4-BE49-F238E27FC236}">
-                <a16:creationId xmlns:a16="http://schemas.microsoft.com/office/drawing/2014/main" id="{AC8854DC-92F6-4937-906A-150CF302969F}"/>
+                <a16:creationId xmlns:a16="http://schemas.microsoft.com/office/drawing/2014/main" id="{36A03AE5-0CF9-4205-924B-6B4839F14F90}"/>
               </a:ext>
             </a:extLst>
           </p:cNvPr>
@@ -15760,7 +15760,7 @@
           <p:cNvPr id="6" name="">
             <a:extLst xmlns:a="http://schemas.openxmlformats.org/drawingml/2006/main">
               <a:ext uri="{FF2B5EF4-FFF2-40B4-BE49-F238E27FC236}">
-                <a16:creationId xmlns:a16="http://schemas.microsoft.com/office/drawing/2014/main" id="{6380D7C9-096B-448F-ACDD-25D7AF344D4E}"/>
+                <a16:creationId xmlns:a16="http://schemas.microsoft.com/office/drawing/2014/main" id="{8350A33D-AA09-4CF9-AF61-2D0DCA26079D}"/>
               </a:ext>
             </a:extLst>
           </p:cNvPr>
@@ -15828,7 +15828,7 @@
           <p:cNvPr id="7" name="">
             <a:extLst xmlns:a="http://schemas.openxmlformats.org/drawingml/2006/main">
               <a:ext uri="{FF2B5EF4-FFF2-40B4-BE49-F238E27FC236}">
-                <a16:creationId xmlns:a16="http://schemas.microsoft.com/office/drawing/2014/main" id="{27FFFE5B-B924-47EF-B09E-8196BC867B71}"/>
+                <a16:creationId xmlns:a16="http://schemas.microsoft.com/office/drawing/2014/main" id="{706279C4-5735-42E2-8AD9-03BA3AD27C3F}"/>
               </a:ext>
             </a:extLst>
           </p:cNvPr>
@@ -15896,7 +15896,7 @@
           <p:cNvPr id="8" name="">
             <a:extLst xmlns:a="http://schemas.openxmlformats.org/drawingml/2006/main">
               <a:ext uri="{FF2B5EF4-FFF2-40B4-BE49-F238E27FC236}">
-                <a16:creationId xmlns:a16="http://schemas.microsoft.com/office/drawing/2014/main" id="{2A117A64-BFFC-461C-9995-31704490B2CE}"/>
+                <a16:creationId xmlns:a16="http://schemas.microsoft.com/office/drawing/2014/main" id="{86A633A9-869D-4375-8ADC-8B9E3C127EC2}"/>
               </a:ext>
             </a:extLst>
           </p:cNvPr>
@@ -15964,7 +15964,7 @@
           <p:cNvPr id="9" name="">
             <a:extLst xmlns:a="http://schemas.openxmlformats.org/drawingml/2006/main">
               <a:ext uri="{FF2B5EF4-FFF2-40B4-BE49-F238E27FC236}">
-                <a16:creationId xmlns:a16="http://schemas.microsoft.com/office/drawing/2014/main" id="{40BB45D4-3801-432C-8C3E-292B9E3A3F63}"/>
+                <a16:creationId xmlns:a16="http://schemas.microsoft.com/office/drawing/2014/main" id="{9D70FE82-88CC-4886-9E1A-60C3EDC2C284}"/>
               </a:ext>
             </a:extLst>
           </p:cNvPr>
@@ -16032,7 +16032,7 @@
           <p:cNvPr id="10" name="">
             <a:extLst xmlns:a="http://schemas.openxmlformats.org/drawingml/2006/main">
               <a:ext uri="{FF2B5EF4-FFF2-40B4-BE49-F238E27FC236}">
-                <a16:creationId xmlns:a16="http://schemas.microsoft.com/office/drawing/2014/main" id="{FAE39391-BA61-4FEC-AED7-5334803D285C}"/>
+                <a16:creationId xmlns:a16="http://schemas.microsoft.com/office/drawing/2014/main" id="{6622C72D-62CF-418A-919C-3A57821B7BA0}"/>
               </a:ext>
             </a:extLst>
           </p:cNvPr>
@@ -16100,7 +16100,7 @@
           <p:cNvPr id="11" name="">
             <a:extLst xmlns:a="http://schemas.openxmlformats.org/drawingml/2006/main">
               <a:ext uri="{FF2B5EF4-FFF2-40B4-BE49-F238E27FC236}">
-                <a16:creationId xmlns:a16="http://schemas.microsoft.com/office/drawing/2014/main" id="{D5311A58-AAFC-4C48-B0B6-65DC723D315A}"/>
+                <a16:creationId xmlns:a16="http://schemas.microsoft.com/office/drawing/2014/main" id="{B9FCA7A8-5F69-4AAB-B6A4-07969E17A9BD}"/>
               </a:ext>
             </a:extLst>
           </p:cNvPr>
@@ -16168,7 +16168,7 @@
           <p:cNvPr id="12" name="">
             <a:extLst xmlns:a="http://schemas.openxmlformats.org/drawingml/2006/main">
               <a:ext uri="{FF2B5EF4-FFF2-40B4-BE49-F238E27FC236}">
-                <a16:creationId xmlns:a16="http://schemas.microsoft.com/office/drawing/2014/main" id="{80B99A39-D95D-4198-B93A-AD9E73DBE263}"/>
+                <a16:creationId xmlns:a16="http://schemas.microsoft.com/office/drawing/2014/main" id="{915507FF-EA45-44B7-8570-E542C5F56818}"/>
               </a:ext>
             </a:extLst>
           </p:cNvPr>
@@ -16236,7 +16236,7 @@
           <p:cNvPr id="13" name="">
             <a:extLst xmlns:a="http://schemas.openxmlformats.org/drawingml/2006/main">
               <a:ext uri="{FF2B5EF4-FFF2-40B4-BE49-F238E27FC236}">
-                <a16:creationId xmlns:a16="http://schemas.microsoft.com/office/drawing/2014/main" id="{D2475072-69C9-478E-9142-3A19E5A125DB}"/>
+                <a16:creationId xmlns:a16="http://schemas.microsoft.com/office/drawing/2014/main" id="{8A9CE9C8-4C5E-49D3-86DF-C69917A649EA}"/>
               </a:ext>
             </a:extLst>
           </p:cNvPr>
@@ -16304,7 +16304,7 @@
           <p:cNvPr id="14" name="">
             <a:extLst xmlns:a="http://schemas.openxmlformats.org/drawingml/2006/main">
               <a:ext uri="{FF2B5EF4-FFF2-40B4-BE49-F238E27FC236}">
-                <a16:creationId xmlns:a16="http://schemas.microsoft.com/office/drawing/2014/main" id="{E0C18708-3F1B-4F76-8A6F-F4498642843F}"/>
+                <a16:creationId xmlns:a16="http://schemas.microsoft.com/office/drawing/2014/main" id="{6E6F8B4C-3BCF-444E-BC1D-5BE6C27B5A38}"/>
               </a:ext>
             </a:extLst>
           </p:cNvPr>
@@ -16370,7 +16370,7 @@
     </p:spTree>
     <p:extLst>
       <p:ext uri="{BB962C8B-B14F-4D97-AF65-F5344CB8AC3E}">
-        <p14:creationId xmlns:p14="http://schemas.microsoft.com/office/powerpoint/2010/main" val="1779606114"/>
+        <p14:creationId xmlns:p14="http://schemas.microsoft.com/office/powerpoint/2010/main" val="1232655631"/>
       </p:ext>
     </p:extLst>
   </p:cSld>
@@ -16401,7 +16401,7 @@
           <p:cNvPr id="29" name="">
             <a:extLst xmlns:a="http://schemas.openxmlformats.org/drawingml/2006/main">
               <a:ext uri="{FF2B5EF4-FFF2-40B4-BE49-F238E27FC236}">
-                <a16:creationId xmlns:a16="http://schemas.microsoft.com/office/drawing/2014/main" id="{66C76FDD-752A-4B9D-B55A-E47C4365DD4F}"/>
+                <a16:creationId xmlns:a16="http://schemas.microsoft.com/office/drawing/2014/main" id="{19387029-8C1F-4379-AFD3-405D244401AC}"/>
               </a:ext>
             </a:extLst>
           </p:cNvPr>
@@ -16469,7 +16469,7 @@
           <p:cNvPr id="2" name="">
             <a:extLst xmlns:a="http://schemas.openxmlformats.org/drawingml/2006/main">
               <a:ext uri="{FF2B5EF4-FFF2-40B4-BE49-F238E27FC236}">
-                <a16:creationId xmlns:a16="http://schemas.microsoft.com/office/drawing/2014/main" id="{8F11FDC8-D9A7-4643-A14A-3A5665CCB902}"/>
+                <a16:creationId xmlns:a16="http://schemas.microsoft.com/office/drawing/2014/main" id="{619F5922-5AFB-4587-8464-3DF82F8174A0}"/>
               </a:ext>
             </a:extLst>
           </p:cNvPr>
@@ -16537,7 +16537,7 @@
           <p:cNvPr id="3" name="">
             <a:extLst xmlns:a="http://schemas.openxmlformats.org/drawingml/2006/main">
               <a:ext uri="{FF2B5EF4-FFF2-40B4-BE49-F238E27FC236}">
-                <a16:creationId xmlns:a16="http://schemas.microsoft.com/office/drawing/2014/main" id="{D5BABE1F-CE06-4B4E-AB1D-43E70B9E906A}"/>
+                <a16:creationId xmlns:a16="http://schemas.microsoft.com/office/drawing/2014/main" id="{AE228CCC-42F9-47FB-88CB-3AC0C94E3434}"/>
               </a:ext>
             </a:extLst>
           </p:cNvPr>
@@ -16567,7 +16567,7 @@
           <p:cNvPr id="4" name="">
             <a:extLst xmlns:a="http://schemas.openxmlformats.org/drawingml/2006/main">
               <a:ext uri="{FF2B5EF4-FFF2-40B4-BE49-F238E27FC236}">
-                <a16:creationId xmlns:a16="http://schemas.microsoft.com/office/drawing/2014/main" id="{1F8EC97A-97BC-4D5C-9FFD-BBC1ED08320B}"/>
+                <a16:creationId xmlns:a16="http://schemas.microsoft.com/office/drawing/2014/main" id="{54216343-68BF-47A1-94A1-7941A4AEF329}"/>
               </a:ext>
             </a:extLst>
           </p:cNvPr>
@@ -16635,7 +16635,7 @@
           <p:cNvPr id="5" name="">
             <a:extLst xmlns:a="http://schemas.openxmlformats.org/drawingml/2006/main">
               <a:ext uri="{FF2B5EF4-FFF2-40B4-BE49-F238E27FC236}">
-                <a16:creationId xmlns:a16="http://schemas.microsoft.com/office/drawing/2014/main" id="{B4A82BF1-24DC-4260-918D-E361F0B7D318}"/>
+                <a16:creationId xmlns:a16="http://schemas.microsoft.com/office/drawing/2014/main" id="{F8A6F54C-10FA-4B7D-9A8A-6B94BFF62B0E}"/>
               </a:ext>
             </a:extLst>
           </p:cNvPr>
@@ -16667,7 +16667,7 @@
           <p:cNvPr id="6" name="">
             <a:extLst xmlns:a="http://schemas.openxmlformats.org/drawingml/2006/main">
               <a:ext uri="{FF2B5EF4-FFF2-40B4-BE49-F238E27FC236}">
-                <a16:creationId xmlns:a16="http://schemas.microsoft.com/office/drawing/2014/main" id="{ADC92779-738D-4595-BB3B-9125B2AF50CF}"/>
+                <a16:creationId xmlns:a16="http://schemas.microsoft.com/office/drawing/2014/main" id="{A13A4E52-7B71-433B-8FFB-7065110E9224}"/>
               </a:ext>
             </a:extLst>
           </p:cNvPr>
@@ -16735,7 +16735,7 @@
           <p:cNvPr id="7" name="">
             <a:extLst xmlns:a="http://schemas.openxmlformats.org/drawingml/2006/main">
               <a:ext uri="{FF2B5EF4-FFF2-40B4-BE49-F238E27FC236}">
-                <a16:creationId xmlns:a16="http://schemas.microsoft.com/office/drawing/2014/main" id="{D23C66FA-2295-4F0C-8E75-122E12FDB4F6}"/>
+                <a16:creationId xmlns:a16="http://schemas.microsoft.com/office/drawing/2014/main" id="{D6EE1131-3963-4AE5-A5C1-EF60A1197EC2}"/>
               </a:ext>
             </a:extLst>
           </p:cNvPr>
@@ -16803,7 +16803,7 @@
           <p:cNvPr id="8" name="">
             <a:extLst xmlns:a="http://schemas.openxmlformats.org/drawingml/2006/main">
               <a:ext uri="{FF2B5EF4-FFF2-40B4-BE49-F238E27FC236}">
-                <a16:creationId xmlns:a16="http://schemas.microsoft.com/office/drawing/2014/main" id="{36D2D0BC-C105-45E6-BC85-BDCB6001514F}"/>
+                <a16:creationId xmlns:a16="http://schemas.microsoft.com/office/drawing/2014/main" id="{CE9EF9B9-7791-467F-A355-B466BE82862C}"/>
               </a:ext>
             </a:extLst>
           </p:cNvPr>
@@ -16871,7 +16871,7 @@
           <p:cNvPr id="9" name="">
             <a:extLst xmlns:a="http://schemas.openxmlformats.org/drawingml/2006/main">
               <a:ext uri="{FF2B5EF4-FFF2-40B4-BE49-F238E27FC236}">
-                <a16:creationId xmlns:a16="http://schemas.microsoft.com/office/drawing/2014/main" id="{C43128BD-7696-4B5E-B7BE-C0AAB36BFF6C}"/>
+                <a16:creationId xmlns:a16="http://schemas.microsoft.com/office/drawing/2014/main" id="{34C42494-2CC3-4845-AB31-4A871BEAE6BE}"/>
               </a:ext>
             </a:extLst>
           </p:cNvPr>
@@ -16903,7 +16903,7 @@
           <p:cNvPr id="10" name="">
             <a:extLst xmlns:a="http://schemas.openxmlformats.org/drawingml/2006/main">
               <a:ext uri="{FF2B5EF4-FFF2-40B4-BE49-F238E27FC236}">
-                <a16:creationId xmlns:a16="http://schemas.microsoft.com/office/drawing/2014/main" id="{92C06006-82E9-420E-BA37-B9771625D8C6}"/>
+                <a16:creationId xmlns:a16="http://schemas.microsoft.com/office/drawing/2014/main" id="{02A1E8B2-501C-4A4B-827A-E11B08EE9004}"/>
               </a:ext>
             </a:extLst>
           </p:cNvPr>
@@ -16971,7 +16971,7 @@
           <p:cNvPr id="11" name="">
             <a:extLst xmlns:a="http://schemas.openxmlformats.org/drawingml/2006/main">
               <a:ext uri="{FF2B5EF4-FFF2-40B4-BE49-F238E27FC236}">
-                <a16:creationId xmlns:a16="http://schemas.microsoft.com/office/drawing/2014/main" id="{5A8528D5-9A33-4604-A88F-F09A21EAD203}"/>
+                <a16:creationId xmlns:a16="http://schemas.microsoft.com/office/drawing/2014/main" id="{77CB6E5F-85B2-403E-AB5A-A693A2D9C677}"/>
               </a:ext>
             </a:extLst>
           </p:cNvPr>
@@ -17039,7 +17039,7 @@
           <p:cNvPr id="12" name="">
             <a:extLst xmlns:a="http://schemas.openxmlformats.org/drawingml/2006/main">
               <a:ext uri="{FF2B5EF4-FFF2-40B4-BE49-F238E27FC236}">
-                <a16:creationId xmlns:a16="http://schemas.microsoft.com/office/drawing/2014/main" id="{BD1AD67D-B424-4509-8640-0E52C5F75FD6}"/>
+                <a16:creationId xmlns:a16="http://schemas.microsoft.com/office/drawing/2014/main" id="{86214E00-3CBE-4A59-8C1F-3C1A04B755AF}"/>
               </a:ext>
             </a:extLst>
           </p:cNvPr>
@@ -17107,7 +17107,7 @@
           <p:cNvPr id="13" name="">
             <a:extLst xmlns:a="http://schemas.openxmlformats.org/drawingml/2006/main">
               <a:ext uri="{FF2B5EF4-FFF2-40B4-BE49-F238E27FC236}">
-                <a16:creationId xmlns:a16="http://schemas.microsoft.com/office/drawing/2014/main" id="{CEEA6007-9083-4EA4-BA34-EB89C19014F2}"/>
+                <a16:creationId xmlns:a16="http://schemas.microsoft.com/office/drawing/2014/main" id="{CFA9C542-4871-4522-962F-F60D76118919}"/>
               </a:ext>
             </a:extLst>
           </p:cNvPr>
@@ -17139,7 +17139,7 @@
           <p:cNvPr id="14" name="">
             <a:extLst xmlns:a="http://schemas.openxmlformats.org/drawingml/2006/main">
               <a:ext uri="{FF2B5EF4-FFF2-40B4-BE49-F238E27FC236}">
-                <a16:creationId xmlns:a16="http://schemas.microsoft.com/office/drawing/2014/main" id="{BC10BBED-1153-4EA1-9EF9-4410DBB4A2F2}"/>
+                <a16:creationId xmlns:a16="http://schemas.microsoft.com/office/drawing/2014/main" id="{79D6753D-95B3-4323-8FEB-BE9986E9A16B}"/>
               </a:ext>
             </a:extLst>
           </p:cNvPr>
@@ -17207,7 +17207,7 @@
           <p:cNvPr id="15" name="">
             <a:extLst xmlns:a="http://schemas.openxmlformats.org/drawingml/2006/main">
               <a:ext uri="{FF2B5EF4-FFF2-40B4-BE49-F238E27FC236}">
-                <a16:creationId xmlns:a16="http://schemas.microsoft.com/office/drawing/2014/main" id="{AE43F8B2-8C70-458D-A5D7-335EC8684C7A}"/>
+                <a16:creationId xmlns:a16="http://schemas.microsoft.com/office/drawing/2014/main" id="{FCBF3CEE-BF29-4F99-95C4-0F7A511D66CE}"/>
               </a:ext>
             </a:extLst>
           </p:cNvPr>
@@ -17275,7 +17275,7 @@
           <p:cNvPr id="16" name="">
             <a:extLst xmlns:a="http://schemas.openxmlformats.org/drawingml/2006/main">
               <a:ext uri="{FF2B5EF4-FFF2-40B4-BE49-F238E27FC236}">
-                <a16:creationId xmlns:a16="http://schemas.microsoft.com/office/drawing/2014/main" id="{8F874B1C-FEEF-4C10-9162-3FC9AF0D4D10}"/>
+                <a16:creationId xmlns:a16="http://schemas.microsoft.com/office/drawing/2014/main" id="{289AA197-BA58-4C1D-9A50-76DA50081F3A}"/>
               </a:ext>
             </a:extLst>
           </p:cNvPr>
@@ -17343,7 +17343,7 @@
           <p:cNvPr id="17" name="">
             <a:extLst xmlns:a="http://schemas.openxmlformats.org/drawingml/2006/main">
               <a:ext uri="{FF2B5EF4-FFF2-40B4-BE49-F238E27FC236}">
-                <a16:creationId xmlns:a16="http://schemas.microsoft.com/office/drawing/2014/main" id="{BE56FF52-786B-49FB-88CC-918CA7C7BB71}"/>
+                <a16:creationId xmlns:a16="http://schemas.microsoft.com/office/drawing/2014/main" id="{437BF480-541F-4F86-8E9A-9A04ACDB8F8D}"/>
               </a:ext>
             </a:extLst>
           </p:cNvPr>
@@ -17375,7 +17375,7 @@
           <p:cNvPr id="18" name="">
             <a:extLst xmlns:a="http://schemas.openxmlformats.org/drawingml/2006/main">
               <a:ext uri="{FF2B5EF4-FFF2-40B4-BE49-F238E27FC236}">
-                <a16:creationId xmlns:a16="http://schemas.microsoft.com/office/drawing/2014/main" id="{FC672F53-6C82-4D2B-A040-F314EC74B407}"/>
+                <a16:creationId xmlns:a16="http://schemas.microsoft.com/office/drawing/2014/main" id="{FB021493-EEE6-487F-94C1-C4A9E2C0AB48}"/>
               </a:ext>
             </a:extLst>
           </p:cNvPr>
@@ -17443,7 +17443,7 @@
           <p:cNvPr id="19" name="">
             <a:extLst xmlns:a="http://schemas.openxmlformats.org/drawingml/2006/main">
               <a:ext uri="{FF2B5EF4-FFF2-40B4-BE49-F238E27FC236}">
-                <a16:creationId xmlns:a16="http://schemas.microsoft.com/office/drawing/2014/main" id="{AD7DF9A4-6DA0-43CD-B56B-56A20EB74BA0}"/>
+                <a16:creationId xmlns:a16="http://schemas.microsoft.com/office/drawing/2014/main" id="{02B33F0A-C8FF-461A-BEF9-10218669404B}"/>
               </a:ext>
             </a:extLst>
           </p:cNvPr>
@@ -17511,7 +17511,7 @@
           <p:cNvPr id="20" name="">
             <a:extLst xmlns:a="http://schemas.openxmlformats.org/drawingml/2006/main">
               <a:ext uri="{FF2B5EF4-FFF2-40B4-BE49-F238E27FC236}">
-                <a16:creationId xmlns:a16="http://schemas.microsoft.com/office/drawing/2014/main" id="{84B38FDE-E866-4748-80A3-E56FF4D9C5AB}"/>
+                <a16:creationId xmlns:a16="http://schemas.microsoft.com/office/drawing/2014/main" id="{CBEED2FA-331D-4FC4-9A31-00D2928396B9}"/>
               </a:ext>
             </a:extLst>
           </p:cNvPr>
@@ -17579,7 +17579,7 @@
           <p:cNvPr id="21" name="">
             <a:extLst xmlns:a="http://schemas.openxmlformats.org/drawingml/2006/main">
               <a:ext uri="{FF2B5EF4-FFF2-40B4-BE49-F238E27FC236}">
-                <a16:creationId xmlns:a16="http://schemas.microsoft.com/office/drawing/2014/main" id="{35A980A4-27DA-4AA4-9584-9B0B524D8FAB}"/>
+                <a16:creationId xmlns:a16="http://schemas.microsoft.com/office/drawing/2014/main" id="{4E72A12E-E74E-4A48-8552-56FE4F5340A4}"/>
               </a:ext>
             </a:extLst>
           </p:cNvPr>
@@ -17611,7 +17611,7 @@
           <p:cNvPr id="22" name="">
             <a:extLst xmlns:a="http://schemas.openxmlformats.org/drawingml/2006/main">
               <a:ext uri="{FF2B5EF4-FFF2-40B4-BE49-F238E27FC236}">
-                <a16:creationId xmlns:a16="http://schemas.microsoft.com/office/drawing/2014/main" id="{2F0234D1-D0F4-4A0E-8E31-FE1FC0286F03}"/>
+                <a16:creationId xmlns:a16="http://schemas.microsoft.com/office/drawing/2014/main" id="{BD6B8C08-AC1B-46E3-97F4-120702E06474}"/>
               </a:ext>
             </a:extLst>
           </p:cNvPr>
@@ -17679,7 +17679,7 @@
           <p:cNvPr id="23" name="">
             <a:extLst xmlns:a="http://schemas.openxmlformats.org/drawingml/2006/main">
               <a:ext uri="{FF2B5EF4-FFF2-40B4-BE49-F238E27FC236}">
-                <a16:creationId xmlns:a16="http://schemas.microsoft.com/office/drawing/2014/main" id="{523BB6E6-3765-4A20-8238-451815F40F37}"/>
+                <a16:creationId xmlns:a16="http://schemas.microsoft.com/office/drawing/2014/main" id="{D232E94B-8D91-411B-97F2-08626A549477}"/>
               </a:ext>
             </a:extLst>
           </p:cNvPr>
@@ -17747,7 +17747,7 @@
           <p:cNvPr id="24" name="">
             <a:extLst xmlns:a="http://schemas.openxmlformats.org/drawingml/2006/main">
               <a:ext uri="{FF2B5EF4-FFF2-40B4-BE49-F238E27FC236}">
-                <a16:creationId xmlns:a16="http://schemas.microsoft.com/office/drawing/2014/main" id="{F359ABFC-1E58-4F70-9C7D-81742F0A16B9}"/>
+                <a16:creationId xmlns:a16="http://schemas.microsoft.com/office/drawing/2014/main" id="{C9835776-3243-4AB3-94B8-9B9317F87C1B}"/>
               </a:ext>
             </a:extLst>
           </p:cNvPr>
@@ -17815,7 +17815,7 @@
           <p:cNvPr id="25" name="">
             <a:extLst xmlns:a="http://schemas.openxmlformats.org/drawingml/2006/main">
               <a:ext uri="{FF2B5EF4-FFF2-40B4-BE49-F238E27FC236}">
-                <a16:creationId xmlns:a16="http://schemas.microsoft.com/office/drawing/2014/main" id="{1288024F-CB78-45A5-9309-8B1E926FB436}"/>
+                <a16:creationId xmlns:a16="http://schemas.microsoft.com/office/drawing/2014/main" id="{F7B39236-8AEC-46C1-BAD5-BC5A3E13F840}"/>
               </a:ext>
             </a:extLst>
           </p:cNvPr>
@@ -17847,7 +17847,7 @@
           <p:cNvPr id="26" name="">
             <a:extLst xmlns:a="http://schemas.openxmlformats.org/drawingml/2006/main">
               <a:ext uri="{FF2B5EF4-FFF2-40B4-BE49-F238E27FC236}">
-                <a16:creationId xmlns:a16="http://schemas.microsoft.com/office/drawing/2014/main" id="{877FC2DC-7529-4BC1-B0D3-F4A6DCC12E26}"/>
+                <a16:creationId xmlns:a16="http://schemas.microsoft.com/office/drawing/2014/main" id="{49BACE81-6BF2-4521-9682-ACA126E916AD}"/>
               </a:ext>
             </a:extLst>
           </p:cNvPr>
@@ -17915,7 +17915,7 @@
           <p:cNvPr id="27" name="">
             <a:extLst xmlns:a="http://schemas.openxmlformats.org/drawingml/2006/main">
               <a:ext uri="{FF2B5EF4-FFF2-40B4-BE49-F238E27FC236}">
-                <a16:creationId xmlns:a16="http://schemas.microsoft.com/office/drawing/2014/main" id="{4CE6554E-2C7F-4731-8BCD-78D631EB492C}"/>
+                <a16:creationId xmlns:a16="http://schemas.microsoft.com/office/drawing/2014/main" id="{9A67846E-4EF9-4E71-ABFC-6F4B2DDAF5D0}"/>
               </a:ext>
             </a:extLst>
           </p:cNvPr>
@@ -17983,7 +17983,7 @@
           <p:cNvPr id="28" name="">
             <a:extLst xmlns:a="http://schemas.openxmlformats.org/drawingml/2006/main">
               <a:ext uri="{FF2B5EF4-FFF2-40B4-BE49-F238E27FC236}">
-                <a16:creationId xmlns:a16="http://schemas.microsoft.com/office/drawing/2014/main" id="{9ECD64FA-EDB2-4456-B116-426065367E24}"/>
+                <a16:creationId xmlns:a16="http://schemas.microsoft.com/office/drawing/2014/main" id="{894D9DE2-1A4E-4291-8DC9-F29B37EA1659}"/>
               </a:ext>
             </a:extLst>
           </p:cNvPr>
@@ -18049,7 +18049,7 @@
     </p:spTree>
     <p:extLst>
       <p:ext uri="{BB962C8B-B14F-4D97-AF65-F5344CB8AC3E}">
-        <p14:creationId xmlns:p14="http://schemas.microsoft.com/office/powerpoint/2010/main" val="538579503"/>
+        <p14:creationId xmlns:p14="http://schemas.microsoft.com/office/powerpoint/2010/main" val="1688140829"/>
       </p:ext>
     </p:extLst>
   </p:cSld>
@@ -18080,7 +18080,7 @@
           <p:cNvPr id="12" name="">
             <a:extLst xmlns:a="http://schemas.openxmlformats.org/drawingml/2006/main">
               <a:ext uri="{FF2B5EF4-FFF2-40B4-BE49-F238E27FC236}">
-                <a16:creationId xmlns:a16="http://schemas.microsoft.com/office/drawing/2014/main" id="{49A8C75F-55F1-4FB6-81F2-D377F09DC65F}"/>
+                <a16:creationId xmlns:a16="http://schemas.microsoft.com/office/drawing/2014/main" id="{998F97E0-2E4A-41E3-BC84-50D27CD76A14}"/>
               </a:ext>
             </a:extLst>
           </p:cNvPr>
@@ -18148,7 +18148,7 @@
           <p:cNvPr id="2" name="">
             <a:extLst xmlns:a="http://schemas.openxmlformats.org/drawingml/2006/main">
               <a:ext uri="{FF2B5EF4-FFF2-40B4-BE49-F238E27FC236}">
-                <a16:creationId xmlns:a16="http://schemas.microsoft.com/office/drawing/2014/main" id="{EEA72238-F8CF-4889-BEB7-13B565A9FBF4}"/>
+                <a16:creationId xmlns:a16="http://schemas.microsoft.com/office/drawing/2014/main" id="{63FBDEF8-B518-40E4-BA99-8DDBC2F409CC}"/>
               </a:ext>
             </a:extLst>
           </p:cNvPr>
@@ -18216,7 +18216,7 @@
           <p:cNvPr id="3" name="">
             <a:extLst xmlns:a="http://schemas.openxmlformats.org/drawingml/2006/main">
               <a:ext uri="{FF2B5EF4-FFF2-40B4-BE49-F238E27FC236}">
-                <a16:creationId xmlns:a16="http://schemas.microsoft.com/office/drawing/2014/main" id="{F3B0517F-3634-463E-A74F-2BCFAA5B1622}"/>
+                <a16:creationId xmlns:a16="http://schemas.microsoft.com/office/drawing/2014/main" id="{20E3E3BE-E678-497D-8D3D-9C1EF3884715}"/>
               </a:ext>
             </a:extLst>
           </p:cNvPr>
@@ -18246,7 +18246,7 @@
           <p:cNvPr id="4" name="">
             <a:extLst xmlns:a="http://schemas.openxmlformats.org/drawingml/2006/main">
               <a:ext uri="{FF2B5EF4-FFF2-40B4-BE49-F238E27FC236}">
-                <a16:creationId xmlns:a16="http://schemas.microsoft.com/office/drawing/2014/main" id="{88C38CCD-DF43-4FB2-9E35-E008B29CA84C}"/>
+                <a16:creationId xmlns:a16="http://schemas.microsoft.com/office/drawing/2014/main" id="{6EEF205E-8DB0-4A7E-B0D9-DD7009C5D9BA}"/>
               </a:ext>
             </a:extLst>
           </p:cNvPr>
@@ -18314,7 +18314,7 @@
           <p:cNvPr id="5" name="">
             <a:extLst xmlns:a="http://schemas.openxmlformats.org/drawingml/2006/main">
               <a:ext uri="{FF2B5EF4-FFF2-40B4-BE49-F238E27FC236}">
-                <a16:creationId xmlns:a16="http://schemas.microsoft.com/office/drawing/2014/main" id="{6B083D27-4974-4C52-AB44-B7AA1B1BD68F}"/>
+                <a16:creationId xmlns:a16="http://schemas.microsoft.com/office/drawing/2014/main" id="{0133C012-F9F0-4B1A-B299-A959BF50C68F}"/>
               </a:ext>
             </a:extLst>
           </p:cNvPr>
@@ -18382,7 +18382,7 @@
           <p:cNvPr id="6" name="">
             <a:extLst xmlns:a="http://schemas.openxmlformats.org/drawingml/2006/main">
               <a:ext uri="{FF2B5EF4-FFF2-40B4-BE49-F238E27FC236}">
-                <a16:creationId xmlns:a16="http://schemas.microsoft.com/office/drawing/2014/main" id="{72F24172-770B-4F77-8853-FC036435BC8A}"/>
+                <a16:creationId xmlns:a16="http://schemas.microsoft.com/office/drawing/2014/main" id="{5500C58F-6A30-4EFD-84D3-096A93A22D3A}"/>
               </a:ext>
             </a:extLst>
           </p:cNvPr>
@@ -18450,7 +18450,7 @@
           <p:cNvPr id="7" name="">
             <a:extLst xmlns:a="http://schemas.openxmlformats.org/drawingml/2006/main">
               <a:ext uri="{FF2B5EF4-FFF2-40B4-BE49-F238E27FC236}">
-                <a16:creationId xmlns:a16="http://schemas.microsoft.com/office/drawing/2014/main" id="{F96787B7-0100-4C6E-AABF-CEB447428EF8}"/>
+                <a16:creationId xmlns:a16="http://schemas.microsoft.com/office/drawing/2014/main" id="{018B52D5-E454-44F8-9ABE-ACA25B53A4A6}"/>
               </a:ext>
             </a:extLst>
           </p:cNvPr>
@@ -18518,7 +18518,7 @@
           <p:cNvPr id="8" name="">
             <a:extLst xmlns:a="http://schemas.openxmlformats.org/drawingml/2006/main">
               <a:ext uri="{FF2B5EF4-FFF2-40B4-BE49-F238E27FC236}">
-                <a16:creationId xmlns:a16="http://schemas.microsoft.com/office/drawing/2014/main" id="{4B08ABF5-736F-48F8-B80D-9CDC01CD1F21}"/>
+                <a16:creationId xmlns:a16="http://schemas.microsoft.com/office/drawing/2014/main" id="{9FC7C67E-6676-4851-A6E9-96427D10C6A8}"/>
               </a:ext>
             </a:extLst>
           </p:cNvPr>
@@ -18609,7 +18609,7 @@
           <p:cNvPr id="9" name="">
             <a:extLst xmlns:a="http://schemas.openxmlformats.org/drawingml/2006/main">
               <a:ext uri="{FF2B5EF4-FFF2-40B4-BE49-F238E27FC236}">
-                <a16:creationId xmlns:a16="http://schemas.microsoft.com/office/drawing/2014/main" id="{1785099A-1AEC-48D6-B2DB-2BB8C7B174EA}"/>
+                <a16:creationId xmlns:a16="http://schemas.microsoft.com/office/drawing/2014/main" id="{57097530-06BE-4D33-91C1-E06B831ED5ED}"/>
               </a:ext>
             </a:extLst>
           </p:cNvPr>
@@ -18639,7 +18639,7 @@
           <p:cNvPr id="10" name="">
             <a:extLst xmlns:a="http://schemas.openxmlformats.org/drawingml/2006/main">
               <a:ext uri="{FF2B5EF4-FFF2-40B4-BE49-F238E27FC236}">
-                <a16:creationId xmlns:a16="http://schemas.microsoft.com/office/drawing/2014/main" id="{B0E1113D-9E06-4644-A33F-C528BCD3F1D7}"/>
+                <a16:creationId xmlns:a16="http://schemas.microsoft.com/office/drawing/2014/main" id="{67D29CFC-AB80-4E8F-A0F1-1F905CA5E1B3}"/>
               </a:ext>
             </a:extLst>
           </p:cNvPr>
@@ -18707,7 +18707,7 @@
           <p:cNvPr id="11" name="">
             <a:extLst xmlns:a="http://schemas.openxmlformats.org/drawingml/2006/main">
               <a:ext uri="{FF2B5EF4-FFF2-40B4-BE49-F238E27FC236}">
-                <a16:creationId xmlns:a16="http://schemas.microsoft.com/office/drawing/2014/main" id="{0B87E065-1508-4193-B498-23A6C83E3B2D}"/>
+                <a16:creationId xmlns:a16="http://schemas.microsoft.com/office/drawing/2014/main" id="{6F194EFC-7633-4012-B9EF-F03C3521CFA4}"/>
               </a:ext>
             </a:extLst>
           </p:cNvPr>
@@ -18773,7 +18773,7 @@
     </p:spTree>
     <p:extLst>
       <p:ext uri="{BB962C8B-B14F-4D97-AF65-F5344CB8AC3E}">
-        <p14:creationId xmlns:p14="http://schemas.microsoft.com/office/powerpoint/2010/main" val="105191319"/>
+        <p14:creationId xmlns:p14="http://schemas.microsoft.com/office/powerpoint/2010/main" val="2498853"/>
       </p:ext>
     </p:extLst>
   </p:cSld>
@@ -18804,7 +18804,7 @@
           <p:cNvPr id="12" name="">
             <a:extLst xmlns:a="http://schemas.openxmlformats.org/drawingml/2006/main">
               <a:ext uri="{FF2B5EF4-FFF2-40B4-BE49-F238E27FC236}">
-                <a16:creationId xmlns:a16="http://schemas.microsoft.com/office/drawing/2014/main" id="{7D501EDA-D16C-4366-9CD7-8C24438EDF9F}"/>
+                <a16:creationId xmlns:a16="http://schemas.microsoft.com/office/drawing/2014/main" id="{27E3966B-A264-4083-8217-40066DEF8E8C}"/>
               </a:ext>
             </a:extLst>
           </p:cNvPr>
@@ -18872,7 +18872,7 @@
           <p:cNvPr id="2" name="">
             <a:extLst xmlns:a="http://schemas.openxmlformats.org/drawingml/2006/main">
               <a:ext uri="{FF2B5EF4-FFF2-40B4-BE49-F238E27FC236}">
-                <a16:creationId xmlns:a16="http://schemas.microsoft.com/office/drawing/2014/main" id="{42DD9285-90F4-4E13-8D4B-016EC2C563AD}"/>
+                <a16:creationId xmlns:a16="http://schemas.microsoft.com/office/drawing/2014/main" id="{3887B69A-A437-4A1B-A894-3E2F100A3F36}"/>
               </a:ext>
             </a:extLst>
           </p:cNvPr>
@@ -18940,7 +18940,7 @@
           <p:cNvPr id="3" name="">
             <a:extLst xmlns:a="http://schemas.openxmlformats.org/drawingml/2006/main">
               <a:ext uri="{FF2B5EF4-FFF2-40B4-BE49-F238E27FC236}">
-                <a16:creationId xmlns:a16="http://schemas.microsoft.com/office/drawing/2014/main" id="{46AADE24-DC31-4057-92B3-34B6909E1C77}"/>
+                <a16:creationId xmlns:a16="http://schemas.microsoft.com/office/drawing/2014/main" id="{FCDFDF86-A4B2-4AA2-B44E-0A1BAD9695A5}"/>
               </a:ext>
             </a:extLst>
           </p:cNvPr>
@@ -18970,7 +18970,7 @@
           <p:cNvPr id="4" name="">
             <a:extLst xmlns:a="http://schemas.openxmlformats.org/drawingml/2006/main">
               <a:ext uri="{FF2B5EF4-FFF2-40B4-BE49-F238E27FC236}">
-                <a16:creationId xmlns:a16="http://schemas.microsoft.com/office/drawing/2014/main" id="{30B4AA37-2568-4CB8-B4BC-B0C453350C27}"/>
+                <a16:creationId xmlns:a16="http://schemas.microsoft.com/office/drawing/2014/main" id="{383ECD39-343A-45E5-9849-1323A0567E70}"/>
               </a:ext>
             </a:extLst>
           </p:cNvPr>
@@ -19038,7 +19038,7 @@
           <p:cNvPr id="5" name="">
             <a:extLst xmlns:a="http://schemas.openxmlformats.org/drawingml/2006/main">
               <a:ext uri="{FF2B5EF4-FFF2-40B4-BE49-F238E27FC236}">
-                <a16:creationId xmlns:a16="http://schemas.microsoft.com/office/drawing/2014/main" id="{35B0F7C9-8071-46BD-B305-9B6E781720AF}"/>
+                <a16:creationId xmlns:a16="http://schemas.microsoft.com/office/drawing/2014/main" id="{28DA8F1C-407A-456F-AECA-77B3DB0D62A5}"/>
               </a:ext>
             </a:extLst>
           </p:cNvPr>
@@ -19106,7 +19106,7 @@
           <p:cNvPr id="6" name="">
             <a:extLst xmlns:a="http://schemas.openxmlformats.org/drawingml/2006/main">
               <a:ext uri="{FF2B5EF4-FFF2-40B4-BE49-F238E27FC236}">
-                <a16:creationId xmlns:a16="http://schemas.microsoft.com/office/drawing/2014/main" id="{6BA01F36-B69F-4EFD-8782-7890D163CA3A}"/>
+                <a16:creationId xmlns:a16="http://schemas.microsoft.com/office/drawing/2014/main" id="{0898FDAA-CFC4-44CE-89BA-C15597949A6B}"/>
               </a:ext>
             </a:extLst>
           </p:cNvPr>
@@ -19174,7 +19174,7 @@
           <p:cNvPr id="7" name="">
             <a:extLst xmlns:a="http://schemas.openxmlformats.org/drawingml/2006/main">
               <a:ext uri="{FF2B5EF4-FFF2-40B4-BE49-F238E27FC236}">
-                <a16:creationId xmlns:a16="http://schemas.microsoft.com/office/drawing/2014/main" id="{9C3BBD0F-A98F-4324-85F4-BC3D67377BA4}"/>
+                <a16:creationId xmlns:a16="http://schemas.microsoft.com/office/drawing/2014/main" id="{2D18ED85-E9BD-494A-91AB-4FBDB7FDBDAA}"/>
               </a:ext>
             </a:extLst>
           </p:cNvPr>
@@ -19242,7 +19242,7 @@
           <p:cNvPr id="8" name="">
             <a:extLst xmlns:a="http://schemas.openxmlformats.org/drawingml/2006/main">
               <a:ext uri="{FF2B5EF4-FFF2-40B4-BE49-F238E27FC236}">
-                <a16:creationId xmlns:a16="http://schemas.microsoft.com/office/drawing/2014/main" id="{7864157A-40E1-49F6-9B47-A8703272CC6C}"/>
+                <a16:creationId xmlns:a16="http://schemas.microsoft.com/office/drawing/2014/main" id="{D8C6485B-BCEF-4E4A-BAE3-246DE8C6C77E}"/>
               </a:ext>
             </a:extLst>
           </p:cNvPr>
@@ -19333,7 +19333,7 @@
           <p:cNvPr id="9" name="">
             <a:extLst xmlns:a="http://schemas.openxmlformats.org/drawingml/2006/main">
               <a:ext uri="{FF2B5EF4-FFF2-40B4-BE49-F238E27FC236}">
-                <a16:creationId xmlns:a16="http://schemas.microsoft.com/office/drawing/2014/main" id="{967653BF-C96F-495E-9126-2B14245B7605}"/>
+                <a16:creationId xmlns:a16="http://schemas.microsoft.com/office/drawing/2014/main" id="{43DDF23E-7F97-42E7-89AE-D065E7FECFEF}"/>
               </a:ext>
             </a:extLst>
           </p:cNvPr>
@@ -19363,7 +19363,7 @@
           <p:cNvPr id="10" name="">
             <a:extLst xmlns:a="http://schemas.openxmlformats.org/drawingml/2006/main">
               <a:ext uri="{FF2B5EF4-FFF2-40B4-BE49-F238E27FC236}">
-                <a16:creationId xmlns:a16="http://schemas.microsoft.com/office/drawing/2014/main" id="{CC2D3276-BBF3-4DFB-A5FC-7F474206D889}"/>
+                <a16:creationId xmlns:a16="http://schemas.microsoft.com/office/drawing/2014/main" id="{703D45FC-5540-4EA8-93CD-72EE6479F9F5}"/>
               </a:ext>
             </a:extLst>
           </p:cNvPr>
@@ -19431,7 +19431,7 @@
           <p:cNvPr id="11" name="">
             <a:extLst xmlns:a="http://schemas.openxmlformats.org/drawingml/2006/main">
               <a:ext uri="{FF2B5EF4-FFF2-40B4-BE49-F238E27FC236}">
-                <a16:creationId xmlns:a16="http://schemas.microsoft.com/office/drawing/2014/main" id="{6D7662D4-D2B3-416B-86EB-23CB8691A307}"/>
+                <a16:creationId xmlns:a16="http://schemas.microsoft.com/office/drawing/2014/main" id="{9754F652-9788-4D43-86A6-6F18B6239A72}"/>
               </a:ext>
             </a:extLst>
           </p:cNvPr>
@@ -19497,7 +19497,7 @@
     </p:spTree>
     <p:extLst>
       <p:ext uri="{BB962C8B-B14F-4D97-AF65-F5344CB8AC3E}">
-        <p14:creationId xmlns:p14="http://schemas.microsoft.com/office/powerpoint/2010/main" val="308833397"/>
+        <p14:creationId xmlns:p14="http://schemas.microsoft.com/office/powerpoint/2010/main" val="1995206660"/>
       </p:ext>
     </p:extLst>
   </p:cSld>
@@ -19528,7 +19528,7 @@
           <p:cNvPr id="11" name="">
             <a:extLst xmlns:a="http://schemas.openxmlformats.org/drawingml/2006/main">
               <a:ext uri="{FF2B5EF4-FFF2-40B4-BE49-F238E27FC236}">
-                <a16:creationId xmlns:a16="http://schemas.microsoft.com/office/drawing/2014/main" id="{492B778A-0B4B-40D7-8C48-0F0B25B91F33}"/>
+                <a16:creationId xmlns:a16="http://schemas.microsoft.com/office/drawing/2014/main" id="{FB32B4F4-DB1C-4962-8173-D1E8A0B4E70D}"/>
               </a:ext>
             </a:extLst>
           </p:cNvPr>
@@ -19596,7 +19596,7 @@
           <p:cNvPr id="2" name="">
             <a:extLst xmlns:a="http://schemas.openxmlformats.org/drawingml/2006/main">
               <a:ext uri="{FF2B5EF4-FFF2-40B4-BE49-F238E27FC236}">
-                <a16:creationId xmlns:a16="http://schemas.microsoft.com/office/drawing/2014/main" id="{C7B20244-B75B-4C89-B6C6-370B63FFEA81}"/>
+                <a16:creationId xmlns:a16="http://schemas.microsoft.com/office/drawing/2014/main" id="{A834F2C9-61D5-4E4A-AB46-E58A33AFF9A5}"/>
               </a:ext>
             </a:extLst>
           </p:cNvPr>
@@ -19664,7 +19664,7 @@
           <p:cNvPr id="3" name="">
             <a:extLst xmlns:a="http://schemas.openxmlformats.org/drawingml/2006/main">
               <a:ext uri="{FF2B5EF4-FFF2-40B4-BE49-F238E27FC236}">
-                <a16:creationId xmlns:a16="http://schemas.microsoft.com/office/drawing/2014/main" id="{A9C58FE1-29F4-4600-8A00-DD5D09BD40E0}"/>
+                <a16:creationId xmlns:a16="http://schemas.microsoft.com/office/drawing/2014/main" id="{CB143849-26D7-4A30-92FB-CC9C74A61BEF}"/>
               </a:ext>
             </a:extLst>
           </p:cNvPr>
@@ -19694,7 +19694,7 @@
           <p:cNvPr id="4" name="">
             <a:extLst xmlns:a="http://schemas.openxmlformats.org/drawingml/2006/main">
               <a:ext uri="{FF2B5EF4-FFF2-40B4-BE49-F238E27FC236}">
-                <a16:creationId xmlns:a16="http://schemas.microsoft.com/office/drawing/2014/main" id="{2D1AF5C8-CB52-46C3-B214-958395711E70}"/>
+                <a16:creationId xmlns:a16="http://schemas.microsoft.com/office/drawing/2014/main" id="{B25664C0-6501-45CA-98AF-7F30099FA6B8}"/>
               </a:ext>
             </a:extLst>
           </p:cNvPr>
@@ -19762,7 +19762,7 @@
           <p:cNvPr id="5" name="">
             <a:extLst xmlns:a="http://schemas.openxmlformats.org/drawingml/2006/main">
               <a:ext uri="{FF2B5EF4-FFF2-40B4-BE49-F238E27FC236}">
-                <a16:creationId xmlns:a16="http://schemas.microsoft.com/office/drawing/2014/main" id="{D97D8CA4-3654-4648-846E-FB2412DDFD37}"/>
+                <a16:creationId xmlns:a16="http://schemas.microsoft.com/office/drawing/2014/main" id="{E2B3FA12-5196-4E4F-B3E5-0AFEC9AFB81E}"/>
               </a:ext>
             </a:extLst>
           </p:cNvPr>
@@ -19830,7 +19830,7 @@
           <p:cNvPr id="6" name="">
             <a:extLst xmlns:a="http://schemas.openxmlformats.org/drawingml/2006/main">
               <a:ext uri="{FF2B5EF4-FFF2-40B4-BE49-F238E27FC236}">
-                <a16:creationId xmlns:a16="http://schemas.microsoft.com/office/drawing/2014/main" id="{78446C40-E1B7-4511-BBAC-3AF2EC9310E2}"/>
+                <a16:creationId xmlns:a16="http://schemas.microsoft.com/office/drawing/2014/main" id="{251C2FA8-209B-4049-9611-0BD5BC5FDBB6}"/>
               </a:ext>
             </a:extLst>
           </p:cNvPr>
@@ -19944,7 +19944,7 @@
           <p:cNvPr id="7" name="">
             <a:extLst xmlns:a="http://schemas.openxmlformats.org/drawingml/2006/main">
               <a:ext uri="{FF2B5EF4-FFF2-40B4-BE49-F238E27FC236}">
-                <a16:creationId xmlns:a16="http://schemas.microsoft.com/office/drawing/2014/main" id="{D9061D18-10E9-4EC0-B3EA-FB9CE27C3907}"/>
+                <a16:creationId xmlns:a16="http://schemas.microsoft.com/office/drawing/2014/main" id="{A2E1E80C-E443-4CD2-90C5-1F9C9339F7EC}"/>
               </a:ext>
             </a:extLst>
           </p:cNvPr>
@@ -20012,7 +20012,7 @@
           <p:cNvPr id="8" name="">
             <a:extLst xmlns:a="http://schemas.openxmlformats.org/drawingml/2006/main">
               <a:ext uri="{FF2B5EF4-FFF2-40B4-BE49-F238E27FC236}">
-                <a16:creationId xmlns:a16="http://schemas.microsoft.com/office/drawing/2014/main" id="{90784EDD-CD8E-44EF-B565-525BCF506F9B}"/>
+                <a16:creationId xmlns:a16="http://schemas.microsoft.com/office/drawing/2014/main" id="{35B58249-2D1E-4960-839E-087D54AB00A8}"/>
               </a:ext>
             </a:extLst>
           </p:cNvPr>
@@ -20126,7 +20126,7 @@
           <p:cNvPr id="9" name="">
             <a:extLst xmlns:a="http://schemas.openxmlformats.org/drawingml/2006/main">
               <a:ext uri="{FF2B5EF4-FFF2-40B4-BE49-F238E27FC236}">
-                <a16:creationId xmlns:a16="http://schemas.microsoft.com/office/drawing/2014/main" id="{51661DF5-7FAE-4C10-8D9C-ED90D9BBBD21}"/>
+                <a16:creationId xmlns:a16="http://schemas.microsoft.com/office/drawing/2014/main" id="{B264BE03-F62F-43FF-962C-2ECF37BBA7E7}"/>
               </a:ext>
             </a:extLst>
           </p:cNvPr>
@@ -20156,7 +20156,7 @@
           <p:cNvPr id="10" name="">
             <a:extLst xmlns:a="http://schemas.openxmlformats.org/drawingml/2006/main">
               <a:ext uri="{FF2B5EF4-FFF2-40B4-BE49-F238E27FC236}">
-                <a16:creationId xmlns:a16="http://schemas.microsoft.com/office/drawing/2014/main" id="{B8155FE7-77A0-4717-B131-BAC3B9D7E517}"/>
+                <a16:creationId xmlns:a16="http://schemas.microsoft.com/office/drawing/2014/main" id="{8097E6D1-3072-4FEF-9EFF-1489BD33FA74}"/>
               </a:ext>
             </a:extLst>
           </p:cNvPr>
@@ -20222,7 +20222,7 @@
     </p:spTree>
     <p:extLst>
       <p:ext uri="{BB962C8B-B14F-4D97-AF65-F5344CB8AC3E}">
-        <p14:creationId xmlns:p14="http://schemas.microsoft.com/office/powerpoint/2010/main" val="127916071"/>
+        <p14:creationId xmlns:p14="http://schemas.microsoft.com/office/powerpoint/2010/main" val="882936708"/>
       </p:ext>
     </p:extLst>
   </p:cSld>
@@ -20253,7 +20253,7 @@
           <p:cNvPr id="20" name="">
             <a:extLst xmlns:a="http://schemas.openxmlformats.org/drawingml/2006/main">
               <a:ext uri="{FF2B5EF4-FFF2-40B4-BE49-F238E27FC236}">
-                <a16:creationId xmlns:a16="http://schemas.microsoft.com/office/drawing/2014/main" id="{557841F0-ACAC-46BB-85E1-583213276BF9}"/>
+                <a16:creationId xmlns:a16="http://schemas.microsoft.com/office/drawing/2014/main" id="{761D80FC-6ED7-4078-83CB-506430EDB12C}"/>
               </a:ext>
             </a:extLst>
           </p:cNvPr>
@@ -20321,7 +20321,7 @@
           <p:cNvPr id="2" name="">
             <a:extLst xmlns:a="http://schemas.openxmlformats.org/drawingml/2006/main">
               <a:ext uri="{FF2B5EF4-FFF2-40B4-BE49-F238E27FC236}">
-                <a16:creationId xmlns:a16="http://schemas.microsoft.com/office/drawing/2014/main" id="{A2DFA0D3-F5F6-48A1-AEF6-A182F6C6260F}"/>
+                <a16:creationId xmlns:a16="http://schemas.microsoft.com/office/drawing/2014/main" id="{EED612DB-1FA3-42A9-A26D-65953C360252}"/>
               </a:ext>
             </a:extLst>
           </p:cNvPr>
@@ -20389,7 +20389,7 @@
           <p:cNvPr id="3" name="">
             <a:extLst xmlns:a="http://schemas.openxmlformats.org/drawingml/2006/main">
               <a:ext uri="{FF2B5EF4-FFF2-40B4-BE49-F238E27FC236}">
-                <a16:creationId xmlns:a16="http://schemas.microsoft.com/office/drawing/2014/main" id="{E6255786-37E4-4350-A18D-E765E0F5CED9}"/>
+                <a16:creationId xmlns:a16="http://schemas.microsoft.com/office/drawing/2014/main" id="{2A7DFA3E-2F9E-404E-80A4-4420E15DE6C8}"/>
               </a:ext>
             </a:extLst>
           </p:cNvPr>
@@ -20419,7 +20419,7 @@
           <p:cNvPr id="4" name="">
             <a:extLst xmlns:a="http://schemas.openxmlformats.org/drawingml/2006/main">
               <a:ext uri="{FF2B5EF4-FFF2-40B4-BE49-F238E27FC236}">
-                <a16:creationId xmlns:a16="http://schemas.microsoft.com/office/drawing/2014/main" id="{DA8AE148-17D0-45F0-A523-F3DB2B1E522C}"/>
+                <a16:creationId xmlns:a16="http://schemas.microsoft.com/office/drawing/2014/main" id="{6D9D1EA5-DD5D-4BAC-9640-D6A72C2B6717}"/>
               </a:ext>
             </a:extLst>
           </p:cNvPr>
@@ -20487,7 +20487,7 @@
           <p:cNvPr id="5" name="">
             <a:extLst xmlns:a="http://schemas.openxmlformats.org/drawingml/2006/main">
               <a:ext uri="{FF2B5EF4-FFF2-40B4-BE49-F238E27FC236}">
-                <a16:creationId xmlns:a16="http://schemas.microsoft.com/office/drawing/2014/main" id="{C259B305-0605-497C-A72B-5F5FF422C2B3}"/>
+                <a16:creationId xmlns:a16="http://schemas.microsoft.com/office/drawing/2014/main" id="{B0C0DC22-EA62-4C83-B7E9-B73B5E24F08F}"/>
               </a:ext>
             </a:extLst>
           </p:cNvPr>
@@ -20555,7 +20555,7 @@
           <p:cNvPr id="6" name="">
             <a:extLst xmlns:a="http://schemas.openxmlformats.org/drawingml/2006/main">
               <a:ext uri="{FF2B5EF4-FFF2-40B4-BE49-F238E27FC236}">
-                <a16:creationId xmlns:a16="http://schemas.microsoft.com/office/drawing/2014/main" id="{1E59E381-1850-416E-9570-D6128D225F4A}"/>
+                <a16:creationId xmlns:a16="http://schemas.microsoft.com/office/drawing/2014/main" id="{D3B5C26C-2713-4134-8467-8555EF76B991}"/>
               </a:ext>
             </a:extLst>
           </p:cNvPr>
@@ -20623,7 +20623,7 @@
           <p:cNvPr id="7" name="">
             <a:extLst xmlns:a="http://schemas.openxmlformats.org/drawingml/2006/main">
               <a:ext uri="{FF2B5EF4-FFF2-40B4-BE49-F238E27FC236}">
-                <a16:creationId xmlns:a16="http://schemas.microsoft.com/office/drawing/2014/main" id="{6775E110-4847-46C2-9F50-7321378CD237}"/>
+                <a16:creationId xmlns:a16="http://schemas.microsoft.com/office/drawing/2014/main" id="{D8DAF93C-77EB-499E-B983-6FD9684FA0EB}"/>
               </a:ext>
             </a:extLst>
           </p:cNvPr>
@@ -20691,7 +20691,7 @@
           <p:cNvPr id="8" name="">
             <a:extLst xmlns:a="http://schemas.openxmlformats.org/drawingml/2006/main">
               <a:ext uri="{FF2B5EF4-FFF2-40B4-BE49-F238E27FC236}">
-                <a16:creationId xmlns:a16="http://schemas.microsoft.com/office/drawing/2014/main" id="{6FF205FF-8344-4FDF-85D1-7C39AF225CC1}"/>
+                <a16:creationId xmlns:a16="http://schemas.microsoft.com/office/drawing/2014/main" id="{20E44BC5-089E-455B-8D38-A283693C329E}"/>
               </a:ext>
             </a:extLst>
           </p:cNvPr>
@@ -20759,7 +20759,7 @@
           <p:cNvPr id="9" name="">
             <a:extLst xmlns:a="http://schemas.openxmlformats.org/drawingml/2006/main">
               <a:ext uri="{FF2B5EF4-FFF2-40B4-BE49-F238E27FC236}">
-                <a16:creationId xmlns:a16="http://schemas.microsoft.com/office/drawing/2014/main" id="{3CA345FE-C634-4B90-B782-93D15F2C29C6}"/>
+                <a16:creationId xmlns:a16="http://schemas.microsoft.com/office/drawing/2014/main" id="{CC9BC20D-5E7F-4599-9D8A-8D54B9C7AFD3}"/>
               </a:ext>
             </a:extLst>
           </p:cNvPr>
@@ -20827,7 +20827,7 @@
           <p:cNvPr id="10" name="">
             <a:extLst xmlns:a="http://schemas.openxmlformats.org/drawingml/2006/main">
               <a:ext uri="{FF2B5EF4-FFF2-40B4-BE49-F238E27FC236}">
-                <a16:creationId xmlns:a16="http://schemas.microsoft.com/office/drawing/2014/main" id="{00B2BAFD-EACD-42D3-A309-79B0D9A02092}"/>
+                <a16:creationId xmlns:a16="http://schemas.microsoft.com/office/drawing/2014/main" id="{6F5B6C27-B899-4326-B9DE-0300E130CE84}"/>
               </a:ext>
             </a:extLst>
           </p:cNvPr>
@@ -20895,7 +20895,7 @@
           <p:cNvPr id="11" name="">
             <a:extLst xmlns:a="http://schemas.openxmlformats.org/drawingml/2006/main">
               <a:ext uri="{FF2B5EF4-FFF2-40B4-BE49-F238E27FC236}">
-                <a16:creationId xmlns:a16="http://schemas.microsoft.com/office/drawing/2014/main" id="{B15942DA-A833-498A-A062-464035BA97BB}"/>
+                <a16:creationId xmlns:a16="http://schemas.microsoft.com/office/drawing/2014/main" id="{5E629005-99F2-430C-9805-A656E278E2A5}"/>
               </a:ext>
             </a:extLst>
           </p:cNvPr>
@@ -20963,7 +20963,7 @@
           <p:cNvPr id="12" name="">
             <a:extLst xmlns:a="http://schemas.openxmlformats.org/drawingml/2006/main">
               <a:ext uri="{FF2B5EF4-FFF2-40B4-BE49-F238E27FC236}">
-                <a16:creationId xmlns:a16="http://schemas.microsoft.com/office/drawing/2014/main" id="{5FDD6AEF-EEDB-43D5-956A-DA2FB033B77C}"/>
+                <a16:creationId xmlns:a16="http://schemas.microsoft.com/office/drawing/2014/main" id="{E44CB84C-AC78-40DC-862B-BF6EE3CC6624}"/>
               </a:ext>
             </a:extLst>
           </p:cNvPr>
@@ -21031,7 +21031,7 @@
           <p:cNvPr id="13" name="">
             <a:extLst xmlns:a="http://schemas.openxmlformats.org/drawingml/2006/main">
               <a:ext uri="{FF2B5EF4-FFF2-40B4-BE49-F238E27FC236}">
-                <a16:creationId xmlns:a16="http://schemas.microsoft.com/office/drawing/2014/main" id="{0AFEA29A-AB57-45A2-B65C-AEF81AECC538}"/>
+                <a16:creationId xmlns:a16="http://schemas.microsoft.com/office/drawing/2014/main" id="{E55A9590-8E52-4A77-842C-F8FF81E142FA}"/>
               </a:ext>
             </a:extLst>
           </p:cNvPr>
@@ -21099,7 +21099,7 @@
           <p:cNvPr id="14" name="">
             <a:extLst xmlns:a="http://schemas.openxmlformats.org/drawingml/2006/main">
               <a:ext uri="{FF2B5EF4-FFF2-40B4-BE49-F238E27FC236}">
-                <a16:creationId xmlns:a16="http://schemas.microsoft.com/office/drawing/2014/main" id="{922FE35E-2951-470A-AD27-696CDC9CFF87}"/>
+                <a16:creationId xmlns:a16="http://schemas.microsoft.com/office/drawing/2014/main" id="{36E5C03C-0576-4A7B-AC9E-AD123D83BDD8}"/>
               </a:ext>
             </a:extLst>
           </p:cNvPr>
@@ -21167,7 +21167,7 @@
           <p:cNvPr id="15" name="">
             <a:extLst xmlns:a="http://schemas.openxmlformats.org/drawingml/2006/main">
               <a:ext uri="{FF2B5EF4-FFF2-40B4-BE49-F238E27FC236}">
-                <a16:creationId xmlns:a16="http://schemas.microsoft.com/office/drawing/2014/main" id="{EFB3EE78-CCFD-4C87-ABE5-EE5A7B8A6949}"/>
+                <a16:creationId xmlns:a16="http://schemas.microsoft.com/office/drawing/2014/main" id="{404E61AF-1696-4D73-AD90-7438D08B38A6}"/>
               </a:ext>
             </a:extLst>
           </p:cNvPr>
@@ -21235,7 +21235,7 @@
           <p:cNvPr id="16" name="">
             <a:extLst xmlns:a="http://schemas.openxmlformats.org/drawingml/2006/main">
               <a:ext uri="{FF2B5EF4-FFF2-40B4-BE49-F238E27FC236}">
-                <a16:creationId xmlns:a16="http://schemas.microsoft.com/office/drawing/2014/main" id="{290237A0-CF5C-48F3-899A-E4EDB148C7DF}"/>
+                <a16:creationId xmlns:a16="http://schemas.microsoft.com/office/drawing/2014/main" id="{53AAA809-8B10-49CF-90FE-836B52829B49}"/>
               </a:ext>
             </a:extLst>
           </p:cNvPr>
@@ -21303,7 +21303,7 @@
           <p:cNvPr id="17" name="">
             <a:extLst xmlns:a="http://schemas.openxmlformats.org/drawingml/2006/main">
               <a:ext uri="{FF2B5EF4-FFF2-40B4-BE49-F238E27FC236}">
-                <a16:creationId xmlns:a16="http://schemas.microsoft.com/office/drawing/2014/main" id="{2EA064E7-24B2-49A2-AA4C-F6ECA8D10A51}"/>
+                <a16:creationId xmlns:a16="http://schemas.microsoft.com/office/drawing/2014/main" id="{9A94979E-8B59-4FE3-B2AA-FA34C3C17288}"/>
               </a:ext>
             </a:extLst>
           </p:cNvPr>
@@ -21333,7 +21333,7 @@
           <p:cNvPr id="18" name="">
             <a:extLst xmlns:a="http://schemas.openxmlformats.org/drawingml/2006/main">
               <a:ext uri="{FF2B5EF4-FFF2-40B4-BE49-F238E27FC236}">
-                <a16:creationId xmlns:a16="http://schemas.microsoft.com/office/drawing/2014/main" id="{E2AFF233-A98A-49B5-B8A3-04108F1298E5}"/>
+                <a16:creationId xmlns:a16="http://schemas.microsoft.com/office/drawing/2014/main" id="{86FD1EC0-7DC7-499E-B14B-2A84CED88ADF}"/>
               </a:ext>
             </a:extLst>
           </p:cNvPr>
@@ -21401,7 +21401,7 @@
           <p:cNvPr id="19" name="">
             <a:extLst xmlns:a="http://schemas.openxmlformats.org/drawingml/2006/main">
               <a:ext uri="{FF2B5EF4-FFF2-40B4-BE49-F238E27FC236}">
-                <a16:creationId xmlns:a16="http://schemas.microsoft.com/office/drawing/2014/main" id="{3B651250-02A3-4D1D-AA90-5214FC9935B5}"/>
+                <a16:creationId xmlns:a16="http://schemas.microsoft.com/office/drawing/2014/main" id="{469E5209-8A25-4B60-AEA2-15CDD73A7E6B}"/>
               </a:ext>
             </a:extLst>
           </p:cNvPr>
@@ -21467,7 +21467,7 @@
     </p:spTree>
     <p:extLst>
       <p:ext uri="{BB962C8B-B14F-4D97-AF65-F5344CB8AC3E}">
-        <p14:creationId xmlns:p14="http://schemas.microsoft.com/office/powerpoint/2010/main" val="1761661945"/>
+        <p14:creationId xmlns:p14="http://schemas.microsoft.com/office/powerpoint/2010/main" val="997392370"/>
       </p:ext>
     </p:extLst>
   </p:cSld>
@@ -21498,7 +21498,7 @@
           <p:cNvPr id="11" name="">
             <a:extLst xmlns:a="http://schemas.openxmlformats.org/drawingml/2006/main">
               <a:ext uri="{FF2B5EF4-FFF2-40B4-BE49-F238E27FC236}">
-                <a16:creationId xmlns:a16="http://schemas.microsoft.com/office/drawing/2014/main" id="{694E32BE-E84A-48BF-A37E-3BECA7E93B79}"/>
+                <a16:creationId xmlns:a16="http://schemas.microsoft.com/office/drawing/2014/main" id="{DEB0F836-DB24-4501-BB3C-6D2A60B4D96C}"/>
               </a:ext>
             </a:extLst>
           </p:cNvPr>
@@ -21566,7 +21566,7 @@
           <p:cNvPr id="2" name="">
             <a:extLst xmlns:a="http://schemas.openxmlformats.org/drawingml/2006/main">
               <a:ext uri="{FF2B5EF4-FFF2-40B4-BE49-F238E27FC236}">
-                <a16:creationId xmlns:a16="http://schemas.microsoft.com/office/drawing/2014/main" id="{23C2FF41-B30A-40A8-8DF9-7B5581F20B12}"/>
+                <a16:creationId xmlns:a16="http://schemas.microsoft.com/office/drawing/2014/main" id="{021D5046-2C67-4269-9068-6063858CD61D}"/>
               </a:ext>
             </a:extLst>
           </p:cNvPr>
@@ -21634,7 +21634,7 @@
           <p:cNvPr id="3" name="">
             <a:extLst xmlns:a="http://schemas.openxmlformats.org/drawingml/2006/main">
               <a:ext uri="{FF2B5EF4-FFF2-40B4-BE49-F238E27FC236}">
-                <a16:creationId xmlns:a16="http://schemas.microsoft.com/office/drawing/2014/main" id="{675FC4F9-40E1-4243-84BA-EE9B404375BE}"/>
+                <a16:creationId xmlns:a16="http://schemas.microsoft.com/office/drawing/2014/main" id="{40F7260B-CF68-4352-910F-39E0D3D1C76E}"/>
               </a:ext>
             </a:extLst>
           </p:cNvPr>
@@ -21664,7 +21664,7 @@
           <p:cNvPr id="4" name="">
             <a:extLst xmlns:a="http://schemas.openxmlformats.org/drawingml/2006/main">
               <a:ext uri="{FF2B5EF4-FFF2-40B4-BE49-F238E27FC236}">
-                <a16:creationId xmlns:a16="http://schemas.microsoft.com/office/drawing/2014/main" id="{589213C4-08CB-4A41-A107-4C492F768C89}"/>
+                <a16:creationId xmlns:a16="http://schemas.microsoft.com/office/drawing/2014/main" id="{866D22CA-3EA9-4559-A868-82D7D241F603}"/>
               </a:ext>
             </a:extLst>
           </p:cNvPr>
@@ -21732,7 +21732,7 @@
           <p:cNvPr id="5" name="">
             <a:extLst xmlns:a="http://schemas.openxmlformats.org/drawingml/2006/main">
               <a:ext uri="{FF2B5EF4-FFF2-40B4-BE49-F238E27FC236}">
-                <a16:creationId xmlns:a16="http://schemas.microsoft.com/office/drawing/2014/main" id="{72CD457C-E909-4961-9A80-9660FD46E4EE}"/>
+                <a16:creationId xmlns:a16="http://schemas.microsoft.com/office/drawing/2014/main" id="{EC4BF471-ECEE-465D-A830-C66CB1024A73}"/>
               </a:ext>
             </a:extLst>
           </p:cNvPr>
@@ -21800,7 +21800,7 @@
           <p:cNvPr id="6" name="">
             <a:extLst xmlns:a="http://schemas.openxmlformats.org/drawingml/2006/main">
               <a:ext uri="{FF2B5EF4-FFF2-40B4-BE49-F238E27FC236}">
-                <a16:creationId xmlns:a16="http://schemas.microsoft.com/office/drawing/2014/main" id="{6F7DDB6C-12E7-462B-B3FD-AE733E51CB33}"/>
+                <a16:creationId xmlns:a16="http://schemas.microsoft.com/office/drawing/2014/main" id="{040DE07E-F016-49FD-8215-D473049EB1DC}"/>
               </a:ext>
             </a:extLst>
           </p:cNvPr>
@@ -21868,7 +21868,7 @@
           <p:cNvPr id="7" name="">
             <a:extLst xmlns:a="http://schemas.openxmlformats.org/drawingml/2006/main">
               <a:ext uri="{FF2B5EF4-FFF2-40B4-BE49-F238E27FC236}">
-                <a16:creationId xmlns:a16="http://schemas.microsoft.com/office/drawing/2014/main" id="{2C896335-47E8-4AF0-8509-8A78B6C00685}"/>
+                <a16:creationId xmlns:a16="http://schemas.microsoft.com/office/drawing/2014/main" id="{B435BBE1-9768-477F-BF86-E6125118F7DA}"/>
               </a:ext>
             </a:extLst>
           </p:cNvPr>
@@ -21898,7 +21898,7 @@
           <p:cNvPr id="8" name="">
             <a:extLst xmlns:a="http://schemas.openxmlformats.org/drawingml/2006/main">
               <a:ext uri="{FF2B5EF4-FFF2-40B4-BE49-F238E27FC236}">
-                <a16:creationId xmlns:a16="http://schemas.microsoft.com/office/drawing/2014/main" id="{0E21D7EA-1DC5-49C4-8775-4B37BAE0778F}"/>
+                <a16:creationId xmlns:a16="http://schemas.microsoft.com/office/drawing/2014/main" id="{4157AA36-56F4-486E-8344-D55CCFF1068C}"/>
               </a:ext>
             </a:extLst>
           </p:cNvPr>
@@ -21989,7 +21989,7 @@
           <p:cNvPr id="9" name="">
             <a:extLst xmlns:a="http://schemas.openxmlformats.org/drawingml/2006/main">
               <a:ext uri="{FF2B5EF4-FFF2-40B4-BE49-F238E27FC236}">
-                <a16:creationId xmlns:a16="http://schemas.microsoft.com/office/drawing/2014/main" id="{070DCFBB-B566-4F6A-9131-B5ED15D0BF86}"/>
+                <a16:creationId xmlns:a16="http://schemas.microsoft.com/office/drawing/2014/main" id="{B77129A1-95F5-435C-8095-757E2D457FB3}"/>
               </a:ext>
             </a:extLst>
           </p:cNvPr>
@@ -22080,7 +22080,7 @@
           <p:cNvPr id="10" name="">
             <a:extLst xmlns:a="http://schemas.openxmlformats.org/drawingml/2006/main">
               <a:ext uri="{FF2B5EF4-FFF2-40B4-BE49-F238E27FC236}">
-                <a16:creationId xmlns:a16="http://schemas.microsoft.com/office/drawing/2014/main" id="{3D69B4C0-921A-4006-8FED-4A92D411ACD7}"/>
+                <a16:creationId xmlns:a16="http://schemas.microsoft.com/office/drawing/2014/main" id="{4C997125-D534-47BE-B668-6000BC0F6D47}"/>
               </a:ext>
             </a:extLst>
           </p:cNvPr>
@@ -22146,7 +22146,7 @@
     </p:spTree>
     <p:extLst>
       <p:ext uri="{BB962C8B-B14F-4D97-AF65-F5344CB8AC3E}">
-        <p14:creationId xmlns:p14="http://schemas.microsoft.com/office/powerpoint/2010/main" val="1025056934"/>
+        <p14:creationId xmlns:p14="http://schemas.microsoft.com/office/powerpoint/2010/main" val="1405807799"/>
       </p:ext>
     </p:extLst>
   </p:cSld>
@@ -22177,7 +22177,7 @@
           <p:cNvPr id="14" name="">
             <a:extLst xmlns:a="http://schemas.openxmlformats.org/drawingml/2006/main">
               <a:ext uri="{FF2B5EF4-FFF2-40B4-BE49-F238E27FC236}">
-                <a16:creationId xmlns:a16="http://schemas.microsoft.com/office/drawing/2014/main" id="{C977D397-C675-4055-9513-C2F42843800C}"/>
+                <a16:creationId xmlns:a16="http://schemas.microsoft.com/office/drawing/2014/main" id="{8900D805-9224-4EB9-9705-C2B87A747E93}"/>
               </a:ext>
             </a:extLst>
           </p:cNvPr>
@@ -22245,7 +22245,7 @@
           <p:cNvPr id="2" name="">
             <a:extLst xmlns:a="http://schemas.openxmlformats.org/drawingml/2006/main">
               <a:ext uri="{FF2B5EF4-FFF2-40B4-BE49-F238E27FC236}">
-                <a16:creationId xmlns:a16="http://schemas.microsoft.com/office/drawing/2014/main" id="{5197B683-7267-4610-89A3-9735B018474A}"/>
+                <a16:creationId xmlns:a16="http://schemas.microsoft.com/office/drawing/2014/main" id="{BAFB8D8F-2512-47AE-A043-EB78D91701BC}"/>
               </a:ext>
             </a:extLst>
           </p:cNvPr>
@@ -22313,7 +22313,7 @@
           <p:cNvPr id="3" name="">
             <a:extLst xmlns:a="http://schemas.openxmlformats.org/drawingml/2006/main">
               <a:ext uri="{FF2B5EF4-FFF2-40B4-BE49-F238E27FC236}">
-                <a16:creationId xmlns:a16="http://schemas.microsoft.com/office/drawing/2014/main" id="{BFBF62DB-5D21-4210-9BCE-F9F646C9AB0B}"/>
+                <a16:creationId xmlns:a16="http://schemas.microsoft.com/office/drawing/2014/main" id="{48F729DA-FDFD-4CF3-B988-62543DB48B8A}"/>
               </a:ext>
             </a:extLst>
           </p:cNvPr>
@@ -22343,7 +22343,7 @@
           <p:cNvPr id="4" name="">
             <a:extLst xmlns:a="http://schemas.openxmlformats.org/drawingml/2006/main">
               <a:ext uri="{FF2B5EF4-FFF2-40B4-BE49-F238E27FC236}">
-                <a16:creationId xmlns:a16="http://schemas.microsoft.com/office/drawing/2014/main" id="{F2E8FF77-330A-4D07-B013-63CB87D28DBF}"/>
+                <a16:creationId xmlns:a16="http://schemas.microsoft.com/office/drawing/2014/main" id="{60E459A3-90BF-4A8D-9D00-A660C814F6AA}"/>
               </a:ext>
             </a:extLst>
           </p:cNvPr>
@@ -22411,7 +22411,7 @@
           <p:cNvPr id="5" name="">
             <a:extLst xmlns:a="http://schemas.openxmlformats.org/drawingml/2006/main">
               <a:ext uri="{FF2B5EF4-FFF2-40B4-BE49-F238E27FC236}">
-                <a16:creationId xmlns:a16="http://schemas.microsoft.com/office/drawing/2014/main" id="{C75E5EA9-F89D-41E0-B98B-223D6B3DF4BB}"/>
+                <a16:creationId xmlns:a16="http://schemas.microsoft.com/office/drawing/2014/main" id="{40D18D53-BA8C-45C7-81FA-724616C22A02}"/>
               </a:ext>
             </a:extLst>
           </p:cNvPr>
@@ -22479,7 +22479,7 @@
           <p:cNvPr id="6" name="">
             <a:extLst xmlns:a="http://schemas.openxmlformats.org/drawingml/2006/main">
               <a:ext uri="{FF2B5EF4-FFF2-40B4-BE49-F238E27FC236}">
-                <a16:creationId xmlns:a16="http://schemas.microsoft.com/office/drawing/2014/main" id="{453F1C59-3241-4B8E-A0A1-DCC6F0364C86}"/>
+                <a16:creationId xmlns:a16="http://schemas.microsoft.com/office/drawing/2014/main" id="{E47BDA8F-E53B-45F3-A208-503764B8BB8D}"/>
               </a:ext>
             </a:extLst>
           </p:cNvPr>
@@ -22570,7 +22570,7 @@
           <p:cNvPr id="7" name="">
             <a:extLst xmlns:a="http://schemas.openxmlformats.org/drawingml/2006/main">
               <a:ext uri="{FF2B5EF4-FFF2-40B4-BE49-F238E27FC236}">
-                <a16:creationId xmlns:a16="http://schemas.microsoft.com/office/drawing/2014/main" id="{4E360019-1549-49D1-8892-DBE456524722}"/>
+                <a16:creationId xmlns:a16="http://schemas.microsoft.com/office/drawing/2014/main" id="{191545D7-4719-45AF-AED5-ADEEC672682C}"/>
               </a:ext>
             </a:extLst>
           </p:cNvPr>
@@ -22638,7 +22638,7 @@
           <p:cNvPr id="8" name="">
             <a:extLst xmlns:a="http://schemas.openxmlformats.org/drawingml/2006/main">
               <a:ext uri="{FF2B5EF4-FFF2-40B4-BE49-F238E27FC236}">
-                <a16:creationId xmlns:a16="http://schemas.microsoft.com/office/drawing/2014/main" id="{7D6837F2-5D2A-40D8-8296-1B5B82DAAEDA}"/>
+                <a16:creationId xmlns:a16="http://schemas.microsoft.com/office/drawing/2014/main" id="{CFCFBE18-A88F-4DDC-B1B6-51C1EC0EECE5}"/>
               </a:ext>
             </a:extLst>
           </p:cNvPr>
@@ -22729,7 +22729,7 @@
           <p:cNvPr id="9" name="">
             <a:extLst xmlns:a="http://schemas.openxmlformats.org/drawingml/2006/main">
               <a:ext uri="{FF2B5EF4-FFF2-40B4-BE49-F238E27FC236}">
-                <a16:creationId xmlns:a16="http://schemas.microsoft.com/office/drawing/2014/main" id="{043F2400-789F-4B18-8521-8FFDD38128F2}"/>
+                <a16:creationId xmlns:a16="http://schemas.microsoft.com/office/drawing/2014/main" id="{10CADC4B-EFD7-4A95-A8AD-DDDF1E638B33}"/>
               </a:ext>
             </a:extLst>
           </p:cNvPr>
@@ -22797,7 +22797,7 @@
           <p:cNvPr id="10" name="">
             <a:extLst xmlns:a="http://schemas.openxmlformats.org/drawingml/2006/main">
               <a:ext uri="{FF2B5EF4-FFF2-40B4-BE49-F238E27FC236}">
-                <a16:creationId xmlns:a16="http://schemas.microsoft.com/office/drawing/2014/main" id="{C5CE5CE0-1EB3-4FDF-BA4F-AA9049CC81EA}"/>
+                <a16:creationId xmlns:a16="http://schemas.microsoft.com/office/drawing/2014/main" id="{CE459B62-D6E4-40F5-8D6E-12D928B3A720}"/>
               </a:ext>
             </a:extLst>
           </p:cNvPr>
@@ -22888,7 +22888,7 @@
           <p:cNvPr id="11" name="">
             <a:extLst xmlns:a="http://schemas.openxmlformats.org/drawingml/2006/main">
               <a:ext uri="{FF2B5EF4-FFF2-40B4-BE49-F238E27FC236}">
-                <a16:creationId xmlns:a16="http://schemas.microsoft.com/office/drawing/2014/main" id="{3828ABB9-E8C6-42D1-A052-9311537C7666}"/>
+                <a16:creationId xmlns:a16="http://schemas.microsoft.com/office/drawing/2014/main" id="{AA3AE0C5-041F-46A2-8B5C-8207E1B99C2B}"/>
               </a:ext>
             </a:extLst>
           </p:cNvPr>
@@ -22956,7 +22956,7 @@
           <p:cNvPr id="12" name="">
             <a:extLst xmlns:a="http://schemas.openxmlformats.org/drawingml/2006/main">
               <a:ext uri="{FF2B5EF4-FFF2-40B4-BE49-F238E27FC236}">
-                <a16:creationId xmlns:a16="http://schemas.microsoft.com/office/drawing/2014/main" id="{4CE20DBE-C44F-414E-B942-DD3CCF81C387}"/>
+                <a16:creationId xmlns:a16="http://schemas.microsoft.com/office/drawing/2014/main" id="{1CE729EE-EDAA-4C50-8DE5-2D98AD4A1B6A}"/>
               </a:ext>
             </a:extLst>
           </p:cNvPr>
@@ -23047,7 +23047,7 @@
           <p:cNvPr id="13" name="">
             <a:extLst xmlns:a="http://schemas.openxmlformats.org/drawingml/2006/main">
               <a:ext uri="{FF2B5EF4-FFF2-40B4-BE49-F238E27FC236}">
-                <a16:creationId xmlns:a16="http://schemas.microsoft.com/office/drawing/2014/main" id="{E680C70C-5965-446D-B678-3307025EA703}"/>
+                <a16:creationId xmlns:a16="http://schemas.microsoft.com/office/drawing/2014/main" id="{571C04B3-6765-4899-90F6-5F274AA4935D}"/>
               </a:ext>
             </a:extLst>
           </p:cNvPr>
@@ -23113,7 +23113,7 @@
     </p:spTree>
     <p:extLst>
       <p:ext uri="{BB962C8B-B14F-4D97-AF65-F5344CB8AC3E}">
-        <p14:creationId xmlns:p14="http://schemas.microsoft.com/office/powerpoint/2010/main" val="1729100645"/>
+        <p14:creationId xmlns:p14="http://schemas.microsoft.com/office/powerpoint/2010/main" val="1339367502"/>
       </p:ext>
     </p:extLst>
   </p:cSld>
@@ -23144,7 +23144,7 @@
           <p:cNvPr id="19" name="">
             <a:extLst xmlns:a="http://schemas.openxmlformats.org/drawingml/2006/main">
               <a:ext uri="{FF2B5EF4-FFF2-40B4-BE49-F238E27FC236}">
-                <a16:creationId xmlns:a16="http://schemas.microsoft.com/office/drawing/2014/main" id="{BB394DCF-13A1-4ECA-AF52-1004CEC965B9}"/>
+                <a16:creationId xmlns:a16="http://schemas.microsoft.com/office/drawing/2014/main" id="{6C6989B7-F343-4632-8762-A93E235CB9C1}"/>
               </a:ext>
             </a:extLst>
           </p:cNvPr>
@@ -23175,7 +23175,7 @@
           <p:cNvPr id="18" name="">
             <a:extLst xmlns:a="http://schemas.openxmlformats.org/drawingml/2006/main">
               <a:ext uri="{FF2B5EF4-FFF2-40B4-BE49-F238E27FC236}">
-                <a16:creationId xmlns:a16="http://schemas.microsoft.com/office/drawing/2014/main" id="{62A480AD-9DD3-4F4A-9C93-B10F9D902B40}"/>
+                <a16:creationId xmlns:a16="http://schemas.microsoft.com/office/drawing/2014/main" id="{B59B3562-267A-4AEB-9031-C7D00CC4872F}"/>
               </a:ext>
             </a:extLst>
           </p:cNvPr>
@@ -23206,7 +23206,7 @@
           <p:cNvPr id="17" name="">
             <a:extLst xmlns:a="http://schemas.openxmlformats.org/drawingml/2006/main">
               <a:ext uri="{FF2B5EF4-FFF2-40B4-BE49-F238E27FC236}">
-                <a16:creationId xmlns:a16="http://schemas.microsoft.com/office/drawing/2014/main" id="{D641B41E-01EE-4604-B26E-5A95C33EB515}"/>
+                <a16:creationId xmlns:a16="http://schemas.microsoft.com/office/drawing/2014/main" id="{106D90EF-CF76-4CB7-8993-5AF1C3424FC8}"/>
               </a:ext>
             </a:extLst>
           </p:cNvPr>
@@ -23237,7 +23237,7 @@
           <p:cNvPr id="16" name="">
             <a:extLst xmlns:a="http://schemas.openxmlformats.org/drawingml/2006/main">
               <a:ext uri="{FF2B5EF4-FFF2-40B4-BE49-F238E27FC236}">
-                <a16:creationId xmlns:a16="http://schemas.microsoft.com/office/drawing/2014/main" id="{FCDB84A6-E1FB-4229-83C3-D5431FDA2044}"/>
+                <a16:creationId xmlns:a16="http://schemas.microsoft.com/office/drawing/2014/main" id="{AA18615D-62F2-4BE9-A2A6-4C6E5FE8A169}"/>
               </a:ext>
             </a:extLst>
           </p:cNvPr>
@@ -23268,7 +23268,7 @@
           <p:cNvPr id="15" name="">
             <a:extLst xmlns:a="http://schemas.openxmlformats.org/drawingml/2006/main">
               <a:ext uri="{FF2B5EF4-FFF2-40B4-BE49-F238E27FC236}">
-                <a16:creationId xmlns:a16="http://schemas.microsoft.com/office/drawing/2014/main" id="{F0C76F1D-EE3F-44A4-B5D4-D4921EC347B5}"/>
+                <a16:creationId xmlns:a16="http://schemas.microsoft.com/office/drawing/2014/main" id="{246C4EB2-3CA7-4934-9E55-44BEFC1EDE85}"/>
               </a:ext>
             </a:extLst>
           </p:cNvPr>
@@ -23299,7 +23299,7 @@
           <p:cNvPr id="14" name="">
             <a:extLst xmlns:a="http://schemas.openxmlformats.org/drawingml/2006/main">
               <a:ext uri="{FF2B5EF4-FFF2-40B4-BE49-F238E27FC236}">
-                <a16:creationId xmlns:a16="http://schemas.microsoft.com/office/drawing/2014/main" id="{C42B9907-AE44-4B43-947F-ED17973384E4}"/>
+                <a16:creationId xmlns:a16="http://schemas.microsoft.com/office/drawing/2014/main" id="{82A17344-D993-476C-A2EA-94044CF82ED4}"/>
               </a:ext>
             </a:extLst>
           </p:cNvPr>
@@ -23330,7 +23330,7 @@
           <p:cNvPr id="13" name="">
             <a:extLst xmlns:a="http://schemas.openxmlformats.org/drawingml/2006/main">
               <a:ext uri="{FF2B5EF4-FFF2-40B4-BE49-F238E27FC236}">
-                <a16:creationId xmlns:a16="http://schemas.microsoft.com/office/drawing/2014/main" id="{83E54198-ADC5-4A6D-B551-B595CFBE6784}"/>
+                <a16:creationId xmlns:a16="http://schemas.microsoft.com/office/drawing/2014/main" id="{A3130CD2-344C-4C0F-9879-6B8B48727D7E}"/>
               </a:ext>
             </a:extLst>
           </p:cNvPr>
@@ -23361,7 +23361,7 @@
           <p:cNvPr id="21" name="">
             <a:extLst xmlns:a="http://schemas.openxmlformats.org/drawingml/2006/main">
               <a:ext uri="{FF2B5EF4-FFF2-40B4-BE49-F238E27FC236}">
-                <a16:creationId xmlns:a16="http://schemas.microsoft.com/office/drawing/2014/main" id="{5D141862-FCAB-43CA-B0E0-8B6C5D8A68AF}"/>
+                <a16:creationId xmlns:a16="http://schemas.microsoft.com/office/drawing/2014/main" id="{633DBE4E-C1A2-44EE-A766-FB3B14FF342E}"/>
               </a:ext>
             </a:extLst>
           </p:cNvPr>
@@ -23429,7 +23429,7 @@
           <p:cNvPr id="2" name="">
             <a:extLst xmlns:a="http://schemas.openxmlformats.org/drawingml/2006/main">
               <a:ext uri="{FF2B5EF4-FFF2-40B4-BE49-F238E27FC236}">
-                <a16:creationId xmlns:a16="http://schemas.microsoft.com/office/drawing/2014/main" id="{F8B4D73D-01DF-4EB6-9755-BBB9E0848808}"/>
+                <a16:creationId xmlns:a16="http://schemas.microsoft.com/office/drawing/2014/main" id="{0CFA148E-742E-4BC5-B7A8-69708BE67B42}"/>
               </a:ext>
             </a:extLst>
           </p:cNvPr>
@@ -23497,7 +23497,7 @@
           <p:cNvPr id="3" name="">
             <a:extLst xmlns:a="http://schemas.openxmlformats.org/drawingml/2006/main">
               <a:ext uri="{FF2B5EF4-FFF2-40B4-BE49-F238E27FC236}">
-                <a16:creationId xmlns:a16="http://schemas.microsoft.com/office/drawing/2014/main" id="{252C9F3C-9788-4B4E-968A-953F385AE0CA}"/>
+                <a16:creationId xmlns:a16="http://schemas.microsoft.com/office/drawing/2014/main" id="{7E913877-B62D-475F-A6E6-B0D6E88C70EF}"/>
               </a:ext>
             </a:extLst>
           </p:cNvPr>
@@ -23527,7 +23527,7 @@
           <p:cNvPr id="4" name="">
             <a:extLst xmlns:a="http://schemas.openxmlformats.org/drawingml/2006/main">
               <a:ext uri="{FF2B5EF4-FFF2-40B4-BE49-F238E27FC236}">
-                <a16:creationId xmlns:a16="http://schemas.microsoft.com/office/drawing/2014/main" id="{57E943AA-2A98-4A3D-A80D-CC8018458142}"/>
+                <a16:creationId xmlns:a16="http://schemas.microsoft.com/office/drawing/2014/main" id="{B50DF969-93BC-4843-BD5D-53CE61F858F8}"/>
               </a:ext>
             </a:extLst>
           </p:cNvPr>
@@ -23595,7 +23595,7 @@
           <p:cNvPr id="5" name="">
             <a:extLst xmlns:a="http://schemas.openxmlformats.org/drawingml/2006/main">
               <a:ext uri="{FF2B5EF4-FFF2-40B4-BE49-F238E27FC236}">
-                <a16:creationId xmlns:a16="http://schemas.microsoft.com/office/drawing/2014/main" id="{5F1D66DA-DCA0-40E6-852A-74B2AC521B70}"/>
+                <a16:creationId xmlns:a16="http://schemas.microsoft.com/office/drawing/2014/main" id="{43AF7F2F-3056-474D-8B55-BB122BE3B142}"/>
               </a:ext>
             </a:extLst>
           </p:cNvPr>
@@ -23686,7 +23686,7 @@
           <p:cNvPr id="6" name="">
             <a:extLst xmlns:a="http://schemas.openxmlformats.org/drawingml/2006/main">
               <a:ext uri="{FF2B5EF4-FFF2-40B4-BE49-F238E27FC236}">
-                <a16:creationId xmlns:a16="http://schemas.microsoft.com/office/drawing/2014/main" id="{35A3DCEC-A8E9-4787-B2C3-3B9574A3C957}"/>
+                <a16:creationId xmlns:a16="http://schemas.microsoft.com/office/drawing/2014/main" id="{35FE11A0-5056-4B48-925D-2603322BF51D}"/>
               </a:ext>
             </a:extLst>
           </p:cNvPr>
@@ -23777,7 +23777,7 @@
           <p:cNvPr id="7" name="">
             <a:extLst xmlns:a="http://schemas.openxmlformats.org/drawingml/2006/main">
               <a:ext uri="{FF2B5EF4-FFF2-40B4-BE49-F238E27FC236}">
-                <a16:creationId xmlns:a16="http://schemas.microsoft.com/office/drawing/2014/main" id="{5045D544-1309-4C51-8A0B-01C1CDB46C23}"/>
+                <a16:creationId xmlns:a16="http://schemas.microsoft.com/office/drawing/2014/main" id="{7FACA379-D179-4F29-91B8-CBC7A0A54025}"/>
               </a:ext>
             </a:extLst>
           </p:cNvPr>
@@ -23868,7 +23868,7 @@
           <p:cNvPr id="8" name="">
             <a:extLst xmlns:a="http://schemas.openxmlformats.org/drawingml/2006/main">
               <a:ext uri="{FF2B5EF4-FFF2-40B4-BE49-F238E27FC236}">
-                <a16:creationId xmlns:a16="http://schemas.microsoft.com/office/drawing/2014/main" id="{BF4210BE-DD9A-47D9-9975-1181B3508B66}"/>
+                <a16:creationId xmlns:a16="http://schemas.microsoft.com/office/drawing/2014/main" id="{0DCB7FD4-17B2-42E4-9B6A-F0B375CC1AAE}"/>
               </a:ext>
             </a:extLst>
           </p:cNvPr>
@@ -23959,7 +23959,7 @@
           <p:cNvPr id="9" name="">
             <a:extLst xmlns:a="http://schemas.openxmlformats.org/drawingml/2006/main">
               <a:ext uri="{FF2B5EF4-FFF2-40B4-BE49-F238E27FC236}">
-                <a16:creationId xmlns:a16="http://schemas.microsoft.com/office/drawing/2014/main" id="{B87F29AE-CF44-4306-865A-B91173F6B7D2}"/>
+                <a16:creationId xmlns:a16="http://schemas.microsoft.com/office/drawing/2014/main" id="{3189E756-E1EA-43FA-9827-96162EC5A287}"/>
               </a:ext>
             </a:extLst>
           </p:cNvPr>
@@ -24050,7 +24050,7 @@
           <p:cNvPr id="10" name="">
             <a:extLst xmlns:a="http://schemas.openxmlformats.org/drawingml/2006/main">
               <a:ext uri="{FF2B5EF4-FFF2-40B4-BE49-F238E27FC236}">
-                <a16:creationId xmlns:a16="http://schemas.microsoft.com/office/drawing/2014/main" id="{7D1FAF43-0897-4B89-A94A-89E4F6F8BAFC}"/>
+                <a16:creationId xmlns:a16="http://schemas.microsoft.com/office/drawing/2014/main" id="{39003727-E84B-4B93-AF7C-BE2152199980}"/>
               </a:ext>
             </a:extLst>
           </p:cNvPr>
@@ -24141,7 +24141,7 @@
           <p:cNvPr id="11" name="">
             <a:extLst xmlns:a="http://schemas.openxmlformats.org/drawingml/2006/main">
               <a:ext uri="{FF2B5EF4-FFF2-40B4-BE49-F238E27FC236}">
-                <a16:creationId xmlns:a16="http://schemas.microsoft.com/office/drawing/2014/main" id="{46A23A02-9045-44CD-973C-144BD2F9185F}"/>
+                <a16:creationId xmlns:a16="http://schemas.microsoft.com/office/drawing/2014/main" id="{CDFA9261-308C-4639-8EE0-165A68D7A47E}"/>
               </a:ext>
             </a:extLst>
           </p:cNvPr>
@@ -24232,7 +24232,7 @@
           <p:cNvPr id="12" name="">
             <a:extLst xmlns:a="http://schemas.openxmlformats.org/drawingml/2006/main">
               <a:ext uri="{FF2B5EF4-FFF2-40B4-BE49-F238E27FC236}">
-                <a16:creationId xmlns:a16="http://schemas.microsoft.com/office/drawing/2014/main" id="{77CEDCD0-77DA-4B5D-9089-44705FE2C2DB}"/>
+                <a16:creationId xmlns:a16="http://schemas.microsoft.com/office/drawing/2014/main" id="{064C0329-6B76-4C6C-8241-25FA74498101}"/>
               </a:ext>
             </a:extLst>
           </p:cNvPr>
@@ -24323,7 +24323,7 @@
           <p:cNvPr id="20" name="">
             <a:extLst xmlns:a="http://schemas.openxmlformats.org/drawingml/2006/main">
               <a:ext uri="{FF2B5EF4-FFF2-40B4-BE49-F238E27FC236}">
-                <a16:creationId xmlns:a16="http://schemas.microsoft.com/office/drawing/2014/main" id="{8C6E7A7B-6926-479A-A3E8-EC2578C51B8E}"/>
+                <a16:creationId xmlns:a16="http://schemas.microsoft.com/office/drawing/2014/main" id="{C3C74063-84BE-4AD4-958D-087149B11CD8}"/>
               </a:ext>
             </a:extLst>
           </p:cNvPr>
@@ -24389,7 +24389,7 @@
     </p:spTree>
     <p:extLst>
       <p:ext uri="{BB962C8B-B14F-4D97-AF65-F5344CB8AC3E}">
-        <p14:creationId xmlns:p14="http://schemas.microsoft.com/office/powerpoint/2010/main" val="2101076813"/>
+        <p14:creationId xmlns:p14="http://schemas.microsoft.com/office/powerpoint/2010/main" val="15303737"/>
       </p:ext>
     </p:extLst>
   </p:cSld>
